--- a/output/presentations/12-safety-security.pptx
+++ b/output/presentations/12-safety-security.pptx
@@ -2,22 +2,24 @@
 <file path=ppt/presentation.xml><?xml version="1.0" encoding="utf-8"?>
 <p:presentation xmlns:p="http://schemas.openxmlformats.org/presentationml/2006/main">
   <p:sldMasterIdLst>
-    <p:sldMasterId xmlns:r="http://schemas.openxmlformats.org/officeDocument/2006/relationships" id="2147483648" r:id="R0949d4e1156f4bee"/>
+    <p:sldMasterId xmlns:r="http://schemas.openxmlformats.org/officeDocument/2006/relationships" id="2147483648" r:id="R974a0da209e1417c"/>
   </p:sldMasterIdLst>
   <p:notesMasterIdLst>
-    <p:notesMasterId xmlns:r="http://schemas.openxmlformats.org/officeDocument/2006/relationships" r:id="R8f224d0294d54019"/>
+    <p:notesMasterId xmlns:r="http://schemas.openxmlformats.org/officeDocument/2006/relationships" r:id="R36dcf76de7364fa9"/>
   </p:notesMasterIdLst>
   <p:sldIdLst>
-    <p:sldId xmlns:r="http://schemas.openxmlformats.org/officeDocument/2006/relationships" id="256" r:id="R207c36e775664a6b"/>
-    <p:sldId xmlns:r="http://schemas.openxmlformats.org/officeDocument/2006/relationships" id="257" r:id="R52ecc2a6e1b54769"/>
-    <p:sldId xmlns:r="http://schemas.openxmlformats.org/officeDocument/2006/relationships" id="258" r:id="R1f3bc343c8304ae4"/>
-    <p:sldId xmlns:r="http://schemas.openxmlformats.org/officeDocument/2006/relationships" id="259" r:id="Ra32b2fe5e0a544bc"/>
-    <p:sldId xmlns:r="http://schemas.openxmlformats.org/officeDocument/2006/relationships" id="260" r:id="R15b0f1c099d346e7"/>
-    <p:sldId xmlns:r="http://schemas.openxmlformats.org/officeDocument/2006/relationships" id="261" r:id="R8c24732c7b9a4e2c"/>
-    <p:sldId xmlns:r="http://schemas.openxmlformats.org/officeDocument/2006/relationships" id="262" r:id="R21cf300da83541cc"/>
-    <p:sldId xmlns:r="http://schemas.openxmlformats.org/officeDocument/2006/relationships" id="263" r:id="R6c237ffb03f245de"/>
-    <p:sldId xmlns:r="http://schemas.openxmlformats.org/officeDocument/2006/relationships" id="264" r:id="Re04cf3db36af4d79"/>
-    <p:sldId xmlns:r="http://schemas.openxmlformats.org/officeDocument/2006/relationships" id="265" r:id="R851b6602f37f435a"/>
+    <p:sldId xmlns:r="http://schemas.openxmlformats.org/officeDocument/2006/relationships" id="256" r:id="Re803833f496844bf"/>
+    <p:sldId xmlns:r="http://schemas.openxmlformats.org/officeDocument/2006/relationships" id="257" r:id="R7e82e9207c894deb"/>
+    <p:sldId xmlns:r="http://schemas.openxmlformats.org/officeDocument/2006/relationships" id="258" r:id="Rc21ef5a39d564b9f"/>
+    <p:sldId xmlns:r="http://schemas.openxmlformats.org/officeDocument/2006/relationships" id="259" r:id="Reb5e42b54034446f"/>
+    <p:sldId xmlns:r="http://schemas.openxmlformats.org/officeDocument/2006/relationships" id="260" r:id="Rd54e620bbd22490f"/>
+    <p:sldId xmlns:r="http://schemas.openxmlformats.org/officeDocument/2006/relationships" id="261" r:id="R7df34bbcf42949d2"/>
+    <p:sldId xmlns:r="http://schemas.openxmlformats.org/officeDocument/2006/relationships" id="262" r:id="Re42b0c53070d4505"/>
+    <p:sldId xmlns:r="http://schemas.openxmlformats.org/officeDocument/2006/relationships" id="263" r:id="R1fe2ab0b17304449"/>
+    <p:sldId xmlns:r="http://schemas.openxmlformats.org/officeDocument/2006/relationships" id="264" r:id="Rd700635fd0f940a5"/>
+    <p:sldId xmlns:r="http://schemas.openxmlformats.org/officeDocument/2006/relationships" id="265" r:id="R250a754750e04fec"/>
+    <p:sldId xmlns:r="http://schemas.openxmlformats.org/officeDocument/2006/relationships" id="266" r:id="R813834d9639d4272"/>
+    <p:sldId xmlns:r="http://schemas.openxmlformats.org/officeDocument/2006/relationships" id="267" r:id="Rc6d8fda968fa4500"/>
   </p:sldIdLst>
   <p:sldSz cx="12192000" cy="6858000"/>
   <p:notesSz cx="6858000" cy="9144000"/>
@@ -461,12 +463,57 @@
           </a:p>
           <a:p xmlns:a="http://schemas.openxmlformats.org/drawingml/2006/main">
             <a:r>
+              <a:t>Edition: 2026-09-09</a:t>
+            </a:r>
+          </a:p>
+          <a:p xmlns:a="http://schemas.openxmlformats.org/drawingml/2006/main">
+            <a:r>
+              <a:t/>
+            </a:r>
+          </a:p>
+          <a:p xmlns:a="http://schemas.openxmlformats.org/drawingml/2006/main">
+            <a:r>
               <a:t>[Sources]</a:t>
             </a:r>
           </a:p>
           <a:p xmlns:a="http://schemas.openxmlformats.org/drawingml/2006/main">
             <a:r>
-              <a:t>- Supplied source presentation: 12-safety-security.pdf</a:t>
+              <a:t>- Original source presentation: 12-safety-security.pdf</a:t>
+            </a:r>
+          </a:p>
+          <a:p xmlns:a="http://schemas.openxmlformats.org/drawingml/2006/main">
+            <a:r>
+              <a:t>- P1: GPT-Red: Automated Red Teaming via Self-Play at Scale. OpenAI technical paper, 2026-07-15. https://cdn.openai.com/pdf/gpt-red-automated-red-teaming-via-self-play-at-scale.pdf Self-play and held-out adversarial evaluation. Classroom policy checks do not reproduce this training.</a:t>
+            </a:r>
+          </a:p>
+          <a:p xmlns:a="http://schemas.openxmlformats.org/drawingml/2006/main">
+            <a:r>
+              <a:t>- S3: LangGraph interrupts. LangChain documentation, accessed, 2026-09-09. https://docs.langchain.com/oss/python/langgraph/interrupts Resume restarts the interrupted node. Put effects after approval and make replay safe.</a:t>
+            </a:r>
+          </a:p>
+          <a:p xmlns:a="http://schemas.openxmlformats.org/drawingml/2006/main">
+            <a:r>
+              <a:t/>
+            </a:r>
+          </a:p>
+          <a:p xmlns:a="http://schemas.openxmlformats.org/drawingml/2006/main">
+            <a:r>
+              <a:t>[Assessed practice]</a:t>
+            </a:r>
+          </a:p>
+          <a:p xmlns:a="http://schemas.openxmlformats.org/drawingml/2006/main">
+            <a:r>
+              <a:t>Complete Lab 8. Submit one valid request, one injection-shaped proposal, and one replay with changed arguments. Identify the trusted reviewer channel.</a:t>
+            </a:r>
+          </a:p>
+          <a:p xmlns:a="http://schemas.openxmlformats.org/drawingml/2006/main">
+            <a:r>
+              <a:t>Acceptance: Rejected actions create no ledger entry. A retry with the same ID cannot duplicate the effect, and changed payload reuse fails.</a:t>
+            </a:r>
+          </a:p>
+          <a:p xmlns:a="http://schemas.openxmlformats.org/drawingml/2006/main">
+            <a:r>
+              <a:t>Lab: labs/08_langgraph_approval_security.ipynb</a:t>
             </a:r>
           </a:p>
         </p:txBody>
@@ -536,6 +583,136 @@
           <a:lstStyle xmlns:a="http://schemas.openxmlformats.org/drawingml/2006/main"/>
           <a:p xmlns:a="http://schemas.openxmlformats.org/drawingml/2006/main">
             <a:r>
+              <a:t>Use as retrieval practice. Ask for an answer that defines, compares, traces, and evaluates.</a:t>
+            </a:r>
+          </a:p>
+          <a:p xmlns:a="http://schemas.openxmlformats.org/drawingml/2006/main">
+            <a:r>
+              <a:t/>
+            </a:r>
+          </a:p>
+          <a:p xmlns:a="http://schemas.openxmlformats.org/drawingml/2006/main">
+            <a:r>
+              <a:t>Edition: 2026-09-09</a:t>
+            </a:r>
+          </a:p>
+          <a:p xmlns:a="http://schemas.openxmlformats.org/drawingml/2006/main">
+            <a:r>
+              <a:t/>
+            </a:r>
+          </a:p>
+          <a:p xmlns:a="http://schemas.openxmlformats.org/drawingml/2006/main">
+            <a:r>
+              <a:t>[Sources]</a:t>
+            </a:r>
+          </a:p>
+          <a:p xmlns:a="http://schemas.openxmlformats.org/drawingml/2006/main">
+            <a:r>
+              <a:t>- Original source presentation: 12-safety-security.pdf</a:t>
+            </a:r>
+          </a:p>
+          <a:p xmlns:a="http://schemas.openxmlformats.org/drawingml/2006/main">
+            <a:r>
+              <a:t>- P1: GPT-Red: Automated Red Teaming via Self-Play at Scale. OpenAI technical paper, 2026-07-15. https://cdn.openai.com/pdf/gpt-red-automated-red-teaming-via-self-play-at-scale.pdf Self-play and held-out adversarial evaluation. Classroom policy checks do not reproduce this training.</a:t>
+            </a:r>
+          </a:p>
+          <a:p xmlns:a="http://schemas.openxmlformats.org/drawingml/2006/main">
+            <a:r>
+              <a:t>- S3: LangGraph interrupts. LangChain documentation, accessed, 2026-09-09. https://docs.langchain.com/oss/python/langgraph/interrupts Resume restarts the interrupted node. Put effects after approval and make replay safe.</a:t>
+            </a:r>
+          </a:p>
+          <a:p xmlns:a="http://schemas.openxmlformats.org/drawingml/2006/main">
+            <a:r>
+              <a:t/>
+            </a:r>
+          </a:p>
+          <a:p xmlns:a="http://schemas.openxmlformats.org/drawingml/2006/main">
+            <a:r>
+              <a:t>[Assessed practice]</a:t>
+            </a:r>
+          </a:p>
+          <a:p xmlns:a="http://schemas.openxmlformats.org/drawingml/2006/main">
+            <a:r>
+              <a:t>Complete Lab 8. Submit one valid request, one injection-shaped proposal, and one replay with changed arguments. Identify the trusted reviewer channel.</a:t>
+            </a:r>
+          </a:p>
+          <a:p xmlns:a="http://schemas.openxmlformats.org/drawingml/2006/main">
+            <a:r>
+              <a:t>Acceptance: Rejected actions create no ledger entry. A retry with the same ID cannot duplicate the effect, and changed payload reuse fails.</a:t>
+            </a:r>
+          </a:p>
+          <a:p xmlns:a="http://schemas.openxmlformats.org/drawingml/2006/main">
+            <a:r>
+              <a:t>Lab: labs/08_langgraph_approval_security.ipynb</a:t>
+            </a:r>
+          </a:p>
+        </p:txBody>
+      </p:sp>
+      <p:sp>
+        <p:nvSpPr>
+          <p:cNvPr id="4" name="Slide Number Placeholder 3"/>
+          <p:cNvSpPr>
+            <a:spLocks xmlns:a="http://schemas.openxmlformats.org/drawingml/2006/main" noGrp="1"/>
+          </p:cNvSpPr>
+          <p:nvPr>
+            <p:ph type="sldNum" idx="5"/>
+          </p:nvPr>
+        </p:nvSpPr>
+        <p:spPr/>
+        <p:txBody>
+          <a:bodyPr xmlns:a="http://schemas.openxmlformats.org/drawingml/2006/main"/>
+          <a:lstStyle xmlns:a="http://schemas.openxmlformats.org/drawingml/2006/main"/>
+          <a:p xmlns:a="http://schemas.openxmlformats.org/drawingml/2006/main"/>
+        </p:txBody>
+      </p:sp>
+    </p:spTree>
+  </p:cSld>
+  <p:clrMapOvr>
+    <a:masterClrMapping xmlns:a="http://schemas.openxmlformats.org/drawingml/2006/main"/>
+  </p:clrMapOvr>
+</p:notes>
+</file>
+
+<file path=ppt/notesSlides/notesSlide11.xml><?xml version="1.0" encoding="utf-8"?>
+<p:notes xmlns:p="http://schemas.openxmlformats.org/presentationml/2006/main">
+  <p:cSld>
+    <p:spTree>
+      <p:nvGrpSpPr>
+        <p:cNvPr id="1" name=""/>
+        <p:cNvGrpSpPr/>
+        <p:nvPr/>
+      </p:nvGrpSpPr>
+      <p:grpSpPr>
+        <a:xfrm xmlns:a="http://schemas.openxmlformats.org/drawingml/2006/main"/>
+      </p:grpSpPr>
+      <p:sp>
+        <p:nvSpPr>
+          <p:cNvPr id="2" name="Slide Image Placeholder 1"/>
+          <p:cNvSpPr>
+            <a:spLocks xmlns:a="http://schemas.openxmlformats.org/drawingml/2006/main" noGrp="1"/>
+          </p:cNvSpPr>
+          <p:nvPr>
+            <p:ph type="sldImg" idx="0"/>
+          </p:nvPr>
+        </p:nvSpPr>
+        <p:spPr/>
+      </p:sp>
+      <p:sp>
+        <p:nvSpPr>
+          <p:cNvPr id="3" name="Notes Placeholder 2"/>
+          <p:cNvSpPr>
+            <a:spLocks xmlns:a="http://schemas.openxmlformats.org/drawingml/2006/main" noGrp="1"/>
+          </p:cNvSpPr>
+          <p:nvPr>
+            <p:ph type="body" idx="1"/>
+          </p:nvPr>
+        </p:nvSpPr>
+        <p:spPr/>
+        <p:txBody>
+          <a:bodyPr xmlns:a="http://schemas.openxmlformats.org/drawingml/2006/main"/>
+          <a:lstStyle xmlns:a="http://schemas.openxmlformats.org/drawingml/2006/main"/>
+          <a:p xmlns:a="http://schemas.openxmlformats.org/drawingml/2006/main">
+            <a:r>
               <a:t>Close by restating the four durable ideas and linking forward to the next chapter.</a:t>
             </a:r>
           </a:p>
@@ -546,12 +723,187 @@
           </a:p>
           <a:p xmlns:a="http://schemas.openxmlformats.org/drawingml/2006/main">
             <a:r>
+              <a:t>Edition: 2026-09-09</a:t>
+            </a:r>
+          </a:p>
+          <a:p xmlns:a="http://schemas.openxmlformats.org/drawingml/2006/main">
+            <a:r>
+              <a:t/>
+            </a:r>
+          </a:p>
+          <a:p xmlns:a="http://schemas.openxmlformats.org/drawingml/2006/main">
+            <a:r>
               <a:t>[Sources]</a:t>
             </a:r>
           </a:p>
           <a:p xmlns:a="http://schemas.openxmlformats.org/drawingml/2006/main">
             <a:r>
-              <a:t>- Supplied source presentation: 12-safety-security.pdf</a:t>
+              <a:t>- Original source presentation: 12-safety-security.pdf</a:t>
+            </a:r>
+          </a:p>
+          <a:p xmlns:a="http://schemas.openxmlformats.org/drawingml/2006/main">
+            <a:r>
+              <a:t>- P1: GPT-Red: Automated Red Teaming via Self-Play at Scale. OpenAI technical paper, 2026-07-15. https://cdn.openai.com/pdf/gpt-red-automated-red-teaming-via-self-play-at-scale.pdf Self-play and held-out adversarial evaluation. Classroom policy checks do not reproduce this training.</a:t>
+            </a:r>
+          </a:p>
+          <a:p xmlns:a="http://schemas.openxmlformats.org/drawingml/2006/main">
+            <a:r>
+              <a:t>- S3: LangGraph interrupts. LangChain documentation, accessed, 2026-09-09. https://docs.langchain.com/oss/python/langgraph/interrupts Resume restarts the interrupted node. Put effects after approval and make replay safe.</a:t>
+            </a:r>
+          </a:p>
+          <a:p xmlns:a="http://schemas.openxmlformats.org/drawingml/2006/main">
+            <a:r>
+              <a:t/>
+            </a:r>
+          </a:p>
+          <a:p xmlns:a="http://schemas.openxmlformats.org/drawingml/2006/main">
+            <a:r>
+              <a:t>[Assessed practice]</a:t>
+            </a:r>
+          </a:p>
+          <a:p xmlns:a="http://schemas.openxmlformats.org/drawingml/2006/main">
+            <a:r>
+              <a:t>Complete Lab 8. Submit one valid request, one injection-shaped proposal, and one replay with changed arguments. Identify the trusted reviewer channel.</a:t>
+            </a:r>
+          </a:p>
+          <a:p xmlns:a="http://schemas.openxmlformats.org/drawingml/2006/main">
+            <a:r>
+              <a:t>Acceptance: Rejected actions create no ledger entry. A retry with the same ID cannot duplicate the effect, and changed payload reuse fails.</a:t>
+            </a:r>
+          </a:p>
+          <a:p xmlns:a="http://schemas.openxmlformats.org/drawingml/2006/main">
+            <a:r>
+              <a:t>Lab: labs/08_langgraph_approval_security.ipynb</a:t>
+            </a:r>
+          </a:p>
+        </p:txBody>
+      </p:sp>
+      <p:sp>
+        <p:nvSpPr>
+          <p:cNvPr id="4" name="Slide Number Placeholder 3"/>
+          <p:cNvSpPr>
+            <a:spLocks xmlns:a="http://schemas.openxmlformats.org/drawingml/2006/main" noGrp="1"/>
+          </p:cNvSpPr>
+          <p:nvPr>
+            <p:ph type="sldNum" idx="5"/>
+          </p:nvPr>
+        </p:nvSpPr>
+        <p:spPr/>
+        <p:txBody>
+          <a:bodyPr xmlns:a="http://schemas.openxmlformats.org/drawingml/2006/main"/>
+          <a:lstStyle xmlns:a="http://schemas.openxmlformats.org/drawingml/2006/main"/>
+          <a:p xmlns:a="http://schemas.openxmlformats.org/drawingml/2006/main"/>
+        </p:txBody>
+      </p:sp>
+    </p:spTree>
+  </p:cSld>
+  <p:clrMapOvr>
+    <a:masterClrMapping xmlns:a="http://schemas.openxmlformats.org/drawingml/2006/main"/>
+  </p:clrMapOvr>
+</p:notes>
+</file>
+
+<file path=ppt/notesSlides/notesSlide12.xml><?xml version="1.0" encoding="utf-8"?>
+<p:notes xmlns:p="http://schemas.openxmlformats.org/presentationml/2006/main">
+  <p:cSld>
+    <p:spTree>
+      <p:nvGrpSpPr>
+        <p:cNvPr id="1" name=""/>
+        <p:cNvGrpSpPr/>
+        <p:nvPr/>
+      </p:nvGrpSpPr>
+      <p:grpSpPr>
+        <a:xfrm xmlns:a="http://schemas.openxmlformats.org/drawingml/2006/main"/>
+      </p:grpSpPr>
+      <p:sp>
+        <p:nvSpPr>
+          <p:cNvPr id="2" name="Slide Image Placeholder 1"/>
+          <p:cNvSpPr>
+            <a:spLocks xmlns:a="http://schemas.openxmlformats.org/drawingml/2006/main" noGrp="1"/>
+          </p:cNvSpPr>
+          <p:nvPr>
+            <p:ph type="sldImg" idx="0"/>
+          </p:nvPr>
+        </p:nvSpPr>
+        <p:spPr/>
+      </p:sp>
+      <p:sp>
+        <p:nvSpPr>
+          <p:cNvPr id="3" name="Notes Placeholder 2"/>
+          <p:cNvSpPr>
+            <a:spLocks xmlns:a="http://schemas.openxmlformats.org/drawingml/2006/main" noGrp="1"/>
+          </p:cNvSpPr>
+          <p:nvPr>
+            <p:ph type="body" idx="1"/>
+          </p:nvPr>
+        </p:nvSpPr>
+        <p:spPr/>
+        <p:txBody>
+          <a:bodyPr xmlns:a="http://schemas.openxmlformats.org/drawingml/2006/main"/>
+          <a:lstStyle xmlns:a="http://schemas.openxmlformats.org/drawingml/2006/main"/>
+          <a:p xmlns:a="http://schemas.openxmlformats.org/drawingml/2006/main">
+            <a:r>
+              <a:t>Assess the submitted evidence with the stated acceptance check. Reading links and limitations follow.</a:t>
+            </a:r>
+          </a:p>
+          <a:p xmlns:a="http://schemas.openxmlformats.org/drawingml/2006/main">
+            <a:r>
+              <a:t/>
+            </a:r>
+          </a:p>
+          <a:p xmlns:a="http://schemas.openxmlformats.org/drawingml/2006/main">
+            <a:r>
+              <a:t>Edition: 2026-09-09</a:t>
+            </a:r>
+          </a:p>
+          <a:p xmlns:a="http://schemas.openxmlformats.org/drawingml/2006/main">
+            <a:r>
+              <a:t/>
+            </a:r>
+          </a:p>
+          <a:p xmlns:a="http://schemas.openxmlformats.org/drawingml/2006/main">
+            <a:r>
+              <a:t>[Sources]</a:t>
+            </a:r>
+          </a:p>
+          <a:p xmlns:a="http://schemas.openxmlformats.org/drawingml/2006/main">
+            <a:r>
+              <a:t>- Original source presentation: 12-safety-security.pdf</a:t>
+            </a:r>
+          </a:p>
+          <a:p xmlns:a="http://schemas.openxmlformats.org/drawingml/2006/main">
+            <a:r>
+              <a:t>- P1: GPT-Red: Automated Red Teaming via Self-Play at Scale. OpenAI technical paper, 2026-07-15. https://cdn.openai.com/pdf/gpt-red-automated-red-teaming-via-self-play-at-scale.pdf Self-play and held-out adversarial evaluation. Classroom policy checks do not reproduce this training.</a:t>
+            </a:r>
+          </a:p>
+          <a:p xmlns:a="http://schemas.openxmlformats.org/drawingml/2006/main">
+            <a:r>
+              <a:t>- S3: LangGraph interrupts. LangChain documentation, accessed, 2026-09-09. https://docs.langchain.com/oss/python/langgraph/interrupts Resume restarts the interrupted node. Put effects after approval and make replay safe.</a:t>
+            </a:r>
+          </a:p>
+          <a:p xmlns:a="http://schemas.openxmlformats.org/drawingml/2006/main">
+            <a:r>
+              <a:t/>
+            </a:r>
+          </a:p>
+          <a:p xmlns:a="http://schemas.openxmlformats.org/drawingml/2006/main">
+            <a:r>
+              <a:t>[Assessed practice]</a:t>
+            </a:r>
+          </a:p>
+          <a:p xmlns:a="http://schemas.openxmlformats.org/drawingml/2006/main">
+            <a:r>
+              <a:t>Complete Lab 8. Submit one valid request, one injection-shaped proposal, and one replay with changed arguments. Identify the trusted reviewer channel.</a:t>
+            </a:r>
+          </a:p>
+          <a:p xmlns:a="http://schemas.openxmlformats.org/drawingml/2006/main">
+            <a:r>
+              <a:t>Acceptance: Rejected actions create no ledger entry. A retry with the same ID cannot duplicate the effect, and changed payload reuse fails.</a:t>
+            </a:r>
+          </a:p>
+          <a:p xmlns:a="http://schemas.openxmlformats.org/drawingml/2006/main">
+            <a:r>
+              <a:t>Lab: labs/08_langgraph_approval_security.ipynb</a:t>
             </a:r>
           </a:p>
         </p:txBody>
@@ -631,12 +983,57 @@
           </a:p>
           <a:p xmlns:a="http://schemas.openxmlformats.org/drawingml/2006/main">
             <a:r>
+              <a:t>Edition: 2026-09-09</a:t>
+            </a:r>
+          </a:p>
+          <a:p xmlns:a="http://schemas.openxmlformats.org/drawingml/2006/main">
+            <a:r>
+              <a:t/>
+            </a:r>
+          </a:p>
+          <a:p xmlns:a="http://schemas.openxmlformats.org/drawingml/2006/main">
+            <a:r>
               <a:t>[Sources]</a:t>
             </a:r>
           </a:p>
           <a:p xmlns:a="http://schemas.openxmlformats.org/drawingml/2006/main">
             <a:r>
-              <a:t>- Supplied source presentation: 12-safety-security.pdf</a:t>
+              <a:t>- Original source presentation: 12-safety-security.pdf</a:t>
+            </a:r>
+          </a:p>
+          <a:p xmlns:a="http://schemas.openxmlformats.org/drawingml/2006/main">
+            <a:r>
+              <a:t>- P1: GPT-Red: Automated Red Teaming via Self-Play at Scale. OpenAI technical paper, 2026-07-15. https://cdn.openai.com/pdf/gpt-red-automated-red-teaming-via-self-play-at-scale.pdf Self-play and held-out adversarial evaluation. Classroom policy checks do not reproduce this training.</a:t>
+            </a:r>
+          </a:p>
+          <a:p xmlns:a="http://schemas.openxmlformats.org/drawingml/2006/main">
+            <a:r>
+              <a:t>- S3: LangGraph interrupts. LangChain documentation, accessed, 2026-09-09. https://docs.langchain.com/oss/python/langgraph/interrupts Resume restarts the interrupted node. Put effects after approval and make replay safe.</a:t>
+            </a:r>
+          </a:p>
+          <a:p xmlns:a="http://schemas.openxmlformats.org/drawingml/2006/main">
+            <a:r>
+              <a:t/>
+            </a:r>
+          </a:p>
+          <a:p xmlns:a="http://schemas.openxmlformats.org/drawingml/2006/main">
+            <a:r>
+              <a:t>[Assessed practice]</a:t>
+            </a:r>
+          </a:p>
+          <a:p xmlns:a="http://schemas.openxmlformats.org/drawingml/2006/main">
+            <a:r>
+              <a:t>Complete Lab 8. Submit one valid request, one injection-shaped proposal, and one replay with changed arguments. Identify the trusted reviewer channel.</a:t>
+            </a:r>
+          </a:p>
+          <a:p xmlns:a="http://schemas.openxmlformats.org/drawingml/2006/main">
+            <a:r>
+              <a:t>Acceptance: Rejected actions create no ledger entry. A retry with the same ID cannot duplicate the effect, and changed payload reuse fails.</a:t>
+            </a:r>
+          </a:p>
+          <a:p xmlns:a="http://schemas.openxmlformats.org/drawingml/2006/main">
+            <a:r>
+              <a:t>Lab: labs/08_langgraph_approval_security.ipynb</a:t>
             </a:r>
           </a:p>
         </p:txBody>
@@ -716,12 +1113,57 @@
           </a:p>
           <a:p xmlns:a="http://schemas.openxmlformats.org/drawingml/2006/main">
             <a:r>
+              <a:t>Edition: 2026-09-09</a:t>
+            </a:r>
+          </a:p>
+          <a:p xmlns:a="http://schemas.openxmlformats.org/drawingml/2006/main">
+            <a:r>
+              <a:t/>
+            </a:r>
+          </a:p>
+          <a:p xmlns:a="http://schemas.openxmlformats.org/drawingml/2006/main">
+            <a:r>
               <a:t>[Sources]</a:t>
             </a:r>
           </a:p>
           <a:p xmlns:a="http://schemas.openxmlformats.org/drawingml/2006/main">
             <a:r>
-              <a:t>- Supplied source presentation: 12-safety-security.pdf</a:t>
+              <a:t>- Original source presentation: 12-safety-security.pdf</a:t>
+            </a:r>
+          </a:p>
+          <a:p xmlns:a="http://schemas.openxmlformats.org/drawingml/2006/main">
+            <a:r>
+              <a:t>- P1: GPT-Red: Automated Red Teaming via Self-Play at Scale. OpenAI technical paper, 2026-07-15. https://cdn.openai.com/pdf/gpt-red-automated-red-teaming-via-self-play-at-scale.pdf Self-play and held-out adversarial evaluation. Classroom policy checks do not reproduce this training.</a:t>
+            </a:r>
+          </a:p>
+          <a:p xmlns:a="http://schemas.openxmlformats.org/drawingml/2006/main">
+            <a:r>
+              <a:t>- S3: LangGraph interrupts. LangChain documentation, accessed, 2026-09-09. https://docs.langchain.com/oss/python/langgraph/interrupts Resume restarts the interrupted node. Put effects after approval and make replay safe.</a:t>
+            </a:r>
+          </a:p>
+          <a:p xmlns:a="http://schemas.openxmlformats.org/drawingml/2006/main">
+            <a:r>
+              <a:t/>
+            </a:r>
+          </a:p>
+          <a:p xmlns:a="http://schemas.openxmlformats.org/drawingml/2006/main">
+            <a:r>
+              <a:t>[Assessed practice]</a:t>
+            </a:r>
+          </a:p>
+          <a:p xmlns:a="http://schemas.openxmlformats.org/drawingml/2006/main">
+            <a:r>
+              <a:t>Complete Lab 8. Submit one valid request, one injection-shaped proposal, and one replay with changed arguments. Identify the trusted reviewer channel.</a:t>
+            </a:r>
+          </a:p>
+          <a:p xmlns:a="http://schemas.openxmlformats.org/drawingml/2006/main">
+            <a:r>
+              <a:t>Acceptance: Rejected actions create no ledger entry. A retry with the same ID cannot duplicate the effect, and changed payload reuse fails.</a:t>
+            </a:r>
+          </a:p>
+          <a:p xmlns:a="http://schemas.openxmlformats.org/drawingml/2006/main">
+            <a:r>
+              <a:t>Lab: labs/08_langgraph_approval_security.ipynb</a:t>
             </a:r>
           </a:p>
         </p:txBody>
@@ -801,12 +1243,57 @@
           </a:p>
           <a:p xmlns:a="http://schemas.openxmlformats.org/drawingml/2006/main">
             <a:r>
+              <a:t>Edition: 2026-09-09</a:t>
+            </a:r>
+          </a:p>
+          <a:p xmlns:a="http://schemas.openxmlformats.org/drawingml/2006/main">
+            <a:r>
+              <a:t/>
+            </a:r>
+          </a:p>
+          <a:p xmlns:a="http://schemas.openxmlformats.org/drawingml/2006/main">
+            <a:r>
               <a:t>[Sources]</a:t>
             </a:r>
           </a:p>
           <a:p xmlns:a="http://schemas.openxmlformats.org/drawingml/2006/main">
             <a:r>
-              <a:t>- Supplied source presentation: 12-safety-security.pdf</a:t>
+              <a:t>- Original source presentation: 12-safety-security.pdf</a:t>
+            </a:r>
+          </a:p>
+          <a:p xmlns:a="http://schemas.openxmlformats.org/drawingml/2006/main">
+            <a:r>
+              <a:t>- P1: GPT-Red: Automated Red Teaming via Self-Play at Scale. OpenAI technical paper, 2026-07-15. https://cdn.openai.com/pdf/gpt-red-automated-red-teaming-via-self-play-at-scale.pdf Self-play and held-out adversarial evaluation. Classroom policy checks do not reproduce this training.</a:t>
+            </a:r>
+          </a:p>
+          <a:p xmlns:a="http://schemas.openxmlformats.org/drawingml/2006/main">
+            <a:r>
+              <a:t>- S3: LangGraph interrupts. LangChain documentation, accessed, 2026-09-09. https://docs.langchain.com/oss/python/langgraph/interrupts Resume restarts the interrupted node. Put effects after approval and make replay safe.</a:t>
+            </a:r>
+          </a:p>
+          <a:p xmlns:a="http://schemas.openxmlformats.org/drawingml/2006/main">
+            <a:r>
+              <a:t/>
+            </a:r>
+          </a:p>
+          <a:p xmlns:a="http://schemas.openxmlformats.org/drawingml/2006/main">
+            <a:r>
+              <a:t>[Assessed practice]</a:t>
+            </a:r>
+          </a:p>
+          <a:p xmlns:a="http://schemas.openxmlformats.org/drawingml/2006/main">
+            <a:r>
+              <a:t>Complete Lab 8. Submit one valid request, one injection-shaped proposal, and one replay with changed arguments. Identify the trusted reviewer channel.</a:t>
+            </a:r>
+          </a:p>
+          <a:p xmlns:a="http://schemas.openxmlformats.org/drawingml/2006/main">
+            <a:r>
+              <a:t>Acceptance: Rejected actions create no ledger entry. A retry with the same ID cannot duplicate the effect, and changed payload reuse fails.</a:t>
+            </a:r>
+          </a:p>
+          <a:p xmlns:a="http://schemas.openxmlformats.org/drawingml/2006/main">
+            <a:r>
+              <a:t>Lab: labs/08_langgraph_approval_security.ipynb</a:t>
             </a:r>
           </a:p>
         </p:txBody>
@@ -886,12 +1373,57 @@
           </a:p>
           <a:p xmlns:a="http://schemas.openxmlformats.org/drawingml/2006/main">
             <a:r>
+              <a:t>Edition: 2026-09-09</a:t>
+            </a:r>
+          </a:p>
+          <a:p xmlns:a="http://schemas.openxmlformats.org/drawingml/2006/main">
+            <a:r>
+              <a:t/>
+            </a:r>
+          </a:p>
+          <a:p xmlns:a="http://schemas.openxmlformats.org/drawingml/2006/main">
+            <a:r>
               <a:t>[Sources]</a:t>
             </a:r>
           </a:p>
           <a:p xmlns:a="http://schemas.openxmlformats.org/drawingml/2006/main">
             <a:r>
-              <a:t>- Supplied source presentation: 12-safety-security.pdf</a:t>
+              <a:t>- Original source presentation: 12-safety-security.pdf</a:t>
+            </a:r>
+          </a:p>
+          <a:p xmlns:a="http://schemas.openxmlformats.org/drawingml/2006/main">
+            <a:r>
+              <a:t>- P1: GPT-Red: Automated Red Teaming via Self-Play at Scale. OpenAI technical paper, 2026-07-15. https://cdn.openai.com/pdf/gpt-red-automated-red-teaming-via-self-play-at-scale.pdf Self-play and held-out adversarial evaluation. Classroom policy checks do not reproduce this training.</a:t>
+            </a:r>
+          </a:p>
+          <a:p xmlns:a="http://schemas.openxmlformats.org/drawingml/2006/main">
+            <a:r>
+              <a:t>- S3: LangGraph interrupts. LangChain documentation, accessed, 2026-09-09. https://docs.langchain.com/oss/python/langgraph/interrupts Resume restarts the interrupted node. Put effects after approval and make replay safe.</a:t>
+            </a:r>
+          </a:p>
+          <a:p xmlns:a="http://schemas.openxmlformats.org/drawingml/2006/main">
+            <a:r>
+              <a:t/>
+            </a:r>
+          </a:p>
+          <a:p xmlns:a="http://schemas.openxmlformats.org/drawingml/2006/main">
+            <a:r>
+              <a:t>[Assessed practice]</a:t>
+            </a:r>
+          </a:p>
+          <a:p xmlns:a="http://schemas.openxmlformats.org/drawingml/2006/main">
+            <a:r>
+              <a:t>Complete Lab 8. Submit one valid request, one injection-shaped proposal, and one replay with changed arguments. Identify the trusted reviewer channel.</a:t>
+            </a:r>
+          </a:p>
+          <a:p xmlns:a="http://schemas.openxmlformats.org/drawingml/2006/main">
+            <a:r>
+              <a:t>Acceptance: Rejected actions create no ledger entry. A retry with the same ID cannot duplicate the effect, and changed payload reuse fails.</a:t>
+            </a:r>
+          </a:p>
+          <a:p xmlns:a="http://schemas.openxmlformats.org/drawingml/2006/main">
+            <a:r>
+              <a:t>Lab: labs/08_langgraph_approval_security.ipynb</a:t>
             </a:r>
           </a:p>
         </p:txBody>
@@ -971,12 +1503,57 @@
           </a:p>
           <a:p xmlns:a="http://schemas.openxmlformats.org/drawingml/2006/main">
             <a:r>
+              <a:t>Edition: 2026-09-09</a:t>
+            </a:r>
+          </a:p>
+          <a:p xmlns:a="http://schemas.openxmlformats.org/drawingml/2006/main">
+            <a:r>
+              <a:t/>
+            </a:r>
+          </a:p>
+          <a:p xmlns:a="http://schemas.openxmlformats.org/drawingml/2006/main">
+            <a:r>
               <a:t>[Sources]</a:t>
             </a:r>
           </a:p>
           <a:p xmlns:a="http://schemas.openxmlformats.org/drawingml/2006/main">
             <a:r>
-              <a:t>- Supplied source presentation: 12-safety-security.pdf</a:t>
+              <a:t>- Original source presentation: 12-safety-security.pdf</a:t>
+            </a:r>
+          </a:p>
+          <a:p xmlns:a="http://schemas.openxmlformats.org/drawingml/2006/main">
+            <a:r>
+              <a:t>- P1: GPT-Red: Automated Red Teaming via Self-Play at Scale. OpenAI technical paper, 2026-07-15. https://cdn.openai.com/pdf/gpt-red-automated-red-teaming-via-self-play-at-scale.pdf Self-play and held-out adversarial evaluation. Classroom policy checks do not reproduce this training.</a:t>
+            </a:r>
+          </a:p>
+          <a:p xmlns:a="http://schemas.openxmlformats.org/drawingml/2006/main">
+            <a:r>
+              <a:t>- S3: LangGraph interrupts. LangChain documentation, accessed, 2026-09-09. https://docs.langchain.com/oss/python/langgraph/interrupts Resume restarts the interrupted node. Put effects after approval and make replay safe.</a:t>
+            </a:r>
+          </a:p>
+          <a:p xmlns:a="http://schemas.openxmlformats.org/drawingml/2006/main">
+            <a:r>
+              <a:t/>
+            </a:r>
+          </a:p>
+          <a:p xmlns:a="http://schemas.openxmlformats.org/drawingml/2006/main">
+            <a:r>
+              <a:t>[Assessed practice]</a:t>
+            </a:r>
+          </a:p>
+          <a:p xmlns:a="http://schemas.openxmlformats.org/drawingml/2006/main">
+            <a:r>
+              <a:t>Complete Lab 8. Submit one valid request, one injection-shaped proposal, and one replay with changed arguments. Identify the trusted reviewer channel.</a:t>
+            </a:r>
+          </a:p>
+          <a:p xmlns:a="http://schemas.openxmlformats.org/drawingml/2006/main">
+            <a:r>
+              <a:t>Acceptance: Rejected actions create no ledger entry. A retry with the same ID cannot duplicate the effect, and changed payload reuse fails.</a:t>
+            </a:r>
+          </a:p>
+          <a:p xmlns:a="http://schemas.openxmlformats.org/drawingml/2006/main">
+            <a:r>
+              <a:t>Lab: labs/08_langgraph_approval_security.ipynb</a:t>
             </a:r>
           </a:p>
         </p:txBody>
@@ -1056,12 +1633,57 @@
           </a:p>
           <a:p xmlns:a="http://schemas.openxmlformats.org/drawingml/2006/main">
             <a:r>
+              <a:t>Edition: 2026-09-09</a:t>
+            </a:r>
+          </a:p>
+          <a:p xmlns:a="http://schemas.openxmlformats.org/drawingml/2006/main">
+            <a:r>
+              <a:t/>
+            </a:r>
+          </a:p>
+          <a:p xmlns:a="http://schemas.openxmlformats.org/drawingml/2006/main">
+            <a:r>
               <a:t>[Sources]</a:t>
             </a:r>
           </a:p>
           <a:p xmlns:a="http://schemas.openxmlformats.org/drawingml/2006/main">
             <a:r>
-              <a:t>- Supplied source presentation: 12-safety-security.pdf</a:t>
+              <a:t>- Original source presentation: 12-safety-security.pdf</a:t>
+            </a:r>
+          </a:p>
+          <a:p xmlns:a="http://schemas.openxmlformats.org/drawingml/2006/main">
+            <a:r>
+              <a:t>- P1: GPT-Red: Automated Red Teaming via Self-Play at Scale. OpenAI technical paper, 2026-07-15. https://cdn.openai.com/pdf/gpt-red-automated-red-teaming-via-self-play-at-scale.pdf Self-play and held-out adversarial evaluation. Classroom policy checks do not reproduce this training.</a:t>
+            </a:r>
+          </a:p>
+          <a:p xmlns:a="http://schemas.openxmlformats.org/drawingml/2006/main">
+            <a:r>
+              <a:t>- S3: LangGraph interrupts. LangChain documentation, accessed, 2026-09-09. https://docs.langchain.com/oss/python/langgraph/interrupts Resume restarts the interrupted node. Put effects after approval and make replay safe.</a:t>
+            </a:r>
+          </a:p>
+          <a:p xmlns:a="http://schemas.openxmlformats.org/drawingml/2006/main">
+            <a:r>
+              <a:t/>
+            </a:r>
+          </a:p>
+          <a:p xmlns:a="http://schemas.openxmlformats.org/drawingml/2006/main">
+            <a:r>
+              <a:t>[Assessed practice]</a:t>
+            </a:r>
+          </a:p>
+          <a:p xmlns:a="http://schemas.openxmlformats.org/drawingml/2006/main">
+            <a:r>
+              <a:t>Complete Lab 8. Submit one valid request, one injection-shaped proposal, and one replay with changed arguments. Identify the trusted reviewer channel.</a:t>
+            </a:r>
+          </a:p>
+          <a:p xmlns:a="http://schemas.openxmlformats.org/drawingml/2006/main">
+            <a:r>
+              <a:t>Acceptance: Rejected actions create no ledger entry. A retry with the same ID cannot duplicate the effect, and changed payload reuse fails.</a:t>
+            </a:r>
+          </a:p>
+          <a:p xmlns:a="http://schemas.openxmlformats.org/drawingml/2006/main">
+            <a:r>
+              <a:t>Lab: labs/08_langgraph_approval_security.ipynb</a:t>
             </a:r>
           </a:p>
         </p:txBody>
@@ -1141,12 +1763,57 @@
           </a:p>
           <a:p xmlns:a="http://schemas.openxmlformats.org/drawingml/2006/main">
             <a:r>
+              <a:t>Edition: 2026-09-09</a:t>
+            </a:r>
+          </a:p>
+          <a:p xmlns:a="http://schemas.openxmlformats.org/drawingml/2006/main">
+            <a:r>
+              <a:t/>
+            </a:r>
+          </a:p>
+          <a:p xmlns:a="http://schemas.openxmlformats.org/drawingml/2006/main">
+            <a:r>
               <a:t>[Sources]</a:t>
             </a:r>
           </a:p>
           <a:p xmlns:a="http://schemas.openxmlformats.org/drawingml/2006/main">
             <a:r>
-              <a:t>- Supplied source presentation: 12-safety-security.pdf</a:t>
+              <a:t>- Original source presentation: 12-safety-security.pdf</a:t>
+            </a:r>
+          </a:p>
+          <a:p xmlns:a="http://schemas.openxmlformats.org/drawingml/2006/main">
+            <a:r>
+              <a:t>- P1: GPT-Red: Automated Red Teaming via Self-Play at Scale. OpenAI technical paper, 2026-07-15. https://cdn.openai.com/pdf/gpt-red-automated-red-teaming-via-self-play-at-scale.pdf Self-play and held-out adversarial evaluation. Classroom policy checks do not reproduce this training.</a:t>
+            </a:r>
+          </a:p>
+          <a:p xmlns:a="http://schemas.openxmlformats.org/drawingml/2006/main">
+            <a:r>
+              <a:t>- S3: LangGraph interrupts. LangChain documentation, accessed, 2026-09-09. https://docs.langchain.com/oss/python/langgraph/interrupts Resume restarts the interrupted node. Put effects after approval and make replay safe.</a:t>
+            </a:r>
+          </a:p>
+          <a:p xmlns:a="http://schemas.openxmlformats.org/drawingml/2006/main">
+            <a:r>
+              <a:t/>
+            </a:r>
+          </a:p>
+          <a:p xmlns:a="http://schemas.openxmlformats.org/drawingml/2006/main">
+            <a:r>
+              <a:t>[Assessed practice]</a:t>
+            </a:r>
+          </a:p>
+          <a:p xmlns:a="http://schemas.openxmlformats.org/drawingml/2006/main">
+            <a:r>
+              <a:t>Complete Lab 8. Submit one valid request, one injection-shaped proposal, and one replay with changed arguments. Identify the trusted reviewer channel.</a:t>
+            </a:r>
+          </a:p>
+          <a:p xmlns:a="http://schemas.openxmlformats.org/drawingml/2006/main">
+            <a:r>
+              <a:t>Acceptance: Rejected actions create no ledger entry. A retry with the same ID cannot duplicate the effect, and changed payload reuse fails.</a:t>
+            </a:r>
+          </a:p>
+          <a:p xmlns:a="http://schemas.openxmlformats.org/drawingml/2006/main">
+            <a:r>
+              <a:t>Lab: labs/08_langgraph_approval_security.ipynb</a:t>
             </a:r>
           </a:p>
         </p:txBody>
@@ -1216,7 +1883,7 @@
           <a:lstStyle xmlns:a="http://schemas.openxmlformats.org/drawingml/2006/main"/>
           <a:p xmlns:a="http://schemas.openxmlformats.org/drawingml/2006/main">
             <a:r>
-              <a:t>Use as retrieval practice. Ask for an answer that defines, compares, traces, and evaluates.</a:t>
+              <a:t>Explain the claim first, then use the numbered points as evidence and design consequences.</a:t>
             </a:r>
           </a:p>
           <a:p xmlns:a="http://schemas.openxmlformats.org/drawingml/2006/main">
@@ -1226,12 +1893,57 @@
           </a:p>
           <a:p xmlns:a="http://schemas.openxmlformats.org/drawingml/2006/main">
             <a:r>
+              <a:t>Edition: 2026-09-09</a:t>
+            </a:r>
+          </a:p>
+          <a:p xmlns:a="http://schemas.openxmlformats.org/drawingml/2006/main">
+            <a:r>
+              <a:t/>
+            </a:r>
+          </a:p>
+          <a:p xmlns:a="http://schemas.openxmlformats.org/drawingml/2006/main">
+            <a:r>
               <a:t>[Sources]</a:t>
             </a:r>
           </a:p>
           <a:p xmlns:a="http://schemas.openxmlformats.org/drawingml/2006/main">
             <a:r>
-              <a:t>- Supplied source presentation: 12-safety-security.pdf</a:t>
+              <a:t>- Original source presentation: 12-safety-security.pdf</a:t>
+            </a:r>
+          </a:p>
+          <a:p xmlns:a="http://schemas.openxmlformats.org/drawingml/2006/main">
+            <a:r>
+              <a:t>- P1: GPT-Red: Automated Red Teaming via Self-Play at Scale. OpenAI technical paper, 2026-07-15. https://cdn.openai.com/pdf/gpt-red-automated-red-teaming-via-self-play-at-scale.pdf Self-play and held-out adversarial evaluation. Classroom policy checks do not reproduce this training.</a:t>
+            </a:r>
+          </a:p>
+          <a:p xmlns:a="http://schemas.openxmlformats.org/drawingml/2006/main">
+            <a:r>
+              <a:t>- S3: LangGraph interrupts. LangChain documentation, accessed, 2026-09-09. https://docs.langchain.com/oss/python/langgraph/interrupts Resume restarts the interrupted node. Put effects after approval and make replay safe.</a:t>
+            </a:r>
+          </a:p>
+          <a:p xmlns:a="http://schemas.openxmlformats.org/drawingml/2006/main">
+            <a:r>
+              <a:t/>
+            </a:r>
+          </a:p>
+          <a:p xmlns:a="http://schemas.openxmlformats.org/drawingml/2006/main">
+            <a:r>
+              <a:t>[Assessed practice]</a:t>
+            </a:r>
+          </a:p>
+          <a:p xmlns:a="http://schemas.openxmlformats.org/drawingml/2006/main">
+            <a:r>
+              <a:t>Complete Lab 8. Submit one valid request, one injection-shaped proposal, and one replay with changed arguments. Identify the trusted reviewer channel.</a:t>
+            </a:r>
+          </a:p>
+          <a:p xmlns:a="http://schemas.openxmlformats.org/drawingml/2006/main">
+            <a:r>
+              <a:t>Acceptance: Rejected actions create no ledger entry. A retry with the same ID cannot duplicate the effect, and changed payload reuse fails.</a:t>
+            </a:r>
+          </a:p>
+          <a:p xmlns:a="http://schemas.openxmlformats.org/drawingml/2006/main">
+            <a:r>
+              <a:t>Lab: labs/08_langgraph_approval_security.ipynb</a:t>
             </a:r>
           </a:p>
         </p:txBody>
@@ -1299,7 +2011,7 @@
   </p:cSld>
   <p:clrMap bg1="lt1" tx1="dk1" bg2="lt2" tx2="dk2" accent1="accent1" accent2="accent2" accent3="accent3" accent4="accent4" accent5="accent5" accent6="accent6" hlink="hlink" folHlink="folHlink"/>
   <p:sldLayoutIdLst>
-    <p:sldLayoutId xmlns:r="http://schemas.openxmlformats.org/officeDocument/2006/relationships" id="2147483649" r:id="R9bf2247b975b4be2"/>
+    <p:sldLayoutId xmlns:r="http://schemas.openxmlformats.org/officeDocument/2006/relationships" id="2147483649" r:id="Rce167f40a31e4b1d"/>
   </p:sldLayoutIdLst>
   <p:txStyles>
     <p:titleStyle>
@@ -1850,7 +2562,7 @@
           <p:cNvPr id="8" name="title-accent">
             <a:extLst xmlns:a="http://schemas.openxmlformats.org/drawingml/2006/main">
               <a:ext uri="{FF2B5EF4-FFF2-40B4-BE49-F238E27FC236}">
-                <a16:creationId xmlns:a16="http://schemas.microsoft.com/office/drawing/2014/main" id="{EAC34868-47CB-405F-968A-1AFEB0B00949}"/>
+                <a16:creationId xmlns:a16="http://schemas.microsoft.com/office/drawing/2014/main" id="{46A44853-19EF-4FA1-9EE0-286617FE7C24}"/>
               </a:ext>
             </a:extLst>
           </p:cNvPr>
@@ -1883,7 +2595,7 @@
           <p:cNvPr id="2" name="course-title">
             <a:extLst xmlns:a="http://schemas.openxmlformats.org/drawingml/2006/main">
               <a:ext uri="{FF2B5EF4-FFF2-40B4-BE49-F238E27FC236}">
-                <a16:creationId xmlns:a16="http://schemas.microsoft.com/office/drawing/2014/main" id="{0BBAB58D-D8C2-4848-AB3D-1983B26AF70A}"/>
+                <a16:creationId xmlns:a16="http://schemas.microsoft.com/office/drawing/2014/main" id="{05728E24-8364-443D-BA9B-34B7CC6D6DFA}"/>
               </a:ext>
             </a:extLst>
           </p:cNvPr>
@@ -1941,7 +2653,7 @@
           <p:cNvPr id="3" name="chapter-number">
             <a:extLst xmlns:a="http://schemas.openxmlformats.org/drawingml/2006/main">
               <a:ext uri="{FF2B5EF4-FFF2-40B4-BE49-F238E27FC236}">
-                <a16:creationId xmlns:a16="http://schemas.microsoft.com/office/drawing/2014/main" id="{B33B42E4-B5FB-4814-B639-4DCBCDC5A11D}"/>
+                <a16:creationId xmlns:a16="http://schemas.microsoft.com/office/drawing/2014/main" id="{D8D3A878-5DFC-4C9D-83F6-2CF4E3F6E71F}"/>
               </a:ext>
             </a:extLst>
           </p:cNvPr>
@@ -1999,7 +2711,7 @@
           <p:cNvPr id="4" name="deck-title">
             <a:extLst xmlns:a="http://schemas.openxmlformats.org/drawingml/2006/main">
               <a:ext uri="{FF2B5EF4-FFF2-40B4-BE49-F238E27FC236}">
-                <a16:creationId xmlns:a16="http://schemas.microsoft.com/office/drawing/2014/main" id="{2DC201F0-C45C-4ABF-A0A0-C0077C20427C}"/>
+                <a16:creationId xmlns:a16="http://schemas.microsoft.com/office/drawing/2014/main" id="{BE79B6AC-E220-46EF-AF6B-7F026A1582E7}"/>
               </a:ext>
             </a:extLst>
           </p:cNvPr>
@@ -2057,7 +2769,7 @@
           <p:cNvPr id="5" name="deck-thesis">
             <a:extLst xmlns:a="http://schemas.openxmlformats.org/drawingml/2006/main">
               <a:ext uri="{FF2B5EF4-FFF2-40B4-BE49-F238E27FC236}">
-                <a16:creationId xmlns:a16="http://schemas.microsoft.com/office/drawing/2014/main" id="{A56F65CD-CF5E-429D-8222-3B2B468A1306}"/>
+                <a16:creationId xmlns:a16="http://schemas.microsoft.com/office/drawing/2014/main" id="{5E8FDBDD-6932-43D0-9B22-203B06DB7672}"/>
               </a:ext>
             </a:extLst>
           </p:cNvPr>
@@ -2115,7 +2827,7 @@
           <p:cNvPr id="6" name="title-marker">
             <a:extLst xmlns:a="http://schemas.openxmlformats.org/drawingml/2006/main">
               <a:ext uri="{FF2B5EF4-FFF2-40B4-BE49-F238E27FC236}">
-                <a16:creationId xmlns:a16="http://schemas.microsoft.com/office/drawing/2014/main" id="{A7D1CF64-2C36-479E-AB6E-89447D1C574D}"/>
+                <a16:creationId xmlns:a16="http://schemas.microsoft.com/office/drawing/2014/main" id="{341D4A5C-B4DF-46AC-B362-A5AC86A0AC59}"/>
               </a:ext>
             </a:extLst>
           </p:cNvPr>
@@ -2148,7 +2860,7 @@
           <p:cNvPr id="7" name="title-marker-text">
             <a:extLst xmlns:a="http://schemas.openxmlformats.org/drawingml/2006/main">
               <a:ext uri="{FF2B5EF4-FFF2-40B4-BE49-F238E27FC236}">
-                <a16:creationId xmlns:a16="http://schemas.microsoft.com/office/drawing/2014/main" id="{F5AF5C8E-9D0C-44AD-BF94-724116F53175}"/>
+                <a16:creationId xmlns:a16="http://schemas.microsoft.com/office/drawing/2014/main" id="{8BD954F8-8ACD-4DD4-AA09-1977B2273A40}"/>
               </a:ext>
             </a:extLst>
           </p:cNvPr>
@@ -2227,7 +2939,7 @@
     </p:spTree>
     <p:extLst>
       <p:ext uri="{BB962C8B-B14F-4D97-AF65-F5344CB8AC3E}">
-        <p14:creationId xmlns:p14="http://schemas.microsoft.com/office/powerpoint/2010/main" val="1971147573"/>
+        <p14:creationId xmlns:p14="http://schemas.microsoft.com/office/powerpoint/2010/main" val="1927400992"/>
       </p:ext>
     </p:extLst>
   </p:cSld>
@@ -2235,6 +2947,996 @@
 </file>
 
 <file path=ppt/slides/slide10.xml><?xml version="1.0" encoding="utf-8"?>
+<p:sld xmlns:p="http://schemas.openxmlformats.org/presentationml/2006/main">
+  <p:cSld>
+    <p:bg>
+      <p:bgPr>
+        <a:solidFill xmlns:a="http://schemas.openxmlformats.org/drawingml/2006/main">
+          <a:srgbClr val="FFFFFF"/>
+        </a:solidFill>
+      </p:bgPr>
+    </p:bg>
+    <p:spTree>
+      <p:nvGrpSpPr>
+        <p:cNvPr id="1" name=""/>
+        <p:cNvGrpSpPr/>
+        <p:nvPr/>
+      </p:nvGrpSpPr>
+      <p:grpSpPr>
+        <a:xfrm xmlns:a="http://schemas.openxmlformats.org/drawingml/2006/main"/>
+      </p:grpSpPr>
+      <p:sp>
+        <p:nvSpPr>
+          <p:cNvPr id="18" name="accent-line">
+            <a:extLst xmlns:a="http://schemas.openxmlformats.org/drawingml/2006/main">
+              <a:ext uri="{FF2B5EF4-FFF2-40B4-BE49-F238E27FC236}">
+                <a16:creationId xmlns:a16="http://schemas.microsoft.com/office/drawing/2014/main" id="{E88AD15E-6E1F-47A9-8CC9-AFB52ED0C4BC}"/>
+              </a:ext>
+            </a:extLst>
+          </p:cNvPr>
+          <p:cNvSpPr>
+            <a:spLocks xmlns:a="http://schemas.openxmlformats.org/drawingml/2006/main" noGrp="1"/>
+          </p:cNvSpPr>
+          <p:nvPr/>
+        </p:nvSpPr>
+        <p:spPr>
+          <a:xfrm xmlns:a="http://schemas.openxmlformats.org/drawingml/2006/main">
+            <a:off x="390525" y="304800"/>
+            <a:ext cx="11410950" cy="66675"/>
+          </a:xfrm>
+          <a:prstGeom xmlns:a="http://schemas.openxmlformats.org/drawingml/2006/main" prst="rect">
+            <a:avLst/>
+          </a:prstGeom>
+          <a:solidFill xmlns:a="http://schemas.openxmlformats.org/drawingml/2006/main">
+            <a:srgbClr val="C4A1FF"/>
+          </a:solidFill>
+          <a:ln xmlns:a="http://schemas.openxmlformats.org/drawingml/2006/main" w="0">
+            <a:solidFill>
+              <a:srgbClr val="C4A1FF"/>
+            </a:solidFill>
+            <a:prstDash val="solid"/>
+          </a:ln>
+        </p:spPr>
+      </p:sp>
+      <p:sp>
+        <p:nvSpPr>
+          <p:cNvPr id="2" name="chapter-label">
+            <a:extLst xmlns:a="http://schemas.openxmlformats.org/drawingml/2006/main">
+              <a:ext uri="{FF2B5EF4-FFF2-40B4-BE49-F238E27FC236}">
+                <a16:creationId xmlns:a16="http://schemas.microsoft.com/office/drawing/2014/main" id="{B90C0401-FB42-47B3-88DA-2FF5DEF13FAE}"/>
+              </a:ext>
+            </a:extLst>
+          </p:cNvPr>
+          <p:cNvSpPr>
+            <a:spLocks xmlns:a="http://schemas.openxmlformats.org/drawingml/2006/main" noGrp="1"/>
+          </p:cNvSpPr>
+          <p:nvPr/>
+        </p:nvSpPr>
+        <p:spPr>
+          <a:xfrm xmlns:a="http://schemas.openxmlformats.org/drawingml/2006/main">
+            <a:off x="390525" y="466725"/>
+            <a:ext cx="4953000" cy="323850"/>
+          </a:xfrm>
+          <a:prstGeom xmlns:a="http://schemas.openxmlformats.org/drawingml/2006/main" prst="rect">
+            <a:avLst/>
+          </a:prstGeom>
+          <a:noFill xmlns:a="http://schemas.openxmlformats.org/drawingml/2006/main"/>
+          <a:ln xmlns:a="http://schemas.openxmlformats.org/drawingml/2006/main" w="0">
+            <a:noFill/>
+            <a:prstDash val="solid"/>
+          </a:ln>
+        </p:spPr>
+        <p:txBody>
+          <a:bodyPr xmlns:a="http://schemas.openxmlformats.org/drawingml/2006/main" anchor="t">
+            <a:noAutofit/>
+          </a:bodyPr>
+          <a:lstStyle xmlns:a="http://schemas.openxmlformats.org/drawingml/2006/main"/>
+          <a:p xmlns:a="http://schemas.openxmlformats.org/drawingml/2006/main">
+            <a:pPr algn="l">
+              <a:defRPr sz="1275" b="1">
+                <a:solidFill>
+                  <a:srgbClr val="5B5B57"/>
+                </a:solidFill>
+                <a:latin typeface="Helvetica Neue"/>
+                <a:ea typeface="Helvetica Neue"/>
+                <a:cs typeface="Helvetica Neue"/>
+              </a:defRPr>
+            </a:pPr>
+            <a:r>
+              <a:rPr sz="1275" b="1">
+                <a:solidFill>
+                  <a:srgbClr val="5B5B57"/>
+                </a:solidFill>
+                <a:latin typeface="Helvetica Neue"/>
+                <a:ea typeface="Helvetica Neue"/>
+                <a:cs typeface="Helvetica Neue"/>
+              </a:rPr>
+              <a:t>EXAM CHECK  /  12</a:t>
+            </a:r>
+          </a:p>
+        </p:txBody>
+      </p:sp>
+      <p:sp>
+        <p:nvSpPr>
+          <p:cNvPr id="3" name="slide-number">
+            <a:extLst xmlns:a="http://schemas.openxmlformats.org/drawingml/2006/main">
+              <a:ext uri="{FF2B5EF4-FFF2-40B4-BE49-F238E27FC236}">
+                <a16:creationId xmlns:a16="http://schemas.microsoft.com/office/drawing/2014/main" id="{2B988EC0-FD27-4737-ADF7-1C2FE9FBF884}"/>
+              </a:ext>
+            </a:extLst>
+          </p:cNvPr>
+          <p:cNvSpPr>
+            <a:spLocks xmlns:a="http://schemas.openxmlformats.org/drawingml/2006/main" noGrp="1"/>
+          </p:cNvSpPr>
+          <p:nvPr/>
+        </p:nvSpPr>
+        <p:spPr>
+          <a:xfrm xmlns:a="http://schemas.openxmlformats.org/drawingml/2006/main">
+            <a:off x="11049000" y="6286500"/>
+            <a:ext cx="742950" cy="266700"/>
+          </a:xfrm>
+          <a:prstGeom xmlns:a="http://schemas.openxmlformats.org/drawingml/2006/main" prst="rect">
+            <a:avLst/>
+          </a:prstGeom>
+          <a:noFill xmlns:a="http://schemas.openxmlformats.org/drawingml/2006/main"/>
+          <a:ln xmlns:a="http://schemas.openxmlformats.org/drawingml/2006/main" w="0">
+            <a:noFill/>
+            <a:prstDash val="solid"/>
+          </a:ln>
+        </p:spPr>
+        <p:txBody>
+          <a:bodyPr xmlns:a="http://schemas.openxmlformats.org/drawingml/2006/main" anchor="t">
+            <a:noAutofit/>
+          </a:bodyPr>
+          <a:lstStyle xmlns:a="http://schemas.openxmlformats.org/drawingml/2006/main"/>
+          <a:p xmlns:a="http://schemas.openxmlformats.org/drawingml/2006/main">
+            <a:pPr algn="r">
+              <a:defRPr sz="1200" b="0">
+                <a:solidFill>
+                  <a:srgbClr val="5B5B57"/>
+                </a:solidFill>
+                <a:latin typeface="Helvetica Neue"/>
+                <a:ea typeface="Helvetica Neue"/>
+                <a:cs typeface="Helvetica Neue"/>
+              </a:defRPr>
+            </a:pPr>
+            <a:r>
+              <a:rPr sz="1200" b="0">
+                <a:solidFill>
+                  <a:srgbClr val="5B5B57"/>
+                </a:solidFill>
+                <a:latin typeface="Helvetica Neue"/>
+                <a:ea typeface="Helvetica Neue"/>
+                <a:cs typeface="Helvetica Neue"/>
+              </a:rPr>
+              <a:t>10</a:t>
+            </a:r>
+          </a:p>
+        </p:txBody>
+      </p:sp>
+      <p:sp>
+        <p:nvSpPr>
+          <p:cNvPr id="4" name="chapter-footer">
+            <a:extLst xmlns:a="http://schemas.openxmlformats.org/drawingml/2006/main">
+              <a:ext uri="{FF2B5EF4-FFF2-40B4-BE49-F238E27FC236}">
+                <a16:creationId xmlns:a16="http://schemas.microsoft.com/office/drawing/2014/main" id="{9ADD2FAF-4F85-4E1A-88DE-7C3B75EB63D0}"/>
+              </a:ext>
+            </a:extLst>
+          </p:cNvPr>
+          <p:cNvSpPr>
+            <a:spLocks xmlns:a="http://schemas.openxmlformats.org/drawingml/2006/main" noGrp="1"/>
+          </p:cNvSpPr>
+          <p:nvPr/>
+        </p:nvSpPr>
+        <p:spPr>
+          <a:xfrm xmlns:a="http://schemas.openxmlformats.org/drawingml/2006/main">
+            <a:off x="390525" y="6286500"/>
+            <a:ext cx="8191500" cy="266700"/>
+          </a:xfrm>
+          <a:prstGeom xmlns:a="http://schemas.openxmlformats.org/drawingml/2006/main" prst="rect">
+            <a:avLst/>
+          </a:prstGeom>
+          <a:noFill xmlns:a="http://schemas.openxmlformats.org/drawingml/2006/main"/>
+          <a:ln xmlns:a="http://schemas.openxmlformats.org/drawingml/2006/main" w="0">
+            <a:noFill/>
+            <a:prstDash val="solid"/>
+          </a:ln>
+        </p:spPr>
+        <p:txBody>
+          <a:bodyPr xmlns:a="http://schemas.openxmlformats.org/drawingml/2006/main" anchor="t">
+            <a:noAutofit/>
+          </a:bodyPr>
+          <a:lstStyle xmlns:a="http://schemas.openxmlformats.org/drawingml/2006/main"/>
+          <a:p xmlns:a="http://schemas.openxmlformats.org/drawingml/2006/main">
+            <a:pPr algn="l">
+              <a:defRPr sz="1125" b="0">
+                <a:solidFill>
+                  <a:srgbClr val="5B5B57"/>
+                </a:solidFill>
+                <a:latin typeface="Helvetica Neue"/>
+                <a:ea typeface="Helvetica Neue"/>
+                <a:cs typeface="Helvetica Neue"/>
+              </a:defRPr>
+            </a:pPr>
+            <a:r>
+              <a:rPr sz="1125" b="0">
+                <a:solidFill>
+                  <a:srgbClr val="5B5B57"/>
+                </a:solidFill>
+                <a:latin typeface="Helvetica Neue"/>
+                <a:ea typeface="Helvetica Neue"/>
+                <a:cs typeface="Helvetica Neue"/>
+              </a:rPr>
+              <a:t>Safety and Security</a:t>
+            </a:r>
+          </a:p>
+        </p:txBody>
+      </p:sp>
+      <p:sp>
+        <p:nvSpPr>
+          <p:cNvPr id="5" name="exam-title">
+            <a:extLst xmlns:a="http://schemas.openxmlformats.org/drawingml/2006/main">
+              <a:ext uri="{FF2B5EF4-FFF2-40B4-BE49-F238E27FC236}">
+                <a16:creationId xmlns:a16="http://schemas.microsoft.com/office/drawing/2014/main" id="{EF8A5501-107E-4583-93D9-712263DC48FD}"/>
+              </a:ext>
+            </a:extLst>
+          </p:cNvPr>
+          <p:cNvSpPr>
+            <a:spLocks xmlns:a="http://schemas.openxmlformats.org/drawingml/2006/main" noGrp="1"/>
+          </p:cNvSpPr>
+          <p:nvPr/>
+        </p:nvSpPr>
+        <p:spPr>
+          <a:xfrm xmlns:a="http://schemas.openxmlformats.org/drawingml/2006/main">
+            <a:off x="390525" y="981075"/>
+            <a:ext cx="10668000" cy="781050"/>
+          </a:xfrm>
+          <a:prstGeom xmlns:a="http://schemas.openxmlformats.org/drawingml/2006/main" prst="rect">
+            <a:avLst/>
+          </a:prstGeom>
+          <a:noFill xmlns:a="http://schemas.openxmlformats.org/drawingml/2006/main"/>
+          <a:ln xmlns:a="http://schemas.openxmlformats.org/drawingml/2006/main" w="0">
+            <a:noFill/>
+            <a:prstDash val="solid"/>
+          </a:ln>
+        </p:spPr>
+        <p:txBody>
+          <a:bodyPr xmlns:a="http://schemas.openxmlformats.org/drawingml/2006/main" anchor="t">
+            <a:noAutofit/>
+          </a:bodyPr>
+          <a:lstStyle xmlns:a="http://schemas.openxmlformats.org/drawingml/2006/main"/>
+          <a:p xmlns:a="http://schemas.openxmlformats.org/drawingml/2006/main">
+            <a:pPr algn="l">
+              <a:defRPr sz="3150" b="1">
+                <a:solidFill>
+                  <a:srgbClr val="111111"/>
+                </a:solidFill>
+                <a:latin typeface="Helvetica Neue"/>
+                <a:ea typeface="Helvetica Neue"/>
+                <a:cs typeface="Helvetica Neue"/>
+              </a:defRPr>
+            </a:pPr>
+            <a:r>
+              <a:rPr sz="3150" b="1">
+                <a:solidFill>
+                  <a:srgbClr val="111111"/>
+                </a:solidFill>
+                <a:latin typeface="Helvetica Neue"/>
+                <a:ea typeface="Helvetica Neue"/>
+                <a:cs typeface="Helvetica Neue"/>
+              </a:rPr>
+              <a:t>Can you answer these without notes?</a:t>
+            </a:r>
+          </a:p>
+        </p:txBody>
+      </p:sp>
+      <p:sp>
+        <p:nvSpPr>
+          <p:cNvPr id="6" name="exam-number-1">
+            <a:extLst xmlns:a="http://schemas.openxmlformats.org/drawingml/2006/main">
+              <a:ext uri="{FF2B5EF4-FFF2-40B4-BE49-F238E27FC236}">
+                <a16:creationId xmlns:a16="http://schemas.microsoft.com/office/drawing/2014/main" id="{D3447F27-E91E-429F-AC2E-A40E423D8630}"/>
+              </a:ext>
+            </a:extLst>
+          </p:cNvPr>
+          <p:cNvSpPr>
+            <a:spLocks xmlns:a="http://schemas.openxmlformats.org/drawingml/2006/main" noGrp="1"/>
+          </p:cNvSpPr>
+          <p:nvPr/>
+        </p:nvSpPr>
+        <p:spPr>
+          <a:xfrm xmlns:a="http://schemas.openxmlformats.org/drawingml/2006/main">
+            <a:off x="390525" y="2238375"/>
+            <a:ext cx="590550" cy="400050"/>
+          </a:xfrm>
+          <a:prstGeom xmlns:a="http://schemas.openxmlformats.org/drawingml/2006/main" prst="rect">
+            <a:avLst/>
+          </a:prstGeom>
+          <a:noFill xmlns:a="http://schemas.openxmlformats.org/drawingml/2006/main"/>
+          <a:ln xmlns:a="http://schemas.openxmlformats.org/drawingml/2006/main" w="0">
+            <a:noFill/>
+            <a:prstDash val="solid"/>
+          </a:ln>
+        </p:spPr>
+        <p:txBody>
+          <a:bodyPr xmlns:a="http://schemas.openxmlformats.org/drawingml/2006/main" anchor="t">
+            <a:noAutofit/>
+          </a:bodyPr>
+          <a:lstStyle xmlns:a="http://schemas.openxmlformats.org/drawingml/2006/main"/>
+          <a:p xmlns:a="http://schemas.openxmlformats.org/drawingml/2006/main">
+            <a:pPr algn="l">
+              <a:defRPr sz="1725" b="1">
+                <a:solidFill>
+                  <a:srgbClr val="C4A1FF"/>
+                </a:solidFill>
+                <a:latin typeface="Helvetica Neue"/>
+                <a:ea typeface="Helvetica Neue"/>
+                <a:cs typeface="Helvetica Neue"/>
+              </a:defRPr>
+            </a:pPr>
+            <a:r>
+              <a:rPr sz="1725" b="1">
+                <a:solidFill>
+                  <a:srgbClr val="C4A1FF"/>
+                </a:solidFill>
+                <a:latin typeface="Helvetica Neue"/>
+                <a:ea typeface="Helvetica Neue"/>
+                <a:cs typeface="Helvetica Neue"/>
+              </a:rPr>
+              <a:t>01</a:t>
+            </a:r>
+          </a:p>
+        </p:txBody>
+      </p:sp>
+      <p:sp>
+        <p:nvSpPr>
+          <p:cNvPr id="7" name="exam-question-1">
+            <a:extLst xmlns:a="http://schemas.openxmlformats.org/drawingml/2006/main">
+              <a:ext uri="{FF2B5EF4-FFF2-40B4-BE49-F238E27FC236}">
+                <a16:creationId xmlns:a16="http://schemas.microsoft.com/office/drawing/2014/main" id="{DD707F0F-1036-40FB-98B8-D938122F6C3E}"/>
+              </a:ext>
+            </a:extLst>
+          </p:cNvPr>
+          <p:cNvSpPr>
+            <a:spLocks xmlns:a="http://schemas.openxmlformats.org/drawingml/2006/main" noGrp="1"/>
+          </p:cNvSpPr>
+          <p:nvPr/>
+        </p:nvSpPr>
+        <p:spPr>
+          <a:xfrm xmlns:a="http://schemas.openxmlformats.org/drawingml/2006/main">
+            <a:off x="1076325" y="2238375"/>
+            <a:ext cx="4762500" cy="895350"/>
+          </a:xfrm>
+          <a:prstGeom xmlns:a="http://schemas.openxmlformats.org/drawingml/2006/main" prst="rect">
+            <a:avLst/>
+          </a:prstGeom>
+          <a:noFill xmlns:a="http://schemas.openxmlformats.org/drawingml/2006/main"/>
+          <a:ln xmlns:a="http://schemas.openxmlformats.org/drawingml/2006/main" w="0">
+            <a:noFill/>
+            <a:prstDash val="solid"/>
+          </a:ln>
+        </p:spPr>
+        <p:txBody>
+          <a:bodyPr xmlns:a="http://schemas.openxmlformats.org/drawingml/2006/main" anchor="t">
+            <a:normAutofit fontScale="100000"/>
+          </a:bodyPr>
+          <a:lstStyle xmlns:a="http://schemas.openxmlformats.org/drawingml/2006/main"/>
+          <a:p xmlns:a="http://schemas.openxmlformats.org/drawingml/2006/main">
+            <a:pPr algn="l">
+              <a:defRPr sz="1575" b="1">
+                <a:solidFill>
+                  <a:srgbClr val="111111"/>
+                </a:solidFill>
+                <a:latin typeface="Helvetica Neue"/>
+                <a:ea typeface="Helvetica Neue"/>
+                <a:cs typeface="Helvetica Neue"/>
+              </a:defRPr>
+            </a:pPr>
+            <a:r>
+              <a:rPr sz="1575" b="1">
+                <a:solidFill>
+                  <a:srgbClr val="111111"/>
+                </a:solidFill>
+                <a:latin typeface="Helvetica Neue"/>
+                <a:ea typeface="Helvetica Neue"/>
+                <a:cs typeface="Helvetica Neue"/>
+              </a:rPr>
+              <a:t>Why does agent action raise the stakes compared with a chatbot?</a:t>
+            </a:r>
+          </a:p>
+        </p:txBody>
+      </p:sp>
+      <p:sp>
+        <p:nvSpPr>
+          <p:cNvPr id="8" name="exam-number-2">
+            <a:extLst xmlns:a="http://schemas.openxmlformats.org/drawingml/2006/main">
+              <a:ext uri="{FF2B5EF4-FFF2-40B4-BE49-F238E27FC236}">
+                <a16:creationId xmlns:a16="http://schemas.microsoft.com/office/drawing/2014/main" id="{CA8879FD-2B9E-42A0-80F0-4B9910F6A345}"/>
+              </a:ext>
+            </a:extLst>
+          </p:cNvPr>
+          <p:cNvSpPr>
+            <a:spLocks xmlns:a="http://schemas.openxmlformats.org/drawingml/2006/main" noGrp="1"/>
+          </p:cNvSpPr>
+          <p:nvPr/>
+        </p:nvSpPr>
+        <p:spPr>
+          <a:xfrm xmlns:a="http://schemas.openxmlformats.org/drawingml/2006/main">
+            <a:off x="6191250" y="2238375"/>
+            <a:ext cx="590550" cy="400050"/>
+          </a:xfrm>
+          <a:prstGeom xmlns:a="http://schemas.openxmlformats.org/drawingml/2006/main" prst="rect">
+            <a:avLst/>
+          </a:prstGeom>
+          <a:noFill xmlns:a="http://schemas.openxmlformats.org/drawingml/2006/main"/>
+          <a:ln xmlns:a="http://schemas.openxmlformats.org/drawingml/2006/main" w="0">
+            <a:noFill/>
+            <a:prstDash val="solid"/>
+          </a:ln>
+        </p:spPr>
+        <p:txBody>
+          <a:bodyPr xmlns:a="http://schemas.openxmlformats.org/drawingml/2006/main" anchor="t">
+            <a:noAutofit/>
+          </a:bodyPr>
+          <a:lstStyle xmlns:a="http://schemas.openxmlformats.org/drawingml/2006/main"/>
+          <a:p xmlns:a="http://schemas.openxmlformats.org/drawingml/2006/main">
+            <a:pPr algn="l">
+              <a:defRPr sz="1725" b="1">
+                <a:solidFill>
+                  <a:srgbClr val="C4A1FF"/>
+                </a:solidFill>
+                <a:latin typeface="Helvetica Neue"/>
+                <a:ea typeface="Helvetica Neue"/>
+                <a:cs typeface="Helvetica Neue"/>
+              </a:defRPr>
+            </a:pPr>
+            <a:r>
+              <a:rPr sz="1725" b="1">
+                <a:solidFill>
+                  <a:srgbClr val="C4A1FF"/>
+                </a:solidFill>
+                <a:latin typeface="Helvetica Neue"/>
+                <a:ea typeface="Helvetica Neue"/>
+                <a:cs typeface="Helvetica Neue"/>
+              </a:rPr>
+              <a:t>02</a:t>
+            </a:r>
+          </a:p>
+        </p:txBody>
+      </p:sp>
+      <p:sp>
+        <p:nvSpPr>
+          <p:cNvPr id="9" name="exam-question-2">
+            <a:extLst xmlns:a="http://schemas.openxmlformats.org/drawingml/2006/main">
+              <a:ext uri="{FF2B5EF4-FFF2-40B4-BE49-F238E27FC236}">
+                <a16:creationId xmlns:a16="http://schemas.microsoft.com/office/drawing/2014/main" id="{1AB13D3F-0DF9-4FB5-AEE1-4949D449A988}"/>
+              </a:ext>
+            </a:extLst>
+          </p:cNvPr>
+          <p:cNvSpPr>
+            <a:spLocks xmlns:a="http://schemas.openxmlformats.org/drawingml/2006/main" noGrp="1"/>
+          </p:cNvSpPr>
+          <p:nvPr/>
+        </p:nvSpPr>
+        <p:spPr>
+          <a:xfrm xmlns:a="http://schemas.openxmlformats.org/drawingml/2006/main">
+            <a:off x="6877050" y="2238375"/>
+            <a:ext cx="4762500" cy="895350"/>
+          </a:xfrm>
+          <a:prstGeom xmlns:a="http://schemas.openxmlformats.org/drawingml/2006/main" prst="rect">
+            <a:avLst/>
+          </a:prstGeom>
+          <a:noFill xmlns:a="http://schemas.openxmlformats.org/drawingml/2006/main"/>
+          <a:ln xmlns:a="http://schemas.openxmlformats.org/drawingml/2006/main" w="0">
+            <a:noFill/>
+            <a:prstDash val="solid"/>
+          </a:ln>
+        </p:spPr>
+        <p:txBody>
+          <a:bodyPr xmlns:a="http://schemas.openxmlformats.org/drawingml/2006/main" anchor="t">
+            <a:normAutofit fontScale="100000"/>
+          </a:bodyPr>
+          <a:lstStyle xmlns:a="http://schemas.openxmlformats.org/drawingml/2006/main"/>
+          <a:p xmlns:a="http://schemas.openxmlformats.org/drawingml/2006/main">
+            <a:pPr algn="l">
+              <a:defRPr sz="1575" b="1">
+                <a:solidFill>
+                  <a:srgbClr val="111111"/>
+                </a:solidFill>
+                <a:latin typeface="Helvetica Neue"/>
+                <a:ea typeface="Helvetica Neue"/>
+                <a:cs typeface="Helvetica Neue"/>
+              </a:defRPr>
+            </a:pPr>
+            <a:r>
+              <a:rPr sz="1575" b="1">
+                <a:solidFill>
+                  <a:srgbClr val="111111"/>
+                </a:solidFill>
+                <a:latin typeface="Helvetica Neue"/>
+                <a:ea typeface="Helvetica Neue"/>
+                <a:cs typeface="Helvetica Neue"/>
+              </a:rPr>
+              <a:t>Differentiate security risks and responsible-AI harms.</a:t>
+            </a:r>
+          </a:p>
+        </p:txBody>
+      </p:sp>
+      <p:sp>
+        <p:nvSpPr>
+          <p:cNvPr id="10" name="exam-number-3">
+            <a:extLst xmlns:a="http://schemas.openxmlformats.org/drawingml/2006/main">
+              <a:ext uri="{FF2B5EF4-FFF2-40B4-BE49-F238E27FC236}">
+                <a16:creationId xmlns:a16="http://schemas.microsoft.com/office/drawing/2014/main" id="{AC4A0172-D1E4-4C45-9396-6EA0569A2109}"/>
+              </a:ext>
+            </a:extLst>
+          </p:cNvPr>
+          <p:cNvSpPr>
+            <a:spLocks xmlns:a="http://schemas.openxmlformats.org/drawingml/2006/main" noGrp="1"/>
+          </p:cNvSpPr>
+          <p:nvPr/>
+        </p:nvSpPr>
+        <p:spPr>
+          <a:xfrm xmlns:a="http://schemas.openxmlformats.org/drawingml/2006/main">
+            <a:off x="390525" y="3495675"/>
+            <a:ext cx="590550" cy="400050"/>
+          </a:xfrm>
+          <a:prstGeom xmlns:a="http://schemas.openxmlformats.org/drawingml/2006/main" prst="rect">
+            <a:avLst/>
+          </a:prstGeom>
+          <a:noFill xmlns:a="http://schemas.openxmlformats.org/drawingml/2006/main"/>
+          <a:ln xmlns:a="http://schemas.openxmlformats.org/drawingml/2006/main" w="0">
+            <a:noFill/>
+            <a:prstDash val="solid"/>
+          </a:ln>
+        </p:spPr>
+        <p:txBody>
+          <a:bodyPr xmlns:a="http://schemas.openxmlformats.org/drawingml/2006/main" anchor="t">
+            <a:noAutofit/>
+          </a:bodyPr>
+          <a:lstStyle xmlns:a="http://schemas.openxmlformats.org/drawingml/2006/main"/>
+          <a:p xmlns:a="http://schemas.openxmlformats.org/drawingml/2006/main">
+            <a:pPr algn="l">
+              <a:defRPr sz="1725" b="1">
+                <a:solidFill>
+                  <a:srgbClr val="C4A1FF"/>
+                </a:solidFill>
+                <a:latin typeface="Helvetica Neue"/>
+                <a:ea typeface="Helvetica Neue"/>
+                <a:cs typeface="Helvetica Neue"/>
+              </a:defRPr>
+            </a:pPr>
+            <a:r>
+              <a:rPr sz="1725" b="1">
+                <a:solidFill>
+                  <a:srgbClr val="C4A1FF"/>
+                </a:solidFill>
+                <a:latin typeface="Helvetica Neue"/>
+                <a:ea typeface="Helvetica Neue"/>
+                <a:cs typeface="Helvetica Neue"/>
+              </a:rPr>
+              <a:t>03</a:t>
+            </a:r>
+          </a:p>
+        </p:txBody>
+      </p:sp>
+      <p:sp>
+        <p:nvSpPr>
+          <p:cNvPr id="11" name="exam-question-3">
+            <a:extLst xmlns:a="http://schemas.openxmlformats.org/drawingml/2006/main">
+              <a:ext uri="{FF2B5EF4-FFF2-40B4-BE49-F238E27FC236}">
+                <a16:creationId xmlns:a16="http://schemas.microsoft.com/office/drawing/2014/main" id="{0C936DE9-23CC-47B6-9707-2C88248B4059}"/>
+              </a:ext>
+            </a:extLst>
+          </p:cNvPr>
+          <p:cNvSpPr>
+            <a:spLocks xmlns:a="http://schemas.openxmlformats.org/drawingml/2006/main" noGrp="1"/>
+          </p:cNvSpPr>
+          <p:nvPr/>
+        </p:nvSpPr>
+        <p:spPr>
+          <a:xfrm xmlns:a="http://schemas.openxmlformats.org/drawingml/2006/main">
+            <a:off x="1076325" y="3495675"/>
+            <a:ext cx="4762500" cy="895350"/>
+          </a:xfrm>
+          <a:prstGeom xmlns:a="http://schemas.openxmlformats.org/drawingml/2006/main" prst="rect">
+            <a:avLst/>
+          </a:prstGeom>
+          <a:noFill xmlns:a="http://schemas.openxmlformats.org/drawingml/2006/main"/>
+          <a:ln xmlns:a="http://schemas.openxmlformats.org/drawingml/2006/main" w="0">
+            <a:noFill/>
+            <a:prstDash val="solid"/>
+          </a:ln>
+        </p:spPr>
+        <p:txBody>
+          <a:bodyPr xmlns:a="http://schemas.openxmlformats.org/drawingml/2006/main" anchor="t">
+            <a:normAutofit fontScale="100000"/>
+          </a:bodyPr>
+          <a:lstStyle xmlns:a="http://schemas.openxmlformats.org/drawingml/2006/main"/>
+          <a:p xmlns:a="http://schemas.openxmlformats.org/drawingml/2006/main">
+            <a:pPr algn="l">
+              <a:defRPr sz="1575" b="1">
+                <a:solidFill>
+                  <a:srgbClr val="111111"/>
+                </a:solidFill>
+                <a:latin typeface="Helvetica Neue"/>
+                <a:ea typeface="Helvetica Neue"/>
+                <a:cs typeface="Helvetica Neue"/>
+              </a:defRPr>
+            </a:pPr>
+            <a:r>
+              <a:rPr sz="1575" b="1">
+                <a:solidFill>
+                  <a:srgbClr val="111111"/>
+                </a:solidFill>
+                <a:latin typeface="Helvetica Neue"/>
+                <a:ea typeface="Helvetica Neue"/>
+                <a:cs typeface="Helvetica Neue"/>
+              </a:rPr>
+              <a:t>Compare direct and indirect prompt injection.</a:t>
+            </a:r>
+          </a:p>
+        </p:txBody>
+      </p:sp>
+      <p:sp>
+        <p:nvSpPr>
+          <p:cNvPr id="12" name="exam-number-4">
+            <a:extLst xmlns:a="http://schemas.openxmlformats.org/drawingml/2006/main">
+              <a:ext uri="{FF2B5EF4-FFF2-40B4-BE49-F238E27FC236}">
+                <a16:creationId xmlns:a16="http://schemas.microsoft.com/office/drawing/2014/main" id="{E8070A72-8C4A-4D85-A165-A3F63E1FDF13}"/>
+              </a:ext>
+            </a:extLst>
+          </p:cNvPr>
+          <p:cNvSpPr>
+            <a:spLocks xmlns:a="http://schemas.openxmlformats.org/drawingml/2006/main" noGrp="1"/>
+          </p:cNvSpPr>
+          <p:nvPr/>
+        </p:nvSpPr>
+        <p:spPr>
+          <a:xfrm xmlns:a="http://schemas.openxmlformats.org/drawingml/2006/main">
+            <a:off x="6191250" y="3495675"/>
+            <a:ext cx="590550" cy="400050"/>
+          </a:xfrm>
+          <a:prstGeom xmlns:a="http://schemas.openxmlformats.org/drawingml/2006/main" prst="rect">
+            <a:avLst/>
+          </a:prstGeom>
+          <a:noFill xmlns:a="http://schemas.openxmlformats.org/drawingml/2006/main"/>
+          <a:ln xmlns:a="http://schemas.openxmlformats.org/drawingml/2006/main" w="0">
+            <a:noFill/>
+            <a:prstDash val="solid"/>
+          </a:ln>
+        </p:spPr>
+        <p:txBody>
+          <a:bodyPr xmlns:a="http://schemas.openxmlformats.org/drawingml/2006/main" anchor="t">
+            <a:noAutofit/>
+          </a:bodyPr>
+          <a:lstStyle xmlns:a="http://schemas.openxmlformats.org/drawingml/2006/main"/>
+          <a:p xmlns:a="http://schemas.openxmlformats.org/drawingml/2006/main">
+            <a:pPr algn="l">
+              <a:defRPr sz="1725" b="1">
+                <a:solidFill>
+                  <a:srgbClr val="C4A1FF"/>
+                </a:solidFill>
+                <a:latin typeface="Helvetica Neue"/>
+                <a:ea typeface="Helvetica Neue"/>
+                <a:cs typeface="Helvetica Neue"/>
+              </a:defRPr>
+            </a:pPr>
+            <a:r>
+              <a:rPr sz="1725" b="1">
+                <a:solidFill>
+                  <a:srgbClr val="C4A1FF"/>
+                </a:solidFill>
+                <a:latin typeface="Helvetica Neue"/>
+                <a:ea typeface="Helvetica Neue"/>
+                <a:cs typeface="Helvetica Neue"/>
+              </a:rPr>
+              <a:t>04</a:t>
+            </a:r>
+          </a:p>
+        </p:txBody>
+      </p:sp>
+      <p:sp>
+        <p:nvSpPr>
+          <p:cNvPr id="13" name="exam-question-4">
+            <a:extLst xmlns:a="http://schemas.openxmlformats.org/drawingml/2006/main">
+              <a:ext uri="{FF2B5EF4-FFF2-40B4-BE49-F238E27FC236}">
+                <a16:creationId xmlns:a16="http://schemas.microsoft.com/office/drawing/2014/main" id="{A0F31D60-84D1-484E-B5EC-CBE5CA5AF018}"/>
+              </a:ext>
+            </a:extLst>
+          </p:cNvPr>
+          <p:cNvSpPr>
+            <a:spLocks xmlns:a="http://schemas.openxmlformats.org/drawingml/2006/main" noGrp="1"/>
+          </p:cNvSpPr>
+          <p:nvPr/>
+        </p:nvSpPr>
+        <p:spPr>
+          <a:xfrm xmlns:a="http://schemas.openxmlformats.org/drawingml/2006/main">
+            <a:off x="6877050" y="3495675"/>
+            <a:ext cx="4762500" cy="895350"/>
+          </a:xfrm>
+          <a:prstGeom xmlns:a="http://schemas.openxmlformats.org/drawingml/2006/main" prst="rect">
+            <a:avLst/>
+          </a:prstGeom>
+          <a:noFill xmlns:a="http://schemas.openxmlformats.org/drawingml/2006/main"/>
+          <a:ln xmlns:a="http://schemas.openxmlformats.org/drawingml/2006/main" w="0">
+            <a:noFill/>
+            <a:prstDash val="solid"/>
+          </a:ln>
+        </p:spPr>
+        <p:txBody>
+          <a:bodyPr xmlns:a="http://schemas.openxmlformats.org/drawingml/2006/main" anchor="t">
+            <a:normAutofit fontScale="100000"/>
+          </a:bodyPr>
+          <a:lstStyle xmlns:a="http://schemas.openxmlformats.org/drawingml/2006/main"/>
+          <a:p xmlns:a="http://schemas.openxmlformats.org/drawingml/2006/main">
+            <a:pPr algn="l">
+              <a:defRPr sz="1575" b="1">
+                <a:solidFill>
+                  <a:srgbClr val="111111"/>
+                </a:solidFill>
+                <a:latin typeface="Helvetica Neue"/>
+                <a:ea typeface="Helvetica Neue"/>
+                <a:cs typeface="Helvetica Neue"/>
+              </a:defRPr>
+            </a:pPr>
+            <a:r>
+              <a:rPr sz="1575" b="1">
+                <a:solidFill>
+                  <a:srgbClr val="111111"/>
+                </a:solidFill>
+                <a:latin typeface="Helvetica Neue"/>
+                <a:ea typeface="Helvetica Neue"/>
+                <a:cs typeface="Helvetica Neue"/>
+              </a:rPr>
+              <a:t>What is excessive agency and how is it mitigated?</a:t>
+            </a:r>
+          </a:p>
+        </p:txBody>
+      </p:sp>
+      <p:sp>
+        <p:nvSpPr>
+          <p:cNvPr id="14" name="exam-number-5">
+            <a:extLst xmlns:a="http://schemas.openxmlformats.org/drawingml/2006/main">
+              <a:ext uri="{FF2B5EF4-FFF2-40B4-BE49-F238E27FC236}">
+                <a16:creationId xmlns:a16="http://schemas.microsoft.com/office/drawing/2014/main" id="{3A4A89D2-679E-46A7-A7DA-5405CF481566}"/>
+              </a:ext>
+            </a:extLst>
+          </p:cNvPr>
+          <p:cNvSpPr>
+            <a:spLocks xmlns:a="http://schemas.openxmlformats.org/drawingml/2006/main" noGrp="1"/>
+          </p:cNvSpPr>
+          <p:nvPr/>
+        </p:nvSpPr>
+        <p:spPr>
+          <a:xfrm xmlns:a="http://schemas.openxmlformats.org/drawingml/2006/main">
+            <a:off x="390525" y="4752975"/>
+            <a:ext cx="590550" cy="400050"/>
+          </a:xfrm>
+          <a:prstGeom xmlns:a="http://schemas.openxmlformats.org/drawingml/2006/main" prst="rect">
+            <a:avLst/>
+          </a:prstGeom>
+          <a:noFill xmlns:a="http://schemas.openxmlformats.org/drawingml/2006/main"/>
+          <a:ln xmlns:a="http://schemas.openxmlformats.org/drawingml/2006/main" w="0">
+            <a:noFill/>
+            <a:prstDash val="solid"/>
+          </a:ln>
+        </p:spPr>
+        <p:txBody>
+          <a:bodyPr xmlns:a="http://schemas.openxmlformats.org/drawingml/2006/main" anchor="t">
+            <a:noAutofit/>
+          </a:bodyPr>
+          <a:lstStyle xmlns:a="http://schemas.openxmlformats.org/drawingml/2006/main"/>
+          <a:p xmlns:a="http://schemas.openxmlformats.org/drawingml/2006/main">
+            <a:pPr algn="l">
+              <a:defRPr sz="1725" b="1">
+                <a:solidFill>
+                  <a:srgbClr val="C4A1FF"/>
+                </a:solidFill>
+                <a:latin typeface="Helvetica Neue"/>
+                <a:ea typeface="Helvetica Neue"/>
+                <a:cs typeface="Helvetica Neue"/>
+              </a:defRPr>
+            </a:pPr>
+            <a:r>
+              <a:rPr sz="1725" b="1">
+                <a:solidFill>
+                  <a:srgbClr val="C4A1FF"/>
+                </a:solidFill>
+                <a:latin typeface="Helvetica Neue"/>
+                <a:ea typeface="Helvetica Neue"/>
+                <a:cs typeface="Helvetica Neue"/>
+              </a:rPr>
+              <a:t>05</a:t>
+            </a:r>
+          </a:p>
+        </p:txBody>
+      </p:sp>
+      <p:sp>
+        <p:nvSpPr>
+          <p:cNvPr id="15" name="exam-question-5">
+            <a:extLst xmlns:a="http://schemas.openxmlformats.org/drawingml/2006/main">
+              <a:ext uri="{FF2B5EF4-FFF2-40B4-BE49-F238E27FC236}">
+                <a16:creationId xmlns:a16="http://schemas.microsoft.com/office/drawing/2014/main" id="{5AE88412-F270-4284-A6B7-BF234ED307DC}"/>
+              </a:ext>
+            </a:extLst>
+          </p:cNvPr>
+          <p:cNvSpPr>
+            <a:spLocks xmlns:a="http://schemas.openxmlformats.org/drawingml/2006/main" noGrp="1"/>
+          </p:cNvSpPr>
+          <p:nvPr/>
+        </p:nvSpPr>
+        <p:spPr>
+          <a:xfrm xmlns:a="http://schemas.openxmlformats.org/drawingml/2006/main">
+            <a:off x="1076325" y="4752975"/>
+            <a:ext cx="4762500" cy="895350"/>
+          </a:xfrm>
+          <a:prstGeom xmlns:a="http://schemas.openxmlformats.org/drawingml/2006/main" prst="rect">
+            <a:avLst/>
+          </a:prstGeom>
+          <a:noFill xmlns:a="http://schemas.openxmlformats.org/drawingml/2006/main"/>
+          <a:ln xmlns:a="http://schemas.openxmlformats.org/drawingml/2006/main" w="0">
+            <a:noFill/>
+            <a:prstDash val="solid"/>
+          </a:ln>
+        </p:spPr>
+        <p:txBody>
+          <a:bodyPr xmlns:a="http://schemas.openxmlformats.org/drawingml/2006/main" anchor="t">
+            <a:normAutofit fontScale="100000"/>
+          </a:bodyPr>
+          <a:lstStyle xmlns:a="http://schemas.openxmlformats.org/drawingml/2006/main"/>
+          <a:p xmlns:a="http://schemas.openxmlformats.org/drawingml/2006/main">
+            <a:pPr algn="l">
+              <a:defRPr sz="1575" b="1">
+                <a:solidFill>
+                  <a:srgbClr val="111111"/>
+                </a:solidFill>
+                <a:latin typeface="Helvetica Neue"/>
+                <a:ea typeface="Helvetica Neue"/>
+                <a:cs typeface="Helvetica Neue"/>
+              </a:defRPr>
+            </a:pPr>
+            <a:r>
+              <a:rPr sz="1575" b="1">
+                <a:solidFill>
+                  <a:srgbClr val="111111"/>
+                </a:solidFill>
+                <a:latin typeface="Helvetica Neue"/>
+                <a:ea typeface="Helvetica Neue"/>
+                <a:cs typeface="Helvetica Neue"/>
+              </a:rPr>
+              <a:t>Design a defense-in-depth stack for a tool-using agent.</a:t>
+            </a:r>
+          </a:p>
+        </p:txBody>
+      </p:sp>
+      <p:sp>
+        <p:nvSpPr>
+          <p:cNvPr id="16" name="exam-number-6">
+            <a:extLst xmlns:a="http://schemas.openxmlformats.org/drawingml/2006/main">
+              <a:ext uri="{FF2B5EF4-FFF2-40B4-BE49-F238E27FC236}">
+                <a16:creationId xmlns:a16="http://schemas.microsoft.com/office/drawing/2014/main" id="{73EB39A7-4A86-48A8-BE44-262BDBEAE748}"/>
+              </a:ext>
+            </a:extLst>
+          </p:cNvPr>
+          <p:cNvSpPr>
+            <a:spLocks xmlns:a="http://schemas.openxmlformats.org/drawingml/2006/main" noGrp="1"/>
+          </p:cNvSpPr>
+          <p:nvPr/>
+        </p:nvSpPr>
+        <p:spPr>
+          <a:xfrm xmlns:a="http://schemas.openxmlformats.org/drawingml/2006/main">
+            <a:off x="6191250" y="4752975"/>
+            <a:ext cx="590550" cy="400050"/>
+          </a:xfrm>
+          <a:prstGeom xmlns:a="http://schemas.openxmlformats.org/drawingml/2006/main" prst="rect">
+            <a:avLst/>
+          </a:prstGeom>
+          <a:noFill xmlns:a="http://schemas.openxmlformats.org/drawingml/2006/main"/>
+          <a:ln xmlns:a="http://schemas.openxmlformats.org/drawingml/2006/main" w="0">
+            <a:noFill/>
+            <a:prstDash val="solid"/>
+          </a:ln>
+        </p:spPr>
+        <p:txBody>
+          <a:bodyPr xmlns:a="http://schemas.openxmlformats.org/drawingml/2006/main" anchor="t">
+            <a:noAutofit/>
+          </a:bodyPr>
+          <a:lstStyle xmlns:a="http://schemas.openxmlformats.org/drawingml/2006/main"/>
+          <a:p xmlns:a="http://schemas.openxmlformats.org/drawingml/2006/main">
+            <a:pPr algn="l">
+              <a:defRPr sz="1725" b="1">
+                <a:solidFill>
+                  <a:srgbClr val="C4A1FF"/>
+                </a:solidFill>
+                <a:latin typeface="Helvetica Neue"/>
+                <a:ea typeface="Helvetica Neue"/>
+                <a:cs typeface="Helvetica Neue"/>
+              </a:defRPr>
+            </a:pPr>
+            <a:r>
+              <a:rPr sz="1725" b="1">
+                <a:solidFill>
+                  <a:srgbClr val="C4A1FF"/>
+                </a:solidFill>
+                <a:latin typeface="Helvetica Neue"/>
+                <a:ea typeface="Helvetica Neue"/>
+                <a:cs typeface="Helvetica Neue"/>
+              </a:rPr>
+              <a:t>06</a:t>
+            </a:r>
+          </a:p>
+        </p:txBody>
+      </p:sp>
+      <p:sp>
+        <p:nvSpPr>
+          <p:cNvPr id="17" name="exam-question-6">
+            <a:extLst xmlns:a="http://schemas.openxmlformats.org/drawingml/2006/main">
+              <a:ext uri="{FF2B5EF4-FFF2-40B4-BE49-F238E27FC236}">
+                <a16:creationId xmlns:a16="http://schemas.microsoft.com/office/drawing/2014/main" id="{C890701C-E10F-4881-9C56-7EB90848D09F}"/>
+              </a:ext>
+            </a:extLst>
+          </p:cNvPr>
+          <p:cNvSpPr>
+            <a:spLocks xmlns:a="http://schemas.openxmlformats.org/drawingml/2006/main" noGrp="1"/>
+          </p:cNvSpPr>
+          <p:nvPr/>
+        </p:nvSpPr>
+        <p:spPr>
+          <a:xfrm xmlns:a="http://schemas.openxmlformats.org/drawingml/2006/main">
+            <a:off x="6877050" y="4752975"/>
+            <a:ext cx="4762500" cy="895350"/>
+          </a:xfrm>
+          <a:prstGeom xmlns:a="http://schemas.openxmlformats.org/drawingml/2006/main" prst="rect">
+            <a:avLst/>
+          </a:prstGeom>
+          <a:noFill xmlns:a="http://schemas.openxmlformats.org/drawingml/2006/main"/>
+          <a:ln xmlns:a="http://schemas.openxmlformats.org/drawingml/2006/main" w="0">
+            <a:noFill/>
+            <a:prstDash val="solid"/>
+          </a:ln>
+        </p:spPr>
+        <p:txBody>
+          <a:bodyPr xmlns:a="http://schemas.openxmlformats.org/drawingml/2006/main" anchor="t">
+            <a:normAutofit fontScale="100000"/>
+          </a:bodyPr>
+          <a:lstStyle xmlns:a="http://schemas.openxmlformats.org/drawingml/2006/main"/>
+          <a:p xmlns:a="http://schemas.openxmlformats.org/drawingml/2006/main">
+            <a:pPr algn="l">
+              <a:defRPr sz="1575" b="1">
+                <a:solidFill>
+                  <a:srgbClr val="111111"/>
+                </a:solidFill>
+                <a:latin typeface="Helvetica Neue"/>
+                <a:ea typeface="Helvetica Neue"/>
+                <a:cs typeface="Helvetica Neue"/>
+              </a:defRPr>
+            </a:pPr>
+            <a:r>
+              <a:rPr sz="1575" b="1">
+                <a:solidFill>
+                  <a:srgbClr val="111111"/>
+                </a:solidFill>
+                <a:latin typeface="Helvetica Neue"/>
+                <a:ea typeface="Helvetica Neue"/>
+                <a:cs typeface="Helvetica Neue"/>
+              </a:rPr>
+              <a:t>Why should a security report score model proposals and executed effects separately?</a:t>
+            </a:r>
+          </a:p>
+        </p:txBody>
+      </p:sp>
+    </p:spTree>
+    <p:extLst>
+      <p:ext uri="{BB962C8B-B14F-4D97-AF65-F5344CB8AC3E}">
+        <p14:creationId xmlns:p14="http://schemas.microsoft.com/office/powerpoint/2010/main" val="1200562268"/>
+      </p:ext>
+    </p:extLst>
+  </p:cSld>
+</p:sld>
+</file>
+
+<file path=ppt/slides/slide11.xml><?xml version="1.0" encoding="utf-8"?>
 <p:sld xmlns:p="http://schemas.openxmlformats.org/presentationml/2006/main">
   <p:cSld>
     <p:bg>
@@ -2258,7 +3960,7 @@
           <p:cNvPr id="14" name="accent-line">
             <a:extLst xmlns:a="http://schemas.openxmlformats.org/drawingml/2006/main">
               <a:ext uri="{FF2B5EF4-FFF2-40B4-BE49-F238E27FC236}">
-                <a16:creationId xmlns:a16="http://schemas.microsoft.com/office/drawing/2014/main" id="{D422151D-3E0A-40EF-83E1-94FCC4873E31}"/>
+                <a16:creationId xmlns:a16="http://schemas.microsoft.com/office/drawing/2014/main" id="{9BC37D49-CE48-4A1F-A84F-302938C6DE83}"/>
               </a:ext>
             </a:extLst>
           </p:cNvPr>
@@ -2291,7 +3993,7 @@
           <p:cNvPr id="2" name="chapter-label">
             <a:extLst xmlns:a="http://schemas.openxmlformats.org/drawingml/2006/main">
               <a:ext uri="{FF2B5EF4-FFF2-40B4-BE49-F238E27FC236}">
-                <a16:creationId xmlns:a16="http://schemas.microsoft.com/office/drawing/2014/main" id="{F7728947-358A-4181-B0A5-B7443F7E502A}"/>
+                <a16:creationId xmlns:a16="http://schemas.microsoft.com/office/drawing/2014/main" id="{3D3E0D1C-9BCB-4CAD-8B61-F43B2F3DF48D}"/>
               </a:ext>
             </a:extLst>
           </p:cNvPr>
@@ -2349,7 +4051,7 @@
           <p:cNvPr id="3" name="slide-number">
             <a:extLst xmlns:a="http://schemas.openxmlformats.org/drawingml/2006/main">
               <a:ext uri="{FF2B5EF4-FFF2-40B4-BE49-F238E27FC236}">
-                <a16:creationId xmlns:a16="http://schemas.microsoft.com/office/drawing/2014/main" id="{E2DFA4F4-CB94-4EA4-8738-B46CDC8218E5}"/>
+                <a16:creationId xmlns:a16="http://schemas.microsoft.com/office/drawing/2014/main" id="{0E6F3FD1-178F-4257-A347-180EC8C476C5}"/>
               </a:ext>
             </a:extLst>
           </p:cNvPr>
@@ -2397,7 +4099,7 @@
                 <a:ea typeface="Helvetica Neue"/>
                 <a:cs typeface="Helvetica Neue"/>
               </a:rPr>
-              <a:t>10</a:t>
+              <a:t>11</a:t>
             </a:r>
           </a:p>
         </p:txBody>
@@ -2407,7 +4109,7 @@
           <p:cNvPr id="4" name="chapter-footer">
             <a:extLst xmlns:a="http://schemas.openxmlformats.org/drawingml/2006/main">
               <a:ext uri="{FF2B5EF4-FFF2-40B4-BE49-F238E27FC236}">
-                <a16:creationId xmlns:a16="http://schemas.microsoft.com/office/drawing/2014/main" id="{8EC9B8E8-AE6A-4271-9361-340383F8CA5F}"/>
+                <a16:creationId xmlns:a16="http://schemas.microsoft.com/office/drawing/2014/main" id="{D5A0883E-09A2-4A26-B1FE-44428C7601EB}"/>
               </a:ext>
             </a:extLst>
           </p:cNvPr>
@@ -2465,7 +4167,7 @@
           <p:cNvPr id="5" name="closing-title">
             <a:extLst xmlns:a="http://schemas.openxmlformats.org/drawingml/2006/main">
               <a:ext uri="{FF2B5EF4-FFF2-40B4-BE49-F238E27FC236}">
-                <a16:creationId xmlns:a16="http://schemas.microsoft.com/office/drawing/2014/main" id="{B701A4F5-AA8A-4F07-8980-DE06012F3B0E}"/>
+                <a16:creationId xmlns:a16="http://schemas.microsoft.com/office/drawing/2014/main" id="{FC4065CF-CB33-4ABD-B7B3-6937071D6891}"/>
               </a:ext>
             </a:extLst>
           </p:cNvPr>
@@ -2523,7 +4225,7 @@
           <p:cNvPr id="6" name="takeaway-number-1">
             <a:extLst xmlns:a="http://schemas.openxmlformats.org/drawingml/2006/main">
               <a:ext uri="{FF2B5EF4-FFF2-40B4-BE49-F238E27FC236}">
-                <a16:creationId xmlns:a16="http://schemas.microsoft.com/office/drawing/2014/main" id="{B158D060-75EB-4EEC-A0E6-6E305ED21A10}"/>
+                <a16:creationId xmlns:a16="http://schemas.microsoft.com/office/drawing/2014/main" id="{CADBA53E-EA52-4477-9FFC-CABC33567615}"/>
               </a:ext>
             </a:extLst>
           </p:cNvPr>
@@ -2581,7 +4283,7 @@
           <p:cNvPr id="7" name="takeaway-1">
             <a:extLst xmlns:a="http://schemas.openxmlformats.org/drawingml/2006/main">
               <a:ext uri="{FF2B5EF4-FFF2-40B4-BE49-F238E27FC236}">
-                <a16:creationId xmlns:a16="http://schemas.microsoft.com/office/drawing/2014/main" id="{35F8FC3B-30D6-4F17-B849-D8B851364117}"/>
+                <a16:creationId xmlns:a16="http://schemas.microsoft.com/office/drawing/2014/main" id="{26085327-264E-464E-951D-C3575163A2DF}"/>
               </a:ext>
             </a:extLst>
           </p:cNvPr>
@@ -2639,7 +4341,7 @@
           <p:cNvPr id="8" name="takeaway-number-2">
             <a:extLst xmlns:a="http://schemas.openxmlformats.org/drawingml/2006/main">
               <a:ext uri="{FF2B5EF4-FFF2-40B4-BE49-F238E27FC236}">
-                <a16:creationId xmlns:a16="http://schemas.microsoft.com/office/drawing/2014/main" id="{39557B8B-384E-402E-A2A0-70F19492259A}"/>
+                <a16:creationId xmlns:a16="http://schemas.microsoft.com/office/drawing/2014/main" id="{CE8A6B5D-78DB-40E8-B878-83CCBA793A37}"/>
               </a:ext>
             </a:extLst>
           </p:cNvPr>
@@ -2697,7 +4399,7 @@
           <p:cNvPr id="9" name="takeaway-2">
             <a:extLst xmlns:a="http://schemas.openxmlformats.org/drawingml/2006/main">
               <a:ext uri="{FF2B5EF4-FFF2-40B4-BE49-F238E27FC236}">
-                <a16:creationId xmlns:a16="http://schemas.microsoft.com/office/drawing/2014/main" id="{C1228EB1-E5A0-4301-A87C-F827504268F9}"/>
+                <a16:creationId xmlns:a16="http://schemas.microsoft.com/office/drawing/2014/main" id="{CA84D31D-C7D4-4A59-9257-D70CDB7AFD0A}"/>
               </a:ext>
             </a:extLst>
           </p:cNvPr>
@@ -2755,7 +4457,7 @@
           <p:cNvPr id="10" name="takeaway-number-3">
             <a:extLst xmlns:a="http://schemas.openxmlformats.org/drawingml/2006/main">
               <a:ext uri="{FF2B5EF4-FFF2-40B4-BE49-F238E27FC236}">
-                <a16:creationId xmlns:a16="http://schemas.microsoft.com/office/drawing/2014/main" id="{14322785-B2FE-4D0D-8E58-58BC217F2E0D}"/>
+                <a16:creationId xmlns:a16="http://schemas.microsoft.com/office/drawing/2014/main" id="{E587191A-B1DD-45C4-9B84-6014693A7199}"/>
               </a:ext>
             </a:extLst>
           </p:cNvPr>
@@ -2813,7 +4515,7 @@
           <p:cNvPr id="11" name="takeaway-3">
             <a:extLst xmlns:a="http://schemas.openxmlformats.org/drawingml/2006/main">
               <a:ext uri="{FF2B5EF4-FFF2-40B4-BE49-F238E27FC236}">
-                <a16:creationId xmlns:a16="http://schemas.microsoft.com/office/drawing/2014/main" id="{75FFE8A1-D138-4B9A-A688-9218FCF20F57}"/>
+                <a16:creationId xmlns:a16="http://schemas.microsoft.com/office/drawing/2014/main" id="{4658B4FE-4B87-4AA5-8504-653E2E72A87B}"/>
               </a:ext>
             </a:extLst>
           </p:cNvPr>
@@ -2871,7 +4573,7 @@
           <p:cNvPr id="12" name="takeaway-number-4">
             <a:extLst xmlns:a="http://schemas.openxmlformats.org/drawingml/2006/main">
               <a:ext uri="{FF2B5EF4-FFF2-40B4-BE49-F238E27FC236}">
-                <a16:creationId xmlns:a16="http://schemas.microsoft.com/office/drawing/2014/main" id="{B48A00E1-3799-4CBB-98BA-4F3535ACD3DD}"/>
+                <a16:creationId xmlns:a16="http://schemas.microsoft.com/office/drawing/2014/main" id="{CCFD879C-16EC-44E1-87E5-72B8C7046A4A}"/>
               </a:ext>
             </a:extLst>
           </p:cNvPr>
@@ -2929,7 +4631,7 @@
           <p:cNvPr id="13" name="takeaway-4">
             <a:extLst xmlns:a="http://schemas.openxmlformats.org/drawingml/2006/main">
               <a:ext uri="{FF2B5EF4-FFF2-40B4-BE49-F238E27FC236}">
-                <a16:creationId xmlns:a16="http://schemas.microsoft.com/office/drawing/2014/main" id="{BB0648FE-0A80-4F9D-A8E0-6227EA1252C5}"/>
+                <a16:creationId xmlns:a16="http://schemas.microsoft.com/office/drawing/2014/main" id="{3F869411-B93B-495F-8D1F-651B80999BD1}"/>
               </a:ext>
             </a:extLst>
           </p:cNvPr>
@@ -2985,7 +4687,556 @@
     </p:spTree>
     <p:extLst>
       <p:ext uri="{BB962C8B-B14F-4D97-AF65-F5344CB8AC3E}">
-        <p14:creationId xmlns:p14="http://schemas.microsoft.com/office/powerpoint/2010/main" val="873498588"/>
+        <p14:creationId xmlns:p14="http://schemas.microsoft.com/office/powerpoint/2010/main" val="973589403"/>
+      </p:ext>
+    </p:extLst>
+  </p:cSld>
+</p:sld>
+</file>
+
+<file path=ppt/slides/slide12.xml><?xml version="1.0" encoding="utf-8"?>
+<p:sld xmlns:p="http://schemas.openxmlformats.org/presentationml/2006/main">
+  <p:cSld>
+    <p:bg>
+      <p:bgPr>
+        <a:solidFill xmlns:a="http://schemas.openxmlformats.org/drawingml/2006/main">
+          <a:srgbClr val="FFFFFF"/>
+        </a:solidFill>
+      </p:bgPr>
+    </p:bg>
+    <p:spTree>
+      <p:nvGrpSpPr>
+        <p:cNvPr id="1" name=""/>
+        <p:cNvGrpSpPr/>
+        <p:nvPr/>
+      </p:nvGrpSpPr>
+      <p:grpSpPr>
+        <a:xfrm xmlns:a="http://schemas.openxmlformats.org/drawingml/2006/main"/>
+      </p:grpSpPr>
+      <p:sp>
+        <p:nvSpPr>
+          <p:cNvPr id="10" name="accent-line">
+            <a:extLst xmlns:a="http://schemas.openxmlformats.org/drawingml/2006/main">
+              <a:ext uri="{FF2B5EF4-FFF2-40B4-BE49-F238E27FC236}">
+                <a16:creationId xmlns:a16="http://schemas.microsoft.com/office/drawing/2014/main" id="{02DAA72A-5B7B-4126-B6FC-B7D0769B03D3}"/>
+              </a:ext>
+            </a:extLst>
+          </p:cNvPr>
+          <p:cNvSpPr>
+            <a:spLocks xmlns:a="http://schemas.openxmlformats.org/drawingml/2006/main" noGrp="1"/>
+          </p:cNvSpPr>
+          <p:nvPr/>
+        </p:nvSpPr>
+        <p:spPr>
+          <a:xfrm xmlns:a="http://schemas.openxmlformats.org/drawingml/2006/main">
+            <a:off x="390525" y="304800"/>
+            <a:ext cx="11410950" cy="66675"/>
+          </a:xfrm>
+          <a:prstGeom xmlns:a="http://schemas.openxmlformats.org/drawingml/2006/main" prst="rect">
+            <a:avLst/>
+          </a:prstGeom>
+          <a:solidFill xmlns:a="http://schemas.openxmlformats.org/drawingml/2006/main">
+            <a:srgbClr val="C4A1FF"/>
+          </a:solidFill>
+          <a:ln xmlns:a="http://schemas.openxmlformats.org/drawingml/2006/main" w="0">
+            <a:solidFill>
+              <a:srgbClr val="C4A1FF"/>
+            </a:solidFill>
+            <a:prstDash val="solid"/>
+          </a:ln>
+        </p:spPr>
+      </p:sp>
+      <p:sp>
+        <p:nvSpPr>
+          <p:cNvPr id="2" name="chapter-label">
+            <a:extLst xmlns:a="http://schemas.openxmlformats.org/drawingml/2006/main">
+              <a:ext uri="{FF2B5EF4-FFF2-40B4-BE49-F238E27FC236}">
+                <a16:creationId xmlns:a16="http://schemas.microsoft.com/office/drawing/2014/main" id="{F9CBEEDF-8AAE-4454-8A6E-32759A6EC9AC}"/>
+              </a:ext>
+            </a:extLst>
+          </p:cNvPr>
+          <p:cNvSpPr>
+            <a:spLocks xmlns:a="http://schemas.openxmlformats.org/drawingml/2006/main" noGrp="1"/>
+          </p:cNvSpPr>
+          <p:nvPr/>
+        </p:nvSpPr>
+        <p:spPr>
+          <a:xfrm xmlns:a="http://schemas.openxmlformats.org/drawingml/2006/main">
+            <a:off x="390525" y="466725"/>
+            <a:ext cx="4953000" cy="323850"/>
+          </a:xfrm>
+          <a:prstGeom xmlns:a="http://schemas.openxmlformats.org/drawingml/2006/main" prst="rect">
+            <a:avLst/>
+          </a:prstGeom>
+          <a:noFill xmlns:a="http://schemas.openxmlformats.org/drawingml/2006/main"/>
+          <a:ln xmlns:a="http://schemas.openxmlformats.org/drawingml/2006/main" w="0">
+            <a:noFill/>
+            <a:prstDash val="solid"/>
+          </a:ln>
+        </p:spPr>
+        <p:txBody>
+          <a:bodyPr xmlns:a="http://schemas.openxmlformats.org/drawingml/2006/main" anchor="t">
+            <a:noAutofit/>
+          </a:bodyPr>
+          <a:lstStyle xmlns:a="http://schemas.openxmlformats.org/drawingml/2006/main"/>
+          <a:p xmlns:a="http://schemas.openxmlformats.org/drawingml/2006/main">
+            <a:pPr algn="l">
+              <a:defRPr sz="1275" b="1">
+                <a:solidFill>
+                  <a:srgbClr val="5B5B57"/>
+                </a:solidFill>
+                <a:latin typeface="Helvetica Neue"/>
+                <a:ea typeface="Helvetica Neue"/>
+                <a:cs typeface="Helvetica Neue"/>
+              </a:defRPr>
+            </a:pPr>
+            <a:r>
+              <a:rPr sz="1275" b="1">
+                <a:solidFill>
+                  <a:srgbClr val="5B5B57"/>
+                </a:solidFill>
+                <a:latin typeface="Helvetica Neue"/>
+                <a:ea typeface="Helvetica Neue"/>
+                <a:cs typeface="Helvetica Neue"/>
+              </a:rPr>
+              <a:t>PRACTICE AND READING  /  12</a:t>
+            </a:r>
+          </a:p>
+        </p:txBody>
+      </p:sp>
+      <p:sp>
+        <p:nvSpPr>
+          <p:cNvPr id="3" name="slide-number">
+            <a:extLst xmlns:a="http://schemas.openxmlformats.org/drawingml/2006/main">
+              <a:ext uri="{FF2B5EF4-FFF2-40B4-BE49-F238E27FC236}">
+                <a16:creationId xmlns:a16="http://schemas.microsoft.com/office/drawing/2014/main" id="{6057A782-45BB-41CE-BD26-BDEA811DBFAC}"/>
+              </a:ext>
+            </a:extLst>
+          </p:cNvPr>
+          <p:cNvSpPr>
+            <a:spLocks xmlns:a="http://schemas.openxmlformats.org/drawingml/2006/main" noGrp="1"/>
+          </p:cNvSpPr>
+          <p:nvPr/>
+        </p:nvSpPr>
+        <p:spPr>
+          <a:xfrm xmlns:a="http://schemas.openxmlformats.org/drawingml/2006/main">
+            <a:off x="11049000" y="6286500"/>
+            <a:ext cx="742950" cy="266700"/>
+          </a:xfrm>
+          <a:prstGeom xmlns:a="http://schemas.openxmlformats.org/drawingml/2006/main" prst="rect">
+            <a:avLst/>
+          </a:prstGeom>
+          <a:noFill xmlns:a="http://schemas.openxmlformats.org/drawingml/2006/main"/>
+          <a:ln xmlns:a="http://schemas.openxmlformats.org/drawingml/2006/main" w="0">
+            <a:noFill/>
+            <a:prstDash val="solid"/>
+          </a:ln>
+        </p:spPr>
+        <p:txBody>
+          <a:bodyPr xmlns:a="http://schemas.openxmlformats.org/drawingml/2006/main" anchor="t">
+            <a:noAutofit/>
+          </a:bodyPr>
+          <a:lstStyle xmlns:a="http://schemas.openxmlformats.org/drawingml/2006/main"/>
+          <a:p xmlns:a="http://schemas.openxmlformats.org/drawingml/2006/main">
+            <a:pPr algn="r">
+              <a:defRPr sz="1200" b="0">
+                <a:solidFill>
+                  <a:srgbClr val="5B5B57"/>
+                </a:solidFill>
+                <a:latin typeface="Helvetica Neue"/>
+                <a:ea typeface="Helvetica Neue"/>
+                <a:cs typeface="Helvetica Neue"/>
+              </a:defRPr>
+            </a:pPr>
+            <a:r>
+              <a:rPr sz="1200" b="0">
+                <a:solidFill>
+                  <a:srgbClr val="5B5B57"/>
+                </a:solidFill>
+                <a:latin typeface="Helvetica Neue"/>
+                <a:ea typeface="Helvetica Neue"/>
+                <a:cs typeface="Helvetica Neue"/>
+              </a:rPr>
+              <a:t>12</a:t>
+            </a:r>
+          </a:p>
+        </p:txBody>
+      </p:sp>
+      <p:sp>
+        <p:nvSpPr>
+          <p:cNvPr id="4" name="chapter-footer">
+            <a:extLst xmlns:a="http://schemas.openxmlformats.org/drawingml/2006/main">
+              <a:ext uri="{FF2B5EF4-FFF2-40B4-BE49-F238E27FC236}">
+                <a16:creationId xmlns:a16="http://schemas.microsoft.com/office/drawing/2014/main" id="{D7FEE08B-BC9E-4823-BFC8-1C6CC5D23E2C}"/>
+              </a:ext>
+            </a:extLst>
+          </p:cNvPr>
+          <p:cNvSpPr>
+            <a:spLocks xmlns:a="http://schemas.openxmlformats.org/drawingml/2006/main" noGrp="1"/>
+          </p:cNvSpPr>
+          <p:nvPr/>
+        </p:nvSpPr>
+        <p:spPr>
+          <a:xfrm xmlns:a="http://schemas.openxmlformats.org/drawingml/2006/main">
+            <a:off x="390525" y="6286500"/>
+            <a:ext cx="8191500" cy="266700"/>
+          </a:xfrm>
+          <a:prstGeom xmlns:a="http://schemas.openxmlformats.org/drawingml/2006/main" prst="rect">
+            <a:avLst/>
+          </a:prstGeom>
+          <a:noFill xmlns:a="http://schemas.openxmlformats.org/drawingml/2006/main"/>
+          <a:ln xmlns:a="http://schemas.openxmlformats.org/drawingml/2006/main" w="0">
+            <a:noFill/>
+            <a:prstDash val="solid"/>
+          </a:ln>
+        </p:spPr>
+        <p:txBody>
+          <a:bodyPr xmlns:a="http://schemas.openxmlformats.org/drawingml/2006/main" anchor="t">
+            <a:noAutofit/>
+          </a:bodyPr>
+          <a:lstStyle xmlns:a="http://schemas.openxmlformats.org/drawingml/2006/main"/>
+          <a:p xmlns:a="http://schemas.openxmlformats.org/drawingml/2006/main">
+            <a:pPr algn="l">
+              <a:defRPr sz="1125" b="0">
+                <a:solidFill>
+                  <a:srgbClr val="5B5B57"/>
+                </a:solidFill>
+                <a:latin typeface="Helvetica Neue"/>
+                <a:ea typeface="Helvetica Neue"/>
+                <a:cs typeface="Helvetica Neue"/>
+              </a:defRPr>
+            </a:pPr>
+            <a:r>
+              <a:rPr sz="1125" b="0">
+                <a:solidFill>
+                  <a:srgbClr val="5B5B57"/>
+                </a:solidFill>
+                <a:latin typeface="Helvetica Neue"/>
+                <a:ea typeface="Helvetica Neue"/>
+                <a:cs typeface="Helvetica Neue"/>
+              </a:rPr>
+              <a:t>Safety and Security</a:t>
+            </a:r>
+          </a:p>
+        </p:txBody>
+      </p:sp>
+      <p:sp>
+        <p:nvSpPr>
+          <p:cNvPr id="5" name="practice-title">
+            <a:extLst xmlns:a="http://schemas.openxmlformats.org/drawingml/2006/main">
+              <a:ext uri="{FF2B5EF4-FFF2-40B4-BE49-F238E27FC236}">
+                <a16:creationId xmlns:a16="http://schemas.microsoft.com/office/drawing/2014/main" id="{F7036E37-E8D5-42B2-84FC-88852DF13A26}"/>
+              </a:ext>
+            </a:extLst>
+          </p:cNvPr>
+          <p:cNvSpPr>
+            <a:spLocks xmlns:a="http://schemas.openxmlformats.org/drawingml/2006/main" noGrp="1"/>
+          </p:cNvSpPr>
+          <p:nvPr/>
+        </p:nvSpPr>
+        <p:spPr>
+          <a:xfrm xmlns:a="http://schemas.openxmlformats.org/drawingml/2006/main">
+            <a:off x="390525" y="1000125"/>
+            <a:ext cx="11144250" cy="666750"/>
+          </a:xfrm>
+          <a:prstGeom xmlns:a="http://schemas.openxmlformats.org/drawingml/2006/main" prst="rect">
+            <a:avLst/>
+          </a:prstGeom>
+          <a:noFill xmlns:a="http://schemas.openxmlformats.org/drawingml/2006/main"/>
+          <a:ln xmlns:a="http://schemas.openxmlformats.org/drawingml/2006/main" w="0">
+            <a:noFill/>
+            <a:prstDash val="solid"/>
+          </a:ln>
+        </p:spPr>
+        <p:txBody>
+          <a:bodyPr xmlns:a="http://schemas.openxmlformats.org/drawingml/2006/main" anchor="t">
+            <a:normAutofit fontScale="100000"/>
+          </a:bodyPr>
+          <a:lstStyle xmlns:a="http://schemas.openxmlformats.org/drawingml/2006/main"/>
+          <a:p xmlns:a="http://schemas.openxmlformats.org/drawingml/2006/main">
+            <a:pPr algn="l">
+              <a:defRPr sz="3000" b="1">
+                <a:solidFill>
+                  <a:srgbClr val="111111"/>
+                </a:solidFill>
+                <a:latin typeface="Helvetica Neue"/>
+                <a:ea typeface="Helvetica Neue"/>
+                <a:cs typeface="Helvetica Neue"/>
+              </a:defRPr>
+            </a:pPr>
+            <a:r>
+              <a:rPr sz="3000" b="1">
+                <a:solidFill>
+                  <a:srgbClr val="111111"/>
+                </a:solidFill>
+                <a:latin typeface="Helvetica Neue"/>
+                <a:ea typeface="Helvetica Neue"/>
+                <a:cs typeface="Helvetica Neue"/>
+              </a:rPr>
+              <a:t>Evidence to submit</a:t>
+            </a:r>
+          </a:p>
+        </p:txBody>
+      </p:sp>
+      <p:sp>
+        <p:nvSpPr>
+          <p:cNvPr id="6" name="practice-task">
+            <a:extLst xmlns:a="http://schemas.openxmlformats.org/drawingml/2006/main">
+              <a:ext uri="{FF2B5EF4-FFF2-40B4-BE49-F238E27FC236}">
+                <a16:creationId xmlns:a16="http://schemas.microsoft.com/office/drawing/2014/main" id="{75A5C701-491D-4BA1-9B8B-58BDE44EED54}"/>
+              </a:ext>
+            </a:extLst>
+          </p:cNvPr>
+          <p:cNvSpPr>
+            <a:spLocks xmlns:a="http://schemas.openxmlformats.org/drawingml/2006/main" noGrp="1"/>
+          </p:cNvSpPr>
+          <p:nvPr/>
+        </p:nvSpPr>
+        <p:spPr>
+          <a:xfrm xmlns:a="http://schemas.openxmlformats.org/drawingml/2006/main">
+            <a:off x="390525" y="2000250"/>
+            <a:ext cx="10953750" cy="1238250"/>
+          </a:xfrm>
+          <a:prstGeom xmlns:a="http://schemas.openxmlformats.org/drawingml/2006/main" prst="rect">
+            <a:avLst/>
+          </a:prstGeom>
+          <a:noFill xmlns:a="http://schemas.openxmlformats.org/drawingml/2006/main"/>
+          <a:ln xmlns:a="http://schemas.openxmlformats.org/drawingml/2006/main" w="0">
+            <a:noFill/>
+            <a:prstDash val="solid"/>
+          </a:ln>
+        </p:spPr>
+        <p:txBody>
+          <a:bodyPr xmlns:a="http://schemas.openxmlformats.org/drawingml/2006/main" anchor="t">
+            <a:normAutofit fontScale="100000"/>
+          </a:bodyPr>
+          <a:lstStyle xmlns:a="http://schemas.openxmlformats.org/drawingml/2006/main"/>
+          <a:p xmlns:a="http://schemas.openxmlformats.org/drawingml/2006/main">
+            <a:pPr algn="l">
+              <a:defRPr sz="1950" b="0">
+                <a:solidFill>
+                  <a:srgbClr val="111111"/>
+                </a:solidFill>
+                <a:latin typeface="Helvetica Neue"/>
+                <a:ea typeface="Helvetica Neue"/>
+                <a:cs typeface="Helvetica Neue"/>
+              </a:defRPr>
+            </a:pPr>
+            <a:r>
+              <a:rPr sz="1950" b="0">
+                <a:solidFill>
+                  <a:srgbClr val="111111"/>
+                </a:solidFill>
+                <a:latin typeface="Helvetica Neue"/>
+                <a:ea typeface="Helvetica Neue"/>
+                <a:cs typeface="Helvetica Neue"/>
+              </a:rPr>
+              <a:t>Complete Lab 8. Submit one valid request, one injection-shaped proposal, and one replay with changed arguments. Identify the trusted reviewer channel.</a:t>
+            </a:r>
+          </a:p>
+        </p:txBody>
+      </p:sp>
+      <p:sp>
+        <p:nvSpPr>
+          <p:cNvPr id="7" name="practice-check">
+            <a:extLst xmlns:a="http://schemas.openxmlformats.org/drawingml/2006/main">
+              <a:ext uri="{FF2B5EF4-FFF2-40B4-BE49-F238E27FC236}">
+                <a16:creationId xmlns:a16="http://schemas.microsoft.com/office/drawing/2014/main" id="{3D6B0F7A-7610-4C39-9173-D0B9936F3B08}"/>
+              </a:ext>
+            </a:extLst>
+          </p:cNvPr>
+          <p:cNvSpPr>
+            <a:spLocks xmlns:a="http://schemas.openxmlformats.org/drawingml/2006/main" noGrp="1"/>
+          </p:cNvSpPr>
+          <p:nvPr/>
+        </p:nvSpPr>
+        <p:spPr>
+          <a:xfrm xmlns:a="http://schemas.openxmlformats.org/drawingml/2006/main">
+            <a:off x="390525" y="3381375"/>
+            <a:ext cx="10953750" cy="1095375"/>
+          </a:xfrm>
+          <a:prstGeom xmlns:a="http://schemas.openxmlformats.org/drawingml/2006/main" prst="rect">
+            <a:avLst/>
+          </a:prstGeom>
+          <a:noFill xmlns:a="http://schemas.openxmlformats.org/drawingml/2006/main"/>
+          <a:ln xmlns:a="http://schemas.openxmlformats.org/drawingml/2006/main" w="0">
+            <a:noFill/>
+            <a:prstDash val="solid"/>
+          </a:ln>
+        </p:spPr>
+        <p:txBody>
+          <a:bodyPr xmlns:a="http://schemas.openxmlformats.org/drawingml/2006/main" anchor="t">
+            <a:normAutofit fontScale="100000"/>
+          </a:bodyPr>
+          <a:lstStyle xmlns:a="http://schemas.openxmlformats.org/drawingml/2006/main"/>
+          <a:p xmlns:a="http://schemas.openxmlformats.org/drawingml/2006/main">
+            <a:pPr algn="l">
+              <a:defRPr sz="1800" b="0">
+                <a:solidFill>
+                  <a:srgbClr val="5B5B57"/>
+                </a:solidFill>
+                <a:latin typeface="Helvetica Neue"/>
+                <a:ea typeface="Helvetica Neue"/>
+                <a:cs typeface="Helvetica Neue"/>
+              </a:defRPr>
+            </a:pPr>
+            <a:r>
+              <a:rPr sz="1800" b="0">
+                <a:solidFill>
+                  <a:srgbClr val="5B5B57"/>
+                </a:solidFill>
+                <a:latin typeface="Helvetica Neue"/>
+                <a:ea typeface="Helvetica Neue"/>
+                <a:cs typeface="Helvetica Neue"/>
+              </a:rPr>
+              <a:t>Rejected actions create no ledger entry. A retry with the same ID cannot duplicate the effect, and changed payload reuse fails.</a:t>
+            </a:r>
+          </a:p>
+        </p:txBody>
+      </p:sp>
+      <p:sp>
+        <p:nvSpPr>
+          <p:cNvPr id="8" name="practice-readings">
+            <a:extLst xmlns:a="http://schemas.openxmlformats.org/drawingml/2006/main">
+              <a:ext uri="{FF2B5EF4-FFF2-40B4-BE49-F238E27FC236}">
+                <a16:creationId xmlns:a16="http://schemas.microsoft.com/office/drawing/2014/main" id="{7BA221E6-E445-44D1-A92E-2049EC26C2ED}"/>
+              </a:ext>
+            </a:extLst>
+          </p:cNvPr>
+          <p:cNvSpPr>
+            <a:spLocks xmlns:a="http://schemas.openxmlformats.org/drawingml/2006/main" noGrp="1"/>
+          </p:cNvSpPr>
+          <p:nvPr/>
+        </p:nvSpPr>
+        <p:spPr>
+          <a:xfrm xmlns:a="http://schemas.openxmlformats.org/drawingml/2006/main">
+            <a:off x="390525" y="4667250"/>
+            <a:ext cx="10953750" cy="1000125"/>
+          </a:xfrm>
+          <a:prstGeom xmlns:a="http://schemas.openxmlformats.org/drawingml/2006/main" prst="rect">
+            <a:avLst/>
+          </a:prstGeom>
+          <a:noFill xmlns:a="http://schemas.openxmlformats.org/drawingml/2006/main"/>
+          <a:ln xmlns:a="http://schemas.openxmlformats.org/drawingml/2006/main" w="0">
+            <a:noFill/>
+            <a:prstDash val="solid"/>
+          </a:ln>
+        </p:spPr>
+        <p:txBody>
+          <a:bodyPr xmlns:a="http://schemas.openxmlformats.org/drawingml/2006/main" anchor="t">
+            <a:normAutofit fontScale="100000"/>
+          </a:bodyPr>
+          <a:lstStyle xmlns:a="http://schemas.openxmlformats.org/drawingml/2006/main"/>
+          <a:p xmlns:a="http://schemas.openxmlformats.org/drawingml/2006/main">
+            <a:pPr algn="l">
+              <a:defRPr sz="1425" b="0">
+                <a:solidFill>
+                  <a:srgbClr val="111111"/>
+                </a:solidFill>
+                <a:latin typeface="Helvetica Neue"/>
+                <a:ea typeface="Helvetica Neue"/>
+                <a:cs typeface="Helvetica Neue"/>
+              </a:defRPr>
+            </a:pPr>
+            <a:r>
+              <a:rPr sz="1425" b="0">
+                <a:solidFill>
+                  <a:srgbClr val="111111"/>
+                </a:solidFill>
+                <a:latin typeface="Helvetica Neue"/>
+                <a:ea typeface="Helvetica Neue"/>
+                <a:cs typeface="Helvetica Neue"/>
+              </a:rPr>
+              <a:t>P1  GPT-Red: Automated Red Teaming via Self-Play at Scale</a:t>
+            </a:r>
+          </a:p>
+          <a:p xmlns:a="http://schemas.openxmlformats.org/drawingml/2006/main">
+            <a:pPr algn="l">
+              <a:defRPr sz="1425" b="0">
+                <a:solidFill>
+                  <a:srgbClr val="111111"/>
+                </a:solidFill>
+                <a:latin typeface="Helvetica Neue"/>
+                <a:ea typeface="Helvetica Neue"/>
+                <a:cs typeface="Helvetica Neue"/>
+              </a:defRPr>
+            </a:pPr>
+            <a:r>
+              <a:rPr sz="1425" b="0">
+                <a:solidFill>
+                  <a:srgbClr val="111111"/>
+                </a:solidFill>
+                <a:latin typeface="Helvetica Neue"/>
+                <a:ea typeface="Helvetica Neue"/>
+                <a:cs typeface="Helvetica Neue"/>
+              </a:rPr>
+              <a:t>S3  LangGraph interrupts</a:t>
+            </a:r>
+          </a:p>
+        </p:txBody>
+      </p:sp>
+      <p:sp>
+        <p:nvSpPr>
+          <p:cNvPr id="9" name="practice-lab">
+            <a:extLst xmlns:a="http://schemas.openxmlformats.org/drawingml/2006/main">
+              <a:ext uri="{FF2B5EF4-FFF2-40B4-BE49-F238E27FC236}">
+                <a16:creationId xmlns:a16="http://schemas.microsoft.com/office/drawing/2014/main" id="{0D93C910-5A75-437F-8EA8-0CC642982E04}"/>
+              </a:ext>
+            </a:extLst>
+          </p:cNvPr>
+          <p:cNvSpPr>
+            <a:spLocks xmlns:a="http://schemas.openxmlformats.org/drawingml/2006/main" noGrp="1"/>
+          </p:cNvSpPr>
+          <p:nvPr/>
+        </p:nvSpPr>
+        <p:spPr>
+          <a:xfrm xmlns:a="http://schemas.openxmlformats.org/drawingml/2006/main">
+            <a:off x="390525" y="5857875"/>
+            <a:ext cx="10953750" cy="266700"/>
+          </a:xfrm>
+          <a:prstGeom xmlns:a="http://schemas.openxmlformats.org/drawingml/2006/main" prst="rect">
+            <a:avLst/>
+          </a:prstGeom>
+          <a:noFill xmlns:a="http://schemas.openxmlformats.org/drawingml/2006/main"/>
+          <a:ln xmlns:a="http://schemas.openxmlformats.org/drawingml/2006/main" w="0">
+            <a:noFill/>
+            <a:prstDash val="solid"/>
+          </a:ln>
+        </p:spPr>
+        <p:txBody>
+          <a:bodyPr xmlns:a="http://schemas.openxmlformats.org/drawingml/2006/main" anchor="t">
+            <a:normAutofit fontScale="90196"/>
+          </a:bodyPr>
+          <a:lstStyle xmlns:a="http://schemas.openxmlformats.org/drawingml/2006/main"/>
+          <a:p xmlns:a="http://schemas.openxmlformats.org/drawingml/2006/main">
+            <a:pPr algn="l">
+              <a:defRPr sz="1275" b="0">
+                <a:solidFill>
+                  <a:srgbClr val="5B5B57"/>
+                </a:solidFill>
+                <a:latin typeface="Helvetica Neue"/>
+                <a:ea typeface="Helvetica Neue"/>
+                <a:cs typeface="Helvetica Neue"/>
+              </a:defRPr>
+            </a:pPr>
+            <a:r>
+              <a:rPr sz="1275" b="0">
+                <a:solidFill>
+                  <a:srgbClr val="5B5B57"/>
+                </a:solidFill>
+                <a:latin typeface="Helvetica Neue"/>
+                <a:ea typeface="Helvetica Neue"/>
+                <a:cs typeface="Helvetica Neue"/>
+              </a:rPr>
+              <a:t>labs/08_langgraph_approval_security.ipynb</a:t>
+            </a:r>
+          </a:p>
+        </p:txBody>
+      </p:sp>
+    </p:spTree>
+    <p:extLst>
+      <p:ext uri="{BB962C8B-B14F-4D97-AF65-F5344CB8AC3E}">
+        <p14:creationId xmlns:p14="http://schemas.microsoft.com/office/powerpoint/2010/main" val="1761595459"/>
       </p:ext>
     </p:extLst>
   </p:cSld>
@@ -3016,7 +5267,7 @@
           <p:cNvPr id="14" name="accent-line">
             <a:extLst xmlns:a="http://schemas.openxmlformats.org/drawingml/2006/main">
               <a:ext uri="{FF2B5EF4-FFF2-40B4-BE49-F238E27FC236}">
-                <a16:creationId xmlns:a16="http://schemas.microsoft.com/office/drawing/2014/main" id="{51383E65-7F2C-48EA-9183-814D3E4005F5}"/>
+                <a16:creationId xmlns:a16="http://schemas.microsoft.com/office/drawing/2014/main" id="{63B630F9-F89D-4FF8-807B-B2B1A0AE7D99}"/>
               </a:ext>
             </a:extLst>
           </p:cNvPr>
@@ -3049,7 +5300,7 @@
           <p:cNvPr id="2" name="chapter-label">
             <a:extLst xmlns:a="http://schemas.openxmlformats.org/drawingml/2006/main">
               <a:ext uri="{FF2B5EF4-FFF2-40B4-BE49-F238E27FC236}">
-                <a16:creationId xmlns:a16="http://schemas.microsoft.com/office/drawing/2014/main" id="{E55C193E-64D7-4568-978A-27905F1C27D4}"/>
+                <a16:creationId xmlns:a16="http://schemas.microsoft.com/office/drawing/2014/main" id="{49838E2F-7EE6-45E0-B908-E37BCE412B12}"/>
               </a:ext>
             </a:extLst>
           </p:cNvPr>
@@ -3107,7 +5358,7 @@
           <p:cNvPr id="3" name="slide-number">
             <a:extLst xmlns:a="http://schemas.openxmlformats.org/drawingml/2006/main">
               <a:ext uri="{FF2B5EF4-FFF2-40B4-BE49-F238E27FC236}">
-                <a16:creationId xmlns:a16="http://schemas.microsoft.com/office/drawing/2014/main" id="{426CB772-3681-49A3-81A4-929EE53C3D1C}"/>
+                <a16:creationId xmlns:a16="http://schemas.microsoft.com/office/drawing/2014/main" id="{01866EDB-ACF7-4A3F-A6B7-3E4AF47DA5DB}"/>
               </a:ext>
             </a:extLst>
           </p:cNvPr>
@@ -3165,7 +5416,7 @@
           <p:cNvPr id="4" name="chapter-footer">
             <a:extLst xmlns:a="http://schemas.openxmlformats.org/drawingml/2006/main">
               <a:ext uri="{FF2B5EF4-FFF2-40B4-BE49-F238E27FC236}">
-                <a16:creationId xmlns:a16="http://schemas.microsoft.com/office/drawing/2014/main" id="{F0482B3C-B60C-453E-AF38-D51ECC9CA03B}"/>
+                <a16:creationId xmlns:a16="http://schemas.microsoft.com/office/drawing/2014/main" id="{A5231DD8-EB41-4F41-A559-2F81EE79E59B}"/>
               </a:ext>
             </a:extLst>
           </p:cNvPr>
@@ -3223,7 +5474,7 @@
           <p:cNvPr id="5" name="objectives-title">
             <a:extLst xmlns:a="http://schemas.openxmlformats.org/drawingml/2006/main">
               <a:ext uri="{FF2B5EF4-FFF2-40B4-BE49-F238E27FC236}">
-                <a16:creationId xmlns:a16="http://schemas.microsoft.com/office/drawing/2014/main" id="{669B7FCB-B18E-41C8-821A-5CCF9F142947}"/>
+                <a16:creationId xmlns:a16="http://schemas.microsoft.com/office/drawing/2014/main" id="{EBBD9C43-E7C0-436C-9036-A951A36E0307}"/>
               </a:ext>
             </a:extLst>
           </p:cNvPr>
@@ -3281,7 +5532,7 @@
           <p:cNvPr id="6" name="objective-number-1">
             <a:extLst xmlns:a="http://schemas.openxmlformats.org/drawingml/2006/main">
               <a:ext uri="{FF2B5EF4-FFF2-40B4-BE49-F238E27FC236}">
-                <a16:creationId xmlns:a16="http://schemas.microsoft.com/office/drawing/2014/main" id="{21A3A2EC-07A3-45D0-8254-2778EC5F42BC}"/>
+                <a16:creationId xmlns:a16="http://schemas.microsoft.com/office/drawing/2014/main" id="{B7C35448-050E-4B06-9BAE-F1703CC763A2}"/>
               </a:ext>
             </a:extLst>
           </p:cNvPr>
@@ -3339,7 +5590,7 @@
           <p:cNvPr id="7" name="objective-1">
             <a:extLst xmlns:a="http://schemas.openxmlformats.org/drawingml/2006/main">
               <a:ext uri="{FF2B5EF4-FFF2-40B4-BE49-F238E27FC236}">
-                <a16:creationId xmlns:a16="http://schemas.microsoft.com/office/drawing/2014/main" id="{7364BFBA-EAAA-44EE-8668-F9A5D0F29EE8}"/>
+                <a16:creationId xmlns:a16="http://schemas.microsoft.com/office/drawing/2014/main" id="{15B00D5D-9B5A-41DA-862F-E54A3BFAFC7F}"/>
               </a:ext>
             </a:extLst>
           </p:cNvPr>
@@ -3397,7 +5648,7 @@
           <p:cNvPr id="8" name="objective-number-2">
             <a:extLst xmlns:a="http://schemas.openxmlformats.org/drawingml/2006/main">
               <a:ext uri="{FF2B5EF4-FFF2-40B4-BE49-F238E27FC236}">
-                <a16:creationId xmlns:a16="http://schemas.microsoft.com/office/drawing/2014/main" id="{000C0E70-8C43-4A9B-8781-B5F7BA16FA9D}"/>
+                <a16:creationId xmlns:a16="http://schemas.microsoft.com/office/drawing/2014/main" id="{EACD9172-E11E-40CC-A8E7-3ED812BAE0C1}"/>
               </a:ext>
             </a:extLst>
           </p:cNvPr>
@@ -3455,7 +5706,7 @@
           <p:cNvPr id="9" name="objective-2">
             <a:extLst xmlns:a="http://schemas.openxmlformats.org/drawingml/2006/main">
               <a:ext uri="{FF2B5EF4-FFF2-40B4-BE49-F238E27FC236}">
-                <a16:creationId xmlns:a16="http://schemas.microsoft.com/office/drawing/2014/main" id="{7CE37CF0-F7D7-49B9-9FC1-C80FC809C335}"/>
+                <a16:creationId xmlns:a16="http://schemas.microsoft.com/office/drawing/2014/main" id="{034F40D3-82D3-4E5E-AEBD-1A4A0ED9A732}"/>
               </a:ext>
             </a:extLst>
           </p:cNvPr>
@@ -3513,7 +5764,7 @@
           <p:cNvPr id="10" name="objective-number-3">
             <a:extLst xmlns:a="http://schemas.openxmlformats.org/drawingml/2006/main">
               <a:ext uri="{FF2B5EF4-FFF2-40B4-BE49-F238E27FC236}">
-                <a16:creationId xmlns:a16="http://schemas.microsoft.com/office/drawing/2014/main" id="{9C0032CA-316E-40B3-9FCB-B4DC03F1D6E1}"/>
+                <a16:creationId xmlns:a16="http://schemas.microsoft.com/office/drawing/2014/main" id="{3EE06209-862B-4B43-8F15-8BBD1AC9451E}"/>
               </a:ext>
             </a:extLst>
           </p:cNvPr>
@@ -3571,7 +5822,7 @@
           <p:cNvPr id="11" name="objective-3">
             <a:extLst xmlns:a="http://schemas.openxmlformats.org/drawingml/2006/main">
               <a:ext uri="{FF2B5EF4-FFF2-40B4-BE49-F238E27FC236}">
-                <a16:creationId xmlns:a16="http://schemas.microsoft.com/office/drawing/2014/main" id="{D7C098BF-9A86-467C-827B-22C57D5737F3}"/>
+                <a16:creationId xmlns:a16="http://schemas.microsoft.com/office/drawing/2014/main" id="{0DC2A9F8-037E-414A-AB6A-DBE561AC0E6F}"/>
               </a:ext>
             </a:extLst>
           </p:cNvPr>
@@ -3629,7 +5880,7 @@
           <p:cNvPr id="12" name="objective-number-4">
             <a:extLst xmlns:a="http://schemas.openxmlformats.org/drawingml/2006/main">
               <a:ext uri="{FF2B5EF4-FFF2-40B4-BE49-F238E27FC236}">
-                <a16:creationId xmlns:a16="http://schemas.microsoft.com/office/drawing/2014/main" id="{2829F83A-5A12-462D-96ED-0C210C0DAF05}"/>
+                <a16:creationId xmlns:a16="http://schemas.microsoft.com/office/drawing/2014/main" id="{855CB8A4-9551-4103-B34F-BB7E5795105B}"/>
               </a:ext>
             </a:extLst>
           </p:cNvPr>
@@ -3687,7 +5938,7 @@
           <p:cNvPr id="13" name="objective-4">
             <a:extLst xmlns:a="http://schemas.openxmlformats.org/drawingml/2006/main">
               <a:ext uri="{FF2B5EF4-FFF2-40B4-BE49-F238E27FC236}">
-                <a16:creationId xmlns:a16="http://schemas.microsoft.com/office/drawing/2014/main" id="{ABEAAF3F-C0A1-4E7B-85C4-EC9A01540817}"/>
+                <a16:creationId xmlns:a16="http://schemas.microsoft.com/office/drawing/2014/main" id="{A7248AB5-05C6-4D36-A2F2-82107F3AE95D}"/>
               </a:ext>
             </a:extLst>
           </p:cNvPr>
@@ -3743,7 +5994,7 @@
     </p:spTree>
     <p:extLst>
       <p:ext uri="{BB962C8B-B14F-4D97-AF65-F5344CB8AC3E}">
-        <p14:creationId xmlns:p14="http://schemas.microsoft.com/office/powerpoint/2010/main" val="595596819"/>
+        <p14:creationId xmlns:p14="http://schemas.microsoft.com/office/powerpoint/2010/main" val="1570770671"/>
       </p:ext>
     </p:extLst>
   </p:cSld>
@@ -3774,7 +6025,7 @@
           <p:cNvPr id="9" name="accent-line">
             <a:extLst xmlns:a="http://schemas.openxmlformats.org/drawingml/2006/main">
               <a:ext uri="{FF2B5EF4-FFF2-40B4-BE49-F238E27FC236}">
-                <a16:creationId xmlns:a16="http://schemas.microsoft.com/office/drawing/2014/main" id="{2FB1E5DA-1DE0-44A2-8C24-267B29D7B87A}"/>
+                <a16:creationId xmlns:a16="http://schemas.microsoft.com/office/drawing/2014/main" id="{225AC6B9-CCAF-4662-9D55-A5E23549CEF8}"/>
               </a:ext>
             </a:extLst>
           </p:cNvPr>
@@ -3807,7 +6058,7 @@
           <p:cNvPr id="2" name="chapter-label">
             <a:extLst xmlns:a="http://schemas.openxmlformats.org/drawingml/2006/main">
               <a:ext uri="{FF2B5EF4-FFF2-40B4-BE49-F238E27FC236}">
-                <a16:creationId xmlns:a16="http://schemas.microsoft.com/office/drawing/2014/main" id="{9F7F16B9-9C26-45FD-A0B1-084972ACF3B1}"/>
+                <a16:creationId xmlns:a16="http://schemas.microsoft.com/office/drawing/2014/main" id="{4298C018-5AB1-476C-BF92-58D61751679C}"/>
               </a:ext>
             </a:extLst>
           </p:cNvPr>
@@ -3865,7 +6116,7 @@
           <p:cNvPr id="3" name="slide-number">
             <a:extLst xmlns:a="http://schemas.openxmlformats.org/drawingml/2006/main">
               <a:ext uri="{FF2B5EF4-FFF2-40B4-BE49-F238E27FC236}">
-                <a16:creationId xmlns:a16="http://schemas.microsoft.com/office/drawing/2014/main" id="{C62EE10D-9CB6-45E9-B12A-5845451D5297}"/>
+                <a16:creationId xmlns:a16="http://schemas.microsoft.com/office/drawing/2014/main" id="{FD247155-5553-44C3-8B32-2A453B3D91E6}"/>
               </a:ext>
             </a:extLst>
           </p:cNvPr>
@@ -3923,7 +6174,7 @@
           <p:cNvPr id="4" name="chapter-footer">
             <a:extLst xmlns:a="http://schemas.openxmlformats.org/drawingml/2006/main">
               <a:ext uri="{FF2B5EF4-FFF2-40B4-BE49-F238E27FC236}">
-                <a16:creationId xmlns:a16="http://schemas.microsoft.com/office/drawing/2014/main" id="{E647F113-49A2-4629-AB14-D2567EA6710A}"/>
+                <a16:creationId xmlns:a16="http://schemas.microsoft.com/office/drawing/2014/main" id="{FC915A59-EDDF-4361-B869-BCB23EDD3A7E}"/>
               </a:ext>
             </a:extLst>
           </p:cNvPr>
@@ -3981,7 +6232,7 @@
           <p:cNvPr id="5" name="section-title">
             <a:extLst xmlns:a="http://schemas.openxmlformats.org/drawingml/2006/main">
               <a:ext uri="{FF2B5EF4-FFF2-40B4-BE49-F238E27FC236}">
-                <a16:creationId xmlns:a16="http://schemas.microsoft.com/office/drawing/2014/main" id="{9B88B46F-3D74-4A5B-8631-C07BB985021A}"/>
+                <a16:creationId xmlns:a16="http://schemas.microsoft.com/office/drawing/2014/main" id="{7C3635BE-5CA6-4D1B-AF1D-51C7EDF17385}"/>
               </a:ext>
             </a:extLst>
           </p:cNvPr>
@@ -4039,7 +6290,7 @@
           <p:cNvPr id="6" name="section-explanation">
             <a:extLst xmlns:a="http://schemas.openxmlformats.org/drawingml/2006/main">
               <a:ext uri="{FF2B5EF4-FFF2-40B4-BE49-F238E27FC236}">
-                <a16:creationId xmlns:a16="http://schemas.microsoft.com/office/drawing/2014/main" id="{29AB4474-131E-4A0E-9789-B676B57BC632}"/>
+                <a16:creationId xmlns:a16="http://schemas.microsoft.com/office/drawing/2014/main" id="{BD6FA885-14B5-4CB1-9DFA-6FB68B518069}"/>
               </a:ext>
             </a:extLst>
           </p:cNvPr>
@@ -4097,7 +6348,7 @@
           <p:cNvPr id="7" name="column-rule">
             <a:extLst xmlns:a="http://schemas.openxmlformats.org/drawingml/2006/main">
               <a:ext uri="{FF2B5EF4-FFF2-40B4-BE49-F238E27FC236}">
-                <a16:creationId xmlns:a16="http://schemas.microsoft.com/office/drawing/2014/main" id="{D1BF49F2-B684-421C-B6D6-447F6125FF90}"/>
+                <a16:creationId xmlns:a16="http://schemas.microsoft.com/office/drawing/2014/main" id="{8431C7FF-0FD9-48AB-A82A-59F6264CC4DA}"/>
               </a:ext>
             </a:extLst>
           </p:cNvPr>
@@ -4130,7 +6381,7 @@
           <p:cNvPr id="8" name="section-points">
             <a:extLst xmlns:a="http://schemas.openxmlformats.org/drawingml/2006/main">
               <a:ext uri="{FF2B5EF4-FFF2-40B4-BE49-F238E27FC236}">
-                <a16:creationId xmlns:a16="http://schemas.microsoft.com/office/drawing/2014/main" id="{F67211E4-D132-4099-AD98-9E1D37ED5892}"/>
+                <a16:creationId xmlns:a16="http://schemas.microsoft.com/office/drawing/2014/main" id="{DA992FED-BD43-4CBF-9DF2-AFACA0628F9F}"/>
               </a:ext>
             </a:extLst>
           </p:cNvPr>
@@ -4242,7 +6493,7 @@
     </p:spTree>
     <p:extLst>
       <p:ext uri="{BB962C8B-B14F-4D97-AF65-F5344CB8AC3E}">
-        <p14:creationId xmlns:p14="http://schemas.microsoft.com/office/powerpoint/2010/main" val="1032781270"/>
+        <p14:creationId xmlns:p14="http://schemas.microsoft.com/office/powerpoint/2010/main" val="1928634042"/>
       </p:ext>
     </p:extLst>
   </p:cSld>
@@ -4273,7 +6524,7 @@
           <p:cNvPr id="13" name="accent-line">
             <a:extLst xmlns:a="http://schemas.openxmlformats.org/drawingml/2006/main">
               <a:ext uri="{FF2B5EF4-FFF2-40B4-BE49-F238E27FC236}">
-                <a16:creationId xmlns:a16="http://schemas.microsoft.com/office/drawing/2014/main" id="{9A6C5944-CB4B-47CD-AC6D-5DB133529C32}"/>
+                <a16:creationId xmlns:a16="http://schemas.microsoft.com/office/drawing/2014/main" id="{66F9FA5A-97AF-47DD-BF34-7C61886A8F83}"/>
               </a:ext>
             </a:extLst>
           </p:cNvPr>
@@ -4306,7 +6557,7 @@
           <p:cNvPr id="2" name="chapter-label">
             <a:extLst xmlns:a="http://schemas.openxmlformats.org/drawingml/2006/main">
               <a:ext uri="{FF2B5EF4-FFF2-40B4-BE49-F238E27FC236}">
-                <a16:creationId xmlns:a16="http://schemas.microsoft.com/office/drawing/2014/main" id="{EF01C7FE-5049-412F-98AE-BBB7F60FF866}"/>
+                <a16:creationId xmlns:a16="http://schemas.microsoft.com/office/drawing/2014/main" id="{C29ADD4E-ADEF-4018-AFC9-CB0CB4A9D499}"/>
               </a:ext>
             </a:extLst>
           </p:cNvPr>
@@ -4364,7 +6615,7 @@
           <p:cNvPr id="3" name="slide-number">
             <a:extLst xmlns:a="http://schemas.openxmlformats.org/drawingml/2006/main">
               <a:ext uri="{FF2B5EF4-FFF2-40B4-BE49-F238E27FC236}">
-                <a16:creationId xmlns:a16="http://schemas.microsoft.com/office/drawing/2014/main" id="{5B8585A1-349F-46FA-814B-D53068D4438D}"/>
+                <a16:creationId xmlns:a16="http://schemas.microsoft.com/office/drawing/2014/main" id="{36002298-48CE-4679-A019-FC5397F16A55}"/>
               </a:ext>
             </a:extLst>
           </p:cNvPr>
@@ -4422,7 +6673,7 @@
           <p:cNvPr id="4" name="chapter-footer">
             <a:extLst xmlns:a="http://schemas.openxmlformats.org/drawingml/2006/main">
               <a:ext uri="{FF2B5EF4-FFF2-40B4-BE49-F238E27FC236}">
-                <a16:creationId xmlns:a16="http://schemas.microsoft.com/office/drawing/2014/main" id="{7E7C9A24-8D6A-496F-913C-8B149B4FF754}"/>
+                <a16:creationId xmlns:a16="http://schemas.microsoft.com/office/drawing/2014/main" id="{0CAFD198-31DF-428D-BC97-E7D0798116FB}"/>
               </a:ext>
             </a:extLst>
           </p:cNvPr>
@@ -4480,7 +6731,7 @@
           <p:cNvPr id="5" name="section-title">
             <a:extLst xmlns:a="http://schemas.openxmlformats.org/drawingml/2006/main">
               <a:ext uri="{FF2B5EF4-FFF2-40B4-BE49-F238E27FC236}">
-                <a16:creationId xmlns:a16="http://schemas.microsoft.com/office/drawing/2014/main" id="{DC78B8D7-1A2B-4A20-9CA0-3755F7865601}"/>
+                <a16:creationId xmlns:a16="http://schemas.microsoft.com/office/drawing/2014/main" id="{A703750D-99E4-4DDD-9A47-6AF0509B53F1}"/>
               </a:ext>
             </a:extLst>
           </p:cNvPr>
@@ -4538,7 +6789,7 @@
           <p:cNvPr id="6" name="section-explanation">
             <a:extLst xmlns:a="http://schemas.openxmlformats.org/drawingml/2006/main">
               <a:ext uri="{FF2B5EF4-FFF2-40B4-BE49-F238E27FC236}">
-                <a16:creationId xmlns:a16="http://schemas.microsoft.com/office/drawing/2014/main" id="{9B4D4F3D-9C2D-4E88-9697-0A74D79B2643}"/>
+                <a16:creationId xmlns:a16="http://schemas.microsoft.com/office/drawing/2014/main" id="{AF2C35D3-708E-4B1D-ADDB-89E9AC24E218}"/>
               </a:ext>
             </a:extLst>
           </p:cNvPr>
@@ -4596,7 +6847,7 @@
           <p:cNvPr id="7" name="point-band-1">
             <a:extLst xmlns:a="http://schemas.openxmlformats.org/drawingml/2006/main">
               <a:ext uri="{FF2B5EF4-FFF2-40B4-BE49-F238E27FC236}">
-                <a16:creationId xmlns:a16="http://schemas.microsoft.com/office/drawing/2014/main" id="{F21A4E06-539D-4A54-8B75-502E922C1189}"/>
+                <a16:creationId xmlns:a16="http://schemas.microsoft.com/office/drawing/2014/main" id="{712BB8A9-E829-469D-BF7E-64C71099B7C4}"/>
               </a:ext>
             </a:extLst>
           </p:cNvPr>
@@ -4629,7 +6880,7 @@
           <p:cNvPr id="8" name="point-1">
             <a:extLst xmlns:a="http://schemas.openxmlformats.org/drawingml/2006/main">
               <a:ext uri="{FF2B5EF4-FFF2-40B4-BE49-F238E27FC236}">
-                <a16:creationId xmlns:a16="http://schemas.microsoft.com/office/drawing/2014/main" id="{16764B65-CB43-42E5-B7BD-B8800AB87837}"/>
+                <a16:creationId xmlns:a16="http://schemas.microsoft.com/office/drawing/2014/main" id="{77985EBD-B2D2-4B10-9222-AAE574325133}"/>
               </a:ext>
             </a:extLst>
           </p:cNvPr>
@@ -4687,7 +6938,7 @@
           <p:cNvPr id="9" name="point-band-2">
             <a:extLst xmlns:a="http://schemas.openxmlformats.org/drawingml/2006/main">
               <a:ext uri="{FF2B5EF4-FFF2-40B4-BE49-F238E27FC236}">
-                <a16:creationId xmlns:a16="http://schemas.microsoft.com/office/drawing/2014/main" id="{DC653FE1-5136-428C-A008-7D9DC67A48B4}"/>
+                <a16:creationId xmlns:a16="http://schemas.microsoft.com/office/drawing/2014/main" id="{239AF6DA-8552-4995-81F1-FE820991A649}"/>
               </a:ext>
             </a:extLst>
           </p:cNvPr>
@@ -4720,7 +6971,7 @@
           <p:cNvPr id="10" name="point-2">
             <a:extLst xmlns:a="http://schemas.openxmlformats.org/drawingml/2006/main">
               <a:ext uri="{FF2B5EF4-FFF2-40B4-BE49-F238E27FC236}">
-                <a16:creationId xmlns:a16="http://schemas.microsoft.com/office/drawing/2014/main" id="{6C32594B-89ED-4B72-8B1E-CC60751FEAD2}"/>
+                <a16:creationId xmlns:a16="http://schemas.microsoft.com/office/drawing/2014/main" id="{0C0EC702-26FF-4661-93F6-4AD4652ED74C}"/>
               </a:ext>
             </a:extLst>
           </p:cNvPr>
@@ -4778,7 +7029,7 @@
           <p:cNvPr id="11" name="point-band-3">
             <a:extLst xmlns:a="http://schemas.openxmlformats.org/drawingml/2006/main">
               <a:ext uri="{FF2B5EF4-FFF2-40B4-BE49-F238E27FC236}">
-                <a16:creationId xmlns:a16="http://schemas.microsoft.com/office/drawing/2014/main" id="{652114E5-7931-4FFF-843E-34838E1A37D4}"/>
+                <a16:creationId xmlns:a16="http://schemas.microsoft.com/office/drawing/2014/main" id="{D7AB2343-A2E4-4012-A386-F4F58C69E51E}"/>
               </a:ext>
             </a:extLst>
           </p:cNvPr>
@@ -4811,7 +7062,7 @@
           <p:cNvPr id="12" name="point-3">
             <a:extLst xmlns:a="http://schemas.openxmlformats.org/drawingml/2006/main">
               <a:ext uri="{FF2B5EF4-FFF2-40B4-BE49-F238E27FC236}">
-                <a16:creationId xmlns:a16="http://schemas.microsoft.com/office/drawing/2014/main" id="{6320433A-EB5A-4FD2-B405-95680E6BB04E}"/>
+                <a16:creationId xmlns:a16="http://schemas.microsoft.com/office/drawing/2014/main" id="{7C9727D8-1EB9-45CF-98A5-F7FB4E350FDD}"/>
               </a:ext>
             </a:extLst>
           </p:cNvPr>
@@ -4867,7 +7118,7 @@
     </p:spTree>
     <p:extLst>
       <p:ext uri="{BB962C8B-B14F-4D97-AF65-F5344CB8AC3E}">
-        <p14:creationId xmlns:p14="http://schemas.microsoft.com/office/powerpoint/2010/main" val="2103157445"/>
+        <p14:creationId xmlns:p14="http://schemas.microsoft.com/office/powerpoint/2010/main" val="606822934"/>
       </p:ext>
     </p:extLst>
   </p:cSld>
@@ -4898,7 +7149,7 @@
           <p:cNvPr id="9" name="accent-line">
             <a:extLst xmlns:a="http://schemas.openxmlformats.org/drawingml/2006/main">
               <a:ext uri="{FF2B5EF4-FFF2-40B4-BE49-F238E27FC236}">
-                <a16:creationId xmlns:a16="http://schemas.microsoft.com/office/drawing/2014/main" id="{99812493-7EA8-4C79-9D93-AF33EE379F5B}"/>
+                <a16:creationId xmlns:a16="http://schemas.microsoft.com/office/drawing/2014/main" id="{B785ACAD-AB6A-43D7-B873-2CA42EA97ACC}"/>
               </a:ext>
             </a:extLst>
           </p:cNvPr>
@@ -4931,7 +7182,7 @@
           <p:cNvPr id="2" name="chapter-label">
             <a:extLst xmlns:a="http://schemas.openxmlformats.org/drawingml/2006/main">
               <a:ext uri="{FF2B5EF4-FFF2-40B4-BE49-F238E27FC236}">
-                <a16:creationId xmlns:a16="http://schemas.microsoft.com/office/drawing/2014/main" id="{AFEACC4D-2ABD-42FA-A286-6CF739403444}"/>
+                <a16:creationId xmlns:a16="http://schemas.microsoft.com/office/drawing/2014/main" id="{F8DF1650-8CA5-4E44-946C-0912D328B7D8}"/>
               </a:ext>
             </a:extLst>
           </p:cNvPr>
@@ -4989,7 +7240,7 @@
           <p:cNvPr id="3" name="slide-number">
             <a:extLst xmlns:a="http://schemas.openxmlformats.org/drawingml/2006/main">
               <a:ext uri="{FF2B5EF4-FFF2-40B4-BE49-F238E27FC236}">
-                <a16:creationId xmlns:a16="http://schemas.microsoft.com/office/drawing/2014/main" id="{F8A141B9-120C-425A-AA21-00377508EC86}"/>
+                <a16:creationId xmlns:a16="http://schemas.microsoft.com/office/drawing/2014/main" id="{531F1078-68CA-40EA-B7F7-32C466BB1657}"/>
               </a:ext>
             </a:extLst>
           </p:cNvPr>
@@ -5047,7 +7298,7 @@
           <p:cNvPr id="4" name="chapter-footer">
             <a:extLst xmlns:a="http://schemas.openxmlformats.org/drawingml/2006/main">
               <a:ext uri="{FF2B5EF4-FFF2-40B4-BE49-F238E27FC236}">
-                <a16:creationId xmlns:a16="http://schemas.microsoft.com/office/drawing/2014/main" id="{C8A9082E-E2E8-4C62-AF27-B56167123F08}"/>
+                <a16:creationId xmlns:a16="http://schemas.microsoft.com/office/drawing/2014/main" id="{87FA87A4-3888-4861-B092-0573F0F4219E}"/>
               </a:ext>
             </a:extLst>
           </p:cNvPr>
@@ -5105,7 +7356,7 @@
           <p:cNvPr id="5" name="section-title">
             <a:extLst xmlns:a="http://schemas.openxmlformats.org/drawingml/2006/main">
               <a:ext uri="{FF2B5EF4-FFF2-40B4-BE49-F238E27FC236}">
-                <a16:creationId xmlns:a16="http://schemas.microsoft.com/office/drawing/2014/main" id="{6EEFD74B-1401-4A85-B820-CE6F7B05FAF7}"/>
+                <a16:creationId xmlns:a16="http://schemas.microsoft.com/office/drawing/2014/main" id="{AA2AED8D-ABD4-447D-8652-8DB83F6B6182}"/>
               </a:ext>
             </a:extLst>
           </p:cNvPr>
@@ -5163,7 +7414,7 @@
           <p:cNvPr id="6" name="section-explanation">
             <a:extLst xmlns:a="http://schemas.openxmlformats.org/drawingml/2006/main">
               <a:ext uri="{FF2B5EF4-FFF2-40B4-BE49-F238E27FC236}">
-                <a16:creationId xmlns:a16="http://schemas.microsoft.com/office/drawing/2014/main" id="{1B5CCB30-8EAD-4384-B892-033295C17E14}"/>
+                <a16:creationId xmlns:a16="http://schemas.microsoft.com/office/drawing/2014/main" id="{DF21AB83-A518-4622-AF84-7DC7128219A2}"/>
               </a:ext>
             </a:extLst>
           </p:cNvPr>
@@ -5221,7 +7472,7 @@
           <p:cNvPr id="7" name="column-rule">
             <a:extLst xmlns:a="http://schemas.openxmlformats.org/drawingml/2006/main">
               <a:ext uri="{FF2B5EF4-FFF2-40B4-BE49-F238E27FC236}">
-                <a16:creationId xmlns:a16="http://schemas.microsoft.com/office/drawing/2014/main" id="{BC95651F-81E2-4B1A-B44C-3BF8A0734341}"/>
+                <a16:creationId xmlns:a16="http://schemas.microsoft.com/office/drawing/2014/main" id="{015C2690-1222-474E-8E8D-99DF94751839}"/>
               </a:ext>
             </a:extLst>
           </p:cNvPr>
@@ -5254,7 +7505,7 @@
           <p:cNvPr id="8" name="section-points">
             <a:extLst xmlns:a="http://schemas.openxmlformats.org/drawingml/2006/main">
               <a:ext uri="{FF2B5EF4-FFF2-40B4-BE49-F238E27FC236}">
-                <a16:creationId xmlns:a16="http://schemas.microsoft.com/office/drawing/2014/main" id="{F645AB02-06C7-4987-888E-790803E1D5CD}"/>
+                <a16:creationId xmlns:a16="http://schemas.microsoft.com/office/drawing/2014/main" id="{EC3F852A-C71C-48B5-9657-8B1338F22B77}"/>
               </a:ext>
             </a:extLst>
           </p:cNvPr>
@@ -5366,7 +7617,7 @@
     </p:spTree>
     <p:extLst>
       <p:ext uri="{BB962C8B-B14F-4D97-AF65-F5344CB8AC3E}">
-        <p14:creationId xmlns:p14="http://schemas.microsoft.com/office/powerpoint/2010/main" val="770369498"/>
+        <p14:creationId xmlns:p14="http://schemas.microsoft.com/office/powerpoint/2010/main" val="1744078177"/>
       </p:ext>
     </p:extLst>
   </p:cSld>
@@ -5397,7 +7648,7 @@
           <p:cNvPr id="15" name="accent-line">
             <a:extLst xmlns:a="http://schemas.openxmlformats.org/drawingml/2006/main">
               <a:ext uri="{FF2B5EF4-FFF2-40B4-BE49-F238E27FC236}">
-                <a16:creationId xmlns:a16="http://schemas.microsoft.com/office/drawing/2014/main" id="{B9BDC283-33DB-414E-AEA8-2C4FFFFC038F}"/>
+                <a16:creationId xmlns:a16="http://schemas.microsoft.com/office/drawing/2014/main" id="{078D5223-31B5-473C-885B-F7BB725F9A93}"/>
               </a:ext>
             </a:extLst>
           </p:cNvPr>
@@ -5430,7 +7681,7 @@
           <p:cNvPr id="2" name="chapter-label">
             <a:extLst xmlns:a="http://schemas.openxmlformats.org/drawingml/2006/main">
               <a:ext uri="{FF2B5EF4-FFF2-40B4-BE49-F238E27FC236}">
-                <a16:creationId xmlns:a16="http://schemas.microsoft.com/office/drawing/2014/main" id="{95252702-D525-4DE8-BEE7-F3FDDDD55DF0}"/>
+                <a16:creationId xmlns:a16="http://schemas.microsoft.com/office/drawing/2014/main" id="{78E3AB8E-22C6-41F1-8EA6-E008B0659D18}"/>
               </a:ext>
             </a:extLst>
           </p:cNvPr>
@@ -5488,7 +7739,7 @@
           <p:cNvPr id="3" name="slide-number">
             <a:extLst xmlns:a="http://schemas.openxmlformats.org/drawingml/2006/main">
               <a:ext uri="{FF2B5EF4-FFF2-40B4-BE49-F238E27FC236}">
-                <a16:creationId xmlns:a16="http://schemas.microsoft.com/office/drawing/2014/main" id="{02B6F665-004B-484A-8CCD-B4C8F8CD4E51}"/>
+                <a16:creationId xmlns:a16="http://schemas.microsoft.com/office/drawing/2014/main" id="{C25ABCE1-4FEC-4C64-9AB3-FA2E280C4888}"/>
               </a:ext>
             </a:extLst>
           </p:cNvPr>
@@ -5546,7 +7797,7 @@
           <p:cNvPr id="4" name="chapter-footer">
             <a:extLst xmlns:a="http://schemas.openxmlformats.org/drawingml/2006/main">
               <a:ext uri="{FF2B5EF4-FFF2-40B4-BE49-F238E27FC236}">
-                <a16:creationId xmlns:a16="http://schemas.microsoft.com/office/drawing/2014/main" id="{A8339303-AAD4-4904-96D8-128E9C48D627}"/>
+                <a16:creationId xmlns:a16="http://schemas.microsoft.com/office/drawing/2014/main" id="{5F225A58-8DBB-4980-88FD-F99911F4EDB3}"/>
               </a:ext>
             </a:extLst>
           </p:cNvPr>
@@ -5604,7 +7855,7 @@
           <p:cNvPr id="5" name="section-title">
             <a:extLst xmlns:a="http://schemas.openxmlformats.org/drawingml/2006/main">
               <a:ext uri="{FF2B5EF4-FFF2-40B4-BE49-F238E27FC236}">
-                <a16:creationId xmlns:a16="http://schemas.microsoft.com/office/drawing/2014/main" id="{B08D93DB-7AA4-404A-A8CC-40FD93B355E3}"/>
+                <a16:creationId xmlns:a16="http://schemas.microsoft.com/office/drawing/2014/main" id="{F65D0A10-F3C3-48B8-9B66-0E0BF24D3C75}"/>
               </a:ext>
             </a:extLst>
           </p:cNvPr>
@@ -5662,7 +7913,7 @@
           <p:cNvPr id="6" name="section-explanation">
             <a:extLst xmlns:a="http://schemas.openxmlformats.org/drawingml/2006/main">
               <a:ext uri="{FF2B5EF4-FFF2-40B4-BE49-F238E27FC236}">
-                <a16:creationId xmlns:a16="http://schemas.microsoft.com/office/drawing/2014/main" id="{E671F744-E55A-4443-93CD-43895CBA97FB}"/>
+                <a16:creationId xmlns:a16="http://schemas.microsoft.com/office/drawing/2014/main" id="{50FE2F6A-4F26-4B01-90E6-23B14DE6FBAD}"/>
               </a:ext>
             </a:extLst>
           </p:cNvPr>
@@ -5720,7 +7971,7 @@
           <p:cNvPr id="7" name="point-band-1">
             <a:extLst xmlns:a="http://schemas.openxmlformats.org/drawingml/2006/main">
               <a:ext uri="{FF2B5EF4-FFF2-40B4-BE49-F238E27FC236}">
-                <a16:creationId xmlns:a16="http://schemas.microsoft.com/office/drawing/2014/main" id="{D8E0E9B4-82CA-4E67-ADCB-2F879D1A696D}"/>
+                <a16:creationId xmlns:a16="http://schemas.microsoft.com/office/drawing/2014/main" id="{D04D028B-6547-43A9-A5BF-91CC82611117}"/>
               </a:ext>
             </a:extLst>
           </p:cNvPr>
@@ -5753,7 +8004,7 @@
           <p:cNvPr id="8" name="point-1">
             <a:extLst xmlns:a="http://schemas.openxmlformats.org/drawingml/2006/main">
               <a:ext uri="{FF2B5EF4-FFF2-40B4-BE49-F238E27FC236}">
-                <a16:creationId xmlns:a16="http://schemas.microsoft.com/office/drawing/2014/main" id="{890A1B48-01AF-40A5-99E2-E273DE9276BF}"/>
+                <a16:creationId xmlns:a16="http://schemas.microsoft.com/office/drawing/2014/main" id="{490D74B2-B8E1-4F39-A8F2-4EC604597F59}"/>
               </a:ext>
             </a:extLst>
           </p:cNvPr>
@@ -5811,7 +8062,7 @@
           <p:cNvPr id="9" name="point-band-2">
             <a:extLst xmlns:a="http://schemas.openxmlformats.org/drawingml/2006/main">
               <a:ext uri="{FF2B5EF4-FFF2-40B4-BE49-F238E27FC236}">
-                <a16:creationId xmlns:a16="http://schemas.microsoft.com/office/drawing/2014/main" id="{A14C8CF2-7B70-437D-9431-3D60C9E36BB8}"/>
+                <a16:creationId xmlns:a16="http://schemas.microsoft.com/office/drawing/2014/main" id="{5E767CE5-24EF-4828-B619-2A52C1464645}"/>
               </a:ext>
             </a:extLst>
           </p:cNvPr>
@@ -5844,7 +8095,7 @@
           <p:cNvPr id="10" name="point-2">
             <a:extLst xmlns:a="http://schemas.openxmlformats.org/drawingml/2006/main">
               <a:ext uri="{FF2B5EF4-FFF2-40B4-BE49-F238E27FC236}">
-                <a16:creationId xmlns:a16="http://schemas.microsoft.com/office/drawing/2014/main" id="{ECE96476-54EC-4E42-A900-421B6BADDF78}"/>
+                <a16:creationId xmlns:a16="http://schemas.microsoft.com/office/drawing/2014/main" id="{ECF09C66-5D3A-4DC1-BC64-128666B3CDA4}"/>
               </a:ext>
             </a:extLst>
           </p:cNvPr>
@@ -5902,7 +8153,7 @@
           <p:cNvPr id="11" name="point-band-3">
             <a:extLst xmlns:a="http://schemas.openxmlformats.org/drawingml/2006/main">
               <a:ext uri="{FF2B5EF4-FFF2-40B4-BE49-F238E27FC236}">
-                <a16:creationId xmlns:a16="http://schemas.microsoft.com/office/drawing/2014/main" id="{84830839-D667-42DE-95FF-6F83EBDF2DE0}"/>
+                <a16:creationId xmlns:a16="http://schemas.microsoft.com/office/drawing/2014/main" id="{25774F82-0238-4EBF-9A63-C0E32DB6A0EB}"/>
               </a:ext>
             </a:extLst>
           </p:cNvPr>
@@ -5935,7 +8186,7 @@
           <p:cNvPr id="12" name="point-3">
             <a:extLst xmlns:a="http://schemas.openxmlformats.org/drawingml/2006/main">
               <a:ext uri="{FF2B5EF4-FFF2-40B4-BE49-F238E27FC236}">
-                <a16:creationId xmlns:a16="http://schemas.microsoft.com/office/drawing/2014/main" id="{6055CCE8-801C-4DCA-A2E3-F10E592B19A9}"/>
+                <a16:creationId xmlns:a16="http://schemas.microsoft.com/office/drawing/2014/main" id="{80D8D8BD-B208-42B8-B3FD-27A7D196904E}"/>
               </a:ext>
             </a:extLst>
           </p:cNvPr>
@@ -5993,7 +8244,7 @@
           <p:cNvPr id="13" name="point-band-4">
             <a:extLst xmlns:a="http://schemas.openxmlformats.org/drawingml/2006/main">
               <a:ext uri="{FF2B5EF4-FFF2-40B4-BE49-F238E27FC236}">
-                <a16:creationId xmlns:a16="http://schemas.microsoft.com/office/drawing/2014/main" id="{B9D20111-6EE4-4C84-9CCA-1F32010AA7F4}"/>
+                <a16:creationId xmlns:a16="http://schemas.microsoft.com/office/drawing/2014/main" id="{370321E1-8816-4103-9B7B-FEE76DDD6636}"/>
               </a:ext>
             </a:extLst>
           </p:cNvPr>
@@ -6026,7 +8277,7 @@
           <p:cNvPr id="14" name="point-4">
             <a:extLst xmlns:a="http://schemas.openxmlformats.org/drawingml/2006/main">
               <a:ext uri="{FF2B5EF4-FFF2-40B4-BE49-F238E27FC236}">
-                <a16:creationId xmlns:a16="http://schemas.microsoft.com/office/drawing/2014/main" id="{162F318C-5409-4FBB-9329-DBE288919918}"/>
+                <a16:creationId xmlns:a16="http://schemas.microsoft.com/office/drawing/2014/main" id="{82F9956B-5625-4DE2-AC69-735A7C09F7AE}"/>
               </a:ext>
             </a:extLst>
           </p:cNvPr>
@@ -6082,7 +8333,7 @@
     </p:spTree>
     <p:extLst>
       <p:ext uri="{BB962C8B-B14F-4D97-AF65-F5344CB8AC3E}">
-        <p14:creationId xmlns:p14="http://schemas.microsoft.com/office/powerpoint/2010/main" val="811908289"/>
+        <p14:creationId xmlns:p14="http://schemas.microsoft.com/office/powerpoint/2010/main" val="589504961"/>
       </p:ext>
     </p:extLst>
   </p:cSld>
@@ -6113,7 +8364,7 @@
           <p:cNvPr id="9" name="accent-line">
             <a:extLst xmlns:a="http://schemas.openxmlformats.org/drawingml/2006/main">
               <a:ext uri="{FF2B5EF4-FFF2-40B4-BE49-F238E27FC236}">
-                <a16:creationId xmlns:a16="http://schemas.microsoft.com/office/drawing/2014/main" id="{3E5DE213-3582-4F46-89E2-7E97653B41CB}"/>
+                <a16:creationId xmlns:a16="http://schemas.microsoft.com/office/drawing/2014/main" id="{1EA7EBFA-8056-496C-88B7-33727DABD2D4}"/>
               </a:ext>
             </a:extLst>
           </p:cNvPr>
@@ -6146,7 +8397,7 @@
           <p:cNvPr id="2" name="chapter-label">
             <a:extLst xmlns:a="http://schemas.openxmlformats.org/drawingml/2006/main">
               <a:ext uri="{FF2B5EF4-FFF2-40B4-BE49-F238E27FC236}">
-                <a16:creationId xmlns:a16="http://schemas.microsoft.com/office/drawing/2014/main" id="{24E56B25-DF9A-4EEB-B68D-F5CA59E40139}"/>
+                <a16:creationId xmlns:a16="http://schemas.microsoft.com/office/drawing/2014/main" id="{BBF0670D-8238-4A7C-9D07-BB9239D7E64D}"/>
               </a:ext>
             </a:extLst>
           </p:cNvPr>
@@ -6204,7 +8455,7 @@
           <p:cNvPr id="3" name="slide-number">
             <a:extLst xmlns:a="http://schemas.openxmlformats.org/drawingml/2006/main">
               <a:ext uri="{FF2B5EF4-FFF2-40B4-BE49-F238E27FC236}">
-                <a16:creationId xmlns:a16="http://schemas.microsoft.com/office/drawing/2014/main" id="{427DB078-66D3-48B0-9AB7-808CA64B29A4}"/>
+                <a16:creationId xmlns:a16="http://schemas.microsoft.com/office/drawing/2014/main" id="{D3684C2C-36DE-49CD-B11B-D7AF742F8BC6}"/>
               </a:ext>
             </a:extLst>
           </p:cNvPr>
@@ -6262,7 +8513,7 @@
           <p:cNvPr id="4" name="chapter-footer">
             <a:extLst xmlns:a="http://schemas.openxmlformats.org/drawingml/2006/main">
               <a:ext uri="{FF2B5EF4-FFF2-40B4-BE49-F238E27FC236}">
-                <a16:creationId xmlns:a16="http://schemas.microsoft.com/office/drawing/2014/main" id="{947BEC41-DA3C-4FB3-A211-C4698B182671}"/>
+                <a16:creationId xmlns:a16="http://schemas.microsoft.com/office/drawing/2014/main" id="{54816AF5-6EE7-42C0-BC4F-4F81909B8D97}"/>
               </a:ext>
             </a:extLst>
           </p:cNvPr>
@@ -6320,7 +8571,7 @@
           <p:cNvPr id="5" name="section-title">
             <a:extLst xmlns:a="http://schemas.openxmlformats.org/drawingml/2006/main">
               <a:ext uri="{FF2B5EF4-FFF2-40B4-BE49-F238E27FC236}">
-                <a16:creationId xmlns:a16="http://schemas.microsoft.com/office/drawing/2014/main" id="{0B490DF4-3365-4599-A60D-55278616BBCA}"/>
+                <a16:creationId xmlns:a16="http://schemas.microsoft.com/office/drawing/2014/main" id="{90FB9C0E-4E61-49B9-B532-B4F81A09FFF7}"/>
               </a:ext>
             </a:extLst>
           </p:cNvPr>
@@ -6378,7 +8629,7 @@
           <p:cNvPr id="6" name="section-explanation">
             <a:extLst xmlns:a="http://schemas.openxmlformats.org/drawingml/2006/main">
               <a:ext uri="{FF2B5EF4-FFF2-40B4-BE49-F238E27FC236}">
-                <a16:creationId xmlns:a16="http://schemas.microsoft.com/office/drawing/2014/main" id="{619C3EC2-5509-46FA-AFAD-4A8ECC3614FC}"/>
+                <a16:creationId xmlns:a16="http://schemas.microsoft.com/office/drawing/2014/main" id="{50B983B7-100D-4B9C-A9E2-A18C6B370466}"/>
               </a:ext>
             </a:extLst>
           </p:cNvPr>
@@ -6436,7 +8687,7 @@
           <p:cNvPr id="7" name="column-rule">
             <a:extLst xmlns:a="http://schemas.openxmlformats.org/drawingml/2006/main">
               <a:ext uri="{FF2B5EF4-FFF2-40B4-BE49-F238E27FC236}">
-                <a16:creationId xmlns:a16="http://schemas.microsoft.com/office/drawing/2014/main" id="{9AE88D44-7C2D-44D6-B43B-D3A161E1675C}"/>
+                <a16:creationId xmlns:a16="http://schemas.microsoft.com/office/drawing/2014/main" id="{7A2B9D3D-DD4A-4835-AC60-6AF9BE1EE3EC}"/>
               </a:ext>
             </a:extLst>
           </p:cNvPr>
@@ -6469,7 +8720,7 @@
           <p:cNvPr id="8" name="section-points">
             <a:extLst xmlns:a="http://schemas.openxmlformats.org/drawingml/2006/main">
               <a:ext uri="{FF2B5EF4-FFF2-40B4-BE49-F238E27FC236}">
-                <a16:creationId xmlns:a16="http://schemas.microsoft.com/office/drawing/2014/main" id="{3C92CC7E-6994-4F85-A6AE-DF0660F31D34}"/>
+                <a16:creationId xmlns:a16="http://schemas.microsoft.com/office/drawing/2014/main" id="{6B9C2BA8-7DDA-4039-8F91-C803040EB764}"/>
               </a:ext>
             </a:extLst>
           </p:cNvPr>
@@ -6609,7 +8860,7 @@
     </p:spTree>
     <p:extLst>
       <p:ext uri="{BB962C8B-B14F-4D97-AF65-F5344CB8AC3E}">
-        <p14:creationId xmlns:p14="http://schemas.microsoft.com/office/powerpoint/2010/main" val="1035542335"/>
+        <p14:creationId xmlns:p14="http://schemas.microsoft.com/office/powerpoint/2010/main" val="1496581947"/>
       </p:ext>
     </p:extLst>
   </p:cSld>
@@ -6640,7 +8891,7 @@
           <p:cNvPr id="15" name="accent-line">
             <a:extLst xmlns:a="http://schemas.openxmlformats.org/drawingml/2006/main">
               <a:ext uri="{FF2B5EF4-FFF2-40B4-BE49-F238E27FC236}">
-                <a16:creationId xmlns:a16="http://schemas.microsoft.com/office/drawing/2014/main" id="{4BE00236-3F1B-46DE-9630-D0C98FCC7808}"/>
+                <a16:creationId xmlns:a16="http://schemas.microsoft.com/office/drawing/2014/main" id="{B2614B87-6343-42CB-8151-29C4EF4A1512}"/>
               </a:ext>
             </a:extLst>
           </p:cNvPr>
@@ -6673,7 +8924,7 @@
           <p:cNvPr id="2" name="chapter-label">
             <a:extLst xmlns:a="http://schemas.openxmlformats.org/drawingml/2006/main">
               <a:ext uri="{FF2B5EF4-FFF2-40B4-BE49-F238E27FC236}">
-                <a16:creationId xmlns:a16="http://schemas.microsoft.com/office/drawing/2014/main" id="{6F2F7126-E442-427E-9254-5790BE3CDE80}"/>
+                <a16:creationId xmlns:a16="http://schemas.microsoft.com/office/drawing/2014/main" id="{1EF309EA-2AF3-41F7-85D4-9274D25D0053}"/>
               </a:ext>
             </a:extLst>
           </p:cNvPr>
@@ -6731,7 +8982,7 @@
           <p:cNvPr id="3" name="slide-number">
             <a:extLst xmlns:a="http://schemas.openxmlformats.org/drawingml/2006/main">
               <a:ext uri="{FF2B5EF4-FFF2-40B4-BE49-F238E27FC236}">
-                <a16:creationId xmlns:a16="http://schemas.microsoft.com/office/drawing/2014/main" id="{9FCC1F01-8C18-45CC-BDAA-FAD41BA86423}"/>
+                <a16:creationId xmlns:a16="http://schemas.microsoft.com/office/drawing/2014/main" id="{E281E81E-32EB-498C-BAA0-F8A96673F98E}"/>
               </a:ext>
             </a:extLst>
           </p:cNvPr>
@@ -6789,7 +9040,7 @@
           <p:cNvPr id="4" name="chapter-footer">
             <a:extLst xmlns:a="http://schemas.openxmlformats.org/drawingml/2006/main">
               <a:ext uri="{FF2B5EF4-FFF2-40B4-BE49-F238E27FC236}">
-                <a16:creationId xmlns:a16="http://schemas.microsoft.com/office/drawing/2014/main" id="{C2001743-6A0A-49FA-B3B9-5FF7E5A4E468}"/>
+                <a16:creationId xmlns:a16="http://schemas.microsoft.com/office/drawing/2014/main" id="{0543DB7B-22C5-4E5A-A1DC-DC538A9E94B3}"/>
               </a:ext>
             </a:extLst>
           </p:cNvPr>
@@ -6847,7 +9098,7 @@
           <p:cNvPr id="5" name="section-title">
             <a:extLst xmlns:a="http://schemas.openxmlformats.org/drawingml/2006/main">
               <a:ext uri="{FF2B5EF4-FFF2-40B4-BE49-F238E27FC236}">
-                <a16:creationId xmlns:a16="http://schemas.microsoft.com/office/drawing/2014/main" id="{0E17653F-13E4-4F29-A252-0250818AD847}"/>
+                <a16:creationId xmlns:a16="http://schemas.microsoft.com/office/drawing/2014/main" id="{DEF9DA43-F4B9-4D6A-9E5B-B92FB3D64DD4}"/>
               </a:ext>
             </a:extLst>
           </p:cNvPr>
@@ -6905,7 +9156,7 @@
           <p:cNvPr id="6" name="section-explanation">
             <a:extLst xmlns:a="http://schemas.openxmlformats.org/drawingml/2006/main">
               <a:ext uri="{FF2B5EF4-FFF2-40B4-BE49-F238E27FC236}">
-                <a16:creationId xmlns:a16="http://schemas.microsoft.com/office/drawing/2014/main" id="{210E945B-DAE9-41EB-916A-FF4D85CF845E}"/>
+                <a16:creationId xmlns:a16="http://schemas.microsoft.com/office/drawing/2014/main" id="{8281F0B1-379B-4987-96FF-2A18B4EAF50C}"/>
               </a:ext>
             </a:extLst>
           </p:cNvPr>
@@ -6963,7 +9214,7 @@
           <p:cNvPr id="7" name="point-band-1">
             <a:extLst xmlns:a="http://schemas.openxmlformats.org/drawingml/2006/main">
               <a:ext uri="{FF2B5EF4-FFF2-40B4-BE49-F238E27FC236}">
-                <a16:creationId xmlns:a16="http://schemas.microsoft.com/office/drawing/2014/main" id="{70DFF5F7-9B21-451B-BDFA-DD2A6F7211EC}"/>
+                <a16:creationId xmlns:a16="http://schemas.microsoft.com/office/drawing/2014/main" id="{7B8AE621-72B9-4F16-A3CD-E978DC740E54}"/>
               </a:ext>
             </a:extLst>
           </p:cNvPr>
@@ -6996,7 +9247,7 @@
           <p:cNvPr id="8" name="point-1">
             <a:extLst xmlns:a="http://schemas.openxmlformats.org/drawingml/2006/main">
               <a:ext uri="{FF2B5EF4-FFF2-40B4-BE49-F238E27FC236}">
-                <a16:creationId xmlns:a16="http://schemas.microsoft.com/office/drawing/2014/main" id="{F1B7A4E0-BF60-4F5A-ACDB-7D11F8C1C55B}"/>
+                <a16:creationId xmlns:a16="http://schemas.microsoft.com/office/drawing/2014/main" id="{9FB818AB-4AC9-4E9C-942C-D1CA66CC335E}"/>
               </a:ext>
             </a:extLst>
           </p:cNvPr>
@@ -7054,7 +9305,7 @@
           <p:cNvPr id="9" name="point-band-2">
             <a:extLst xmlns:a="http://schemas.openxmlformats.org/drawingml/2006/main">
               <a:ext uri="{FF2B5EF4-FFF2-40B4-BE49-F238E27FC236}">
-                <a16:creationId xmlns:a16="http://schemas.microsoft.com/office/drawing/2014/main" id="{9EC97490-2C81-49CE-A5D8-8311A7F79911}"/>
+                <a16:creationId xmlns:a16="http://schemas.microsoft.com/office/drawing/2014/main" id="{A8EC65A2-56DE-47A9-AE06-80AAA1B38C51}"/>
               </a:ext>
             </a:extLst>
           </p:cNvPr>
@@ -7087,7 +9338,7 @@
           <p:cNvPr id="10" name="point-2">
             <a:extLst xmlns:a="http://schemas.openxmlformats.org/drawingml/2006/main">
               <a:ext uri="{FF2B5EF4-FFF2-40B4-BE49-F238E27FC236}">
-                <a16:creationId xmlns:a16="http://schemas.microsoft.com/office/drawing/2014/main" id="{71128A16-1C4B-473E-A8B3-03107B9CA5B3}"/>
+                <a16:creationId xmlns:a16="http://schemas.microsoft.com/office/drawing/2014/main" id="{07F33813-39F5-4186-BEC7-C5CBB1372AF6}"/>
               </a:ext>
             </a:extLst>
           </p:cNvPr>
@@ -7145,7 +9396,7 @@
           <p:cNvPr id="11" name="point-band-3">
             <a:extLst xmlns:a="http://schemas.openxmlformats.org/drawingml/2006/main">
               <a:ext uri="{FF2B5EF4-FFF2-40B4-BE49-F238E27FC236}">
-                <a16:creationId xmlns:a16="http://schemas.microsoft.com/office/drawing/2014/main" id="{81AC98E5-C3C9-4B77-B5C5-6AF1A0FBFC36}"/>
+                <a16:creationId xmlns:a16="http://schemas.microsoft.com/office/drawing/2014/main" id="{3FD45443-DA3B-44D1-AA49-88D909B2A56B}"/>
               </a:ext>
             </a:extLst>
           </p:cNvPr>
@@ -7178,7 +9429,7 @@
           <p:cNvPr id="12" name="point-3">
             <a:extLst xmlns:a="http://schemas.openxmlformats.org/drawingml/2006/main">
               <a:ext uri="{FF2B5EF4-FFF2-40B4-BE49-F238E27FC236}">
-                <a16:creationId xmlns:a16="http://schemas.microsoft.com/office/drawing/2014/main" id="{6C93D891-1063-4373-9A36-CE16E116EF86}"/>
+                <a16:creationId xmlns:a16="http://schemas.microsoft.com/office/drawing/2014/main" id="{C4B01F9D-5DBD-4B5D-AD95-61F08A81CBC3}"/>
               </a:ext>
             </a:extLst>
           </p:cNvPr>
@@ -7236,7 +9487,7 @@
           <p:cNvPr id="13" name="point-band-4">
             <a:extLst xmlns:a="http://schemas.openxmlformats.org/drawingml/2006/main">
               <a:ext uri="{FF2B5EF4-FFF2-40B4-BE49-F238E27FC236}">
-                <a16:creationId xmlns:a16="http://schemas.microsoft.com/office/drawing/2014/main" id="{4FA86DA0-C2C5-44FB-8008-3D1BE88EC385}"/>
+                <a16:creationId xmlns:a16="http://schemas.microsoft.com/office/drawing/2014/main" id="{35CB1DF3-723F-4169-A185-B321B33DFBF1}"/>
               </a:ext>
             </a:extLst>
           </p:cNvPr>
@@ -7269,7 +9520,7 @@
           <p:cNvPr id="14" name="point-4">
             <a:extLst xmlns:a="http://schemas.openxmlformats.org/drawingml/2006/main">
               <a:ext uri="{FF2B5EF4-FFF2-40B4-BE49-F238E27FC236}">
-                <a16:creationId xmlns:a16="http://schemas.microsoft.com/office/drawing/2014/main" id="{14B048A3-A881-4415-8F2A-D3E8B97083FB}"/>
+                <a16:creationId xmlns:a16="http://schemas.microsoft.com/office/drawing/2014/main" id="{0C73C488-4BFE-48F9-9635-23B2AE061FB0}"/>
               </a:ext>
             </a:extLst>
           </p:cNvPr>
@@ -7325,7 +9576,7 @@
     </p:spTree>
     <p:extLst>
       <p:ext uri="{BB962C8B-B14F-4D97-AF65-F5344CB8AC3E}">
-        <p14:creationId xmlns:p14="http://schemas.microsoft.com/office/powerpoint/2010/main" val="1237476743"/>
+        <p14:creationId xmlns:p14="http://schemas.microsoft.com/office/powerpoint/2010/main" val="1501889606"/>
       </p:ext>
     </p:extLst>
   </p:cSld>
@@ -7353,10 +9604,10 @@
       </p:grpSpPr>
       <p:sp>
         <p:nvSpPr>
-          <p:cNvPr id="18" name="accent-line">
-            <a:extLst xmlns:a="http://schemas.openxmlformats.org/drawingml/2006/main">
-              <a:ext uri="{FF2B5EF4-FFF2-40B4-BE49-F238E27FC236}">
-                <a16:creationId xmlns:a16="http://schemas.microsoft.com/office/drawing/2014/main" id="{96C22441-8EEE-4087-9F59-4E65E8763D4D}"/>
+          <p:cNvPr id="9" name="accent-line">
+            <a:extLst xmlns:a="http://schemas.openxmlformats.org/drawingml/2006/main">
+              <a:ext uri="{FF2B5EF4-FFF2-40B4-BE49-F238E27FC236}">
+                <a16:creationId xmlns:a16="http://schemas.microsoft.com/office/drawing/2014/main" id="{1F045F2D-B52C-47D3-9090-E2692D20087B}"/>
               </a:ext>
             </a:extLst>
           </p:cNvPr>
@@ -7389,7 +9640,7 @@
           <p:cNvPr id="2" name="chapter-label">
             <a:extLst xmlns:a="http://schemas.openxmlformats.org/drawingml/2006/main">
               <a:ext uri="{FF2B5EF4-FFF2-40B4-BE49-F238E27FC236}">
-                <a16:creationId xmlns:a16="http://schemas.microsoft.com/office/drawing/2014/main" id="{1E811296-5BAC-40E2-A448-442A7A36C3B7}"/>
+                <a16:creationId xmlns:a16="http://schemas.microsoft.com/office/drawing/2014/main" id="{0295D543-50A2-475C-AE17-A822A2B52538}"/>
               </a:ext>
             </a:extLst>
           </p:cNvPr>
@@ -7437,7 +9688,7 @@
                 <a:ea typeface="Helvetica Neue"/>
                 <a:cs typeface="Helvetica Neue"/>
               </a:rPr>
-              <a:t>EXAM CHECK  /  12</a:t>
+              <a:t>CORE IDEA 07  /  12</a:t>
             </a:r>
           </a:p>
         </p:txBody>
@@ -7447,7 +9698,7 @@
           <p:cNvPr id="3" name="slide-number">
             <a:extLst xmlns:a="http://schemas.openxmlformats.org/drawingml/2006/main">
               <a:ext uri="{FF2B5EF4-FFF2-40B4-BE49-F238E27FC236}">
-                <a16:creationId xmlns:a16="http://schemas.microsoft.com/office/drawing/2014/main" id="{273B2290-B12F-4A41-BCDB-75FC304398DA}"/>
+                <a16:creationId xmlns:a16="http://schemas.microsoft.com/office/drawing/2014/main" id="{8E18B608-4910-4DBF-A801-22379515B451}"/>
               </a:ext>
             </a:extLst>
           </p:cNvPr>
@@ -7505,7 +9756,7 @@
           <p:cNvPr id="4" name="chapter-footer">
             <a:extLst xmlns:a="http://schemas.openxmlformats.org/drawingml/2006/main">
               <a:ext uri="{FF2B5EF4-FFF2-40B4-BE49-F238E27FC236}">
-                <a16:creationId xmlns:a16="http://schemas.microsoft.com/office/drawing/2014/main" id="{AF86FA8F-B8AB-4F91-91A5-2075A8F586EA}"/>
+                <a16:creationId xmlns:a16="http://schemas.microsoft.com/office/drawing/2014/main" id="{38ABB931-CD1F-4E21-8ED8-DF6335DC84FD}"/>
               </a:ext>
             </a:extLst>
           </p:cNvPr>
@@ -7560,138 +9811,22 @@
       </p:sp>
       <p:sp>
         <p:nvSpPr>
-          <p:cNvPr id="5" name="exam-title">
-            <a:extLst xmlns:a="http://schemas.openxmlformats.org/drawingml/2006/main">
-              <a:ext uri="{FF2B5EF4-FFF2-40B4-BE49-F238E27FC236}">
-                <a16:creationId xmlns:a16="http://schemas.microsoft.com/office/drawing/2014/main" id="{C42D1D26-C04D-4C45-A81D-61441E26B3D6}"/>
-              </a:ext>
-            </a:extLst>
-          </p:cNvPr>
-          <p:cNvSpPr>
-            <a:spLocks xmlns:a="http://schemas.openxmlformats.org/drawingml/2006/main" noGrp="1"/>
-          </p:cNvSpPr>
-          <p:nvPr/>
-        </p:nvSpPr>
-        <p:spPr>
-          <a:xfrm xmlns:a="http://schemas.openxmlformats.org/drawingml/2006/main">
-            <a:off x="390525" y="981075"/>
-            <a:ext cx="10668000" cy="781050"/>
-          </a:xfrm>
-          <a:prstGeom xmlns:a="http://schemas.openxmlformats.org/drawingml/2006/main" prst="rect">
-            <a:avLst/>
-          </a:prstGeom>
-          <a:noFill xmlns:a="http://schemas.openxmlformats.org/drawingml/2006/main"/>
-          <a:ln xmlns:a="http://schemas.openxmlformats.org/drawingml/2006/main" w="0">
-            <a:noFill/>
-            <a:prstDash val="solid"/>
-          </a:ln>
-        </p:spPr>
-        <p:txBody>
-          <a:bodyPr xmlns:a="http://schemas.openxmlformats.org/drawingml/2006/main" anchor="t">
-            <a:noAutofit/>
-          </a:bodyPr>
-          <a:lstStyle xmlns:a="http://schemas.openxmlformats.org/drawingml/2006/main"/>
-          <a:p xmlns:a="http://schemas.openxmlformats.org/drawingml/2006/main">
-            <a:pPr algn="l">
-              <a:defRPr sz="3150" b="1">
-                <a:solidFill>
-                  <a:srgbClr val="111111"/>
-                </a:solidFill>
-                <a:latin typeface="Helvetica Neue"/>
-                <a:ea typeface="Helvetica Neue"/>
-                <a:cs typeface="Helvetica Neue"/>
-              </a:defRPr>
-            </a:pPr>
-            <a:r>
-              <a:rPr sz="3150" b="1">
-                <a:solidFill>
-                  <a:srgbClr val="111111"/>
-                </a:solidFill>
-                <a:latin typeface="Helvetica Neue"/>
-                <a:ea typeface="Helvetica Neue"/>
-                <a:cs typeface="Helvetica Neue"/>
-              </a:rPr>
-              <a:t>Can you answer these without notes?</a:t>
-            </a:r>
-          </a:p>
-        </p:txBody>
-      </p:sp>
-      <p:sp>
-        <p:nvSpPr>
-          <p:cNvPr id="6" name="exam-number-1">
-            <a:extLst xmlns:a="http://schemas.openxmlformats.org/drawingml/2006/main">
-              <a:ext uri="{FF2B5EF4-FFF2-40B4-BE49-F238E27FC236}">
-                <a16:creationId xmlns:a16="http://schemas.microsoft.com/office/drawing/2014/main" id="{09438F82-5F55-4DE0-85E4-B586C18F3584}"/>
-              </a:ext>
-            </a:extLst>
-          </p:cNvPr>
-          <p:cNvSpPr>
-            <a:spLocks xmlns:a="http://schemas.openxmlformats.org/drawingml/2006/main" noGrp="1"/>
-          </p:cNvSpPr>
-          <p:nvPr/>
-        </p:nvSpPr>
-        <p:spPr>
-          <a:xfrm xmlns:a="http://schemas.openxmlformats.org/drawingml/2006/main">
-            <a:off x="390525" y="2238375"/>
-            <a:ext cx="590550" cy="400050"/>
-          </a:xfrm>
-          <a:prstGeom xmlns:a="http://schemas.openxmlformats.org/drawingml/2006/main" prst="rect">
-            <a:avLst/>
-          </a:prstGeom>
-          <a:noFill xmlns:a="http://schemas.openxmlformats.org/drawingml/2006/main"/>
-          <a:ln xmlns:a="http://schemas.openxmlformats.org/drawingml/2006/main" w="0">
-            <a:noFill/>
-            <a:prstDash val="solid"/>
-          </a:ln>
-        </p:spPr>
-        <p:txBody>
-          <a:bodyPr xmlns:a="http://schemas.openxmlformats.org/drawingml/2006/main" anchor="t">
-            <a:noAutofit/>
-          </a:bodyPr>
-          <a:lstStyle xmlns:a="http://schemas.openxmlformats.org/drawingml/2006/main"/>
-          <a:p xmlns:a="http://schemas.openxmlformats.org/drawingml/2006/main">
-            <a:pPr algn="l">
-              <a:defRPr sz="1725" b="1">
-                <a:solidFill>
-                  <a:srgbClr val="C4A1FF"/>
-                </a:solidFill>
-                <a:latin typeface="Helvetica Neue"/>
-                <a:ea typeface="Helvetica Neue"/>
-                <a:cs typeface="Helvetica Neue"/>
-              </a:defRPr>
-            </a:pPr>
-            <a:r>
-              <a:rPr sz="1725" b="1">
-                <a:solidFill>
-                  <a:srgbClr val="C4A1FF"/>
-                </a:solidFill>
-                <a:latin typeface="Helvetica Neue"/>
-                <a:ea typeface="Helvetica Neue"/>
-                <a:cs typeface="Helvetica Neue"/>
-              </a:rPr>
-              <a:t>01</a:t>
-            </a:r>
-          </a:p>
-        </p:txBody>
-      </p:sp>
-      <p:sp>
-        <p:nvSpPr>
-          <p:cNvPr id="7" name="exam-question-1">
-            <a:extLst xmlns:a="http://schemas.openxmlformats.org/drawingml/2006/main">
-              <a:ext uri="{FF2B5EF4-FFF2-40B4-BE49-F238E27FC236}">
-                <a16:creationId xmlns:a16="http://schemas.microsoft.com/office/drawing/2014/main" id="{C84D2F7E-F9C8-4B84-B338-939E69C8DA4C}"/>
-              </a:ext>
-            </a:extLst>
-          </p:cNvPr>
-          <p:cNvSpPr>
-            <a:spLocks xmlns:a="http://schemas.openxmlformats.org/drawingml/2006/main" noGrp="1"/>
-          </p:cNvSpPr>
-          <p:nvPr/>
-        </p:nvSpPr>
-        <p:spPr>
-          <a:xfrm xmlns:a="http://schemas.openxmlformats.org/drawingml/2006/main">
-            <a:off x="1076325" y="2238375"/>
-            <a:ext cx="4762500" cy="895350"/>
+          <p:cNvPr id="5" name="section-title">
+            <a:extLst xmlns:a="http://schemas.openxmlformats.org/drawingml/2006/main">
+              <a:ext uri="{FF2B5EF4-FFF2-40B4-BE49-F238E27FC236}">
+                <a16:creationId xmlns:a16="http://schemas.microsoft.com/office/drawing/2014/main" id="{3B331170-3F12-4B10-9978-964A7995E597}"/>
+              </a:ext>
+            </a:extLst>
+          </p:cNvPr>
+          <p:cNvSpPr>
+            <a:spLocks xmlns:a="http://schemas.openxmlformats.org/drawingml/2006/main" noGrp="1"/>
+          </p:cNvSpPr>
+          <p:nvPr/>
+        </p:nvSpPr>
+        <p:spPr>
+          <a:xfrm xmlns:a="http://schemas.openxmlformats.org/drawingml/2006/main">
+            <a:off x="390525" y="971550"/>
+            <a:ext cx="11144250" cy="971550"/>
           </a:xfrm>
           <a:prstGeom xmlns:a="http://schemas.openxmlformats.org/drawingml/2006/main" prst="rect">
             <a:avLst/>
@@ -7709,105 +9844,47 @@
           <a:lstStyle xmlns:a="http://schemas.openxmlformats.org/drawingml/2006/main"/>
           <a:p xmlns:a="http://schemas.openxmlformats.org/drawingml/2006/main">
             <a:pPr algn="l">
-              <a:defRPr sz="1575" b="1">
-                <a:solidFill>
-                  <a:srgbClr val="111111"/>
-                </a:solidFill>
-                <a:latin typeface="Helvetica Neue"/>
-                <a:ea typeface="Helvetica Neue"/>
-                <a:cs typeface="Helvetica Neue"/>
-              </a:defRPr>
-            </a:pPr>
-            <a:r>
-              <a:rPr sz="1575" b="1">
-                <a:solidFill>
-                  <a:srgbClr val="111111"/>
-                </a:solidFill>
-                <a:latin typeface="Helvetica Neue"/>
-                <a:ea typeface="Helvetica Neue"/>
-                <a:cs typeface="Helvetica Neue"/>
-              </a:rPr>
-              <a:t>Why does agent action raise the stakes compared with a chatbot?</a:t>
-            </a:r>
-          </a:p>
-        </p:txBody>
-      </p:sp>
-      <p:sp>
-        <p:nvSpPr>
-          <p:cNvPr id="8" name="exam-number-2">
-            <a:extLst xmlns:a="http://schemas.openxmlformats.org/drawingml/2006/main">
-              <a:ext uri="{FF2B5EF4-FFF2-40B4-BE49-F238E27FC236}">
-                <a16:creationId xmlns:a16="http://schemas.microsoft.com/office/drawing/2014/main" id="{6291F542-02FE-42AC-B7A0-C6AA5FC62F93}"/>
-              </a:ext>
-            </a:extLst>
-          </p:cNvPr>
-          <p:cNvSpPr>
-            <a:spLocks xmlns:a="http://schemas.openxmlformats.org/drawingml/2006/main" noGrp="1"/>
-          </p:cNvSpPr>
-          <p:nvPr/>
-        </p:nvSpPr>
-        <p:spPr>
-          <a:xfrm xmlns:a="http://schemas.openxmlformats.org/drawingml/2006/main">
-            <a:off x="6191250" y="2238375"/>
-            <a:ext cx="590550" cy="400050"/>
-          </a:xfrm>
-          <a:prstGeom xmlns:a="http://schemas.openxmlformats.org/drawingml/2006/main" prst="rect">
-            <a:avLst/>
-          </a:prstGeom>
-          <a:noFill xmlns:a="http://schemas.openxmlformats.org/drawingml/2006/main"/>
-          <a:ln xmlns:a="http://schemas.openxmlformats.org/drawingml/2006/main" w="0">
-            <a:noFill/>
-            <a:prstDash val="solid"/>
-          </a:ln>
-        </p:spPr>
-        <p:txBody>
-          <a:bodyPr xmlns:a="http://schemas.openxmlformats.org/drawingml/2006/main" anchor="t">
-            <a:noAutofit/>
-          </a:bodyPr>
-          <a:lstStyle xmlns:a="http://schemas.openxmlformats.org/drawingml/2006/main"/>
-          <a:p xmlns:a="http://schemas.openxmlformats.org/drawingml/2006/main">
-            <a:pPr algn="l">
-              <a:defRPr sz="1725" b="1">
-                <a:solidFill>
-                  <a:srgbClr val="C4A1FF"/>
-                </a:solidFill>
-                <a:latin typeface="Helvetica Neue"/>
-                <a:ea typeface="Helvetica Neue"/>
-                <a:cs typeface="Helvetica Neue"/>
-              </a:defRPr>
-            </a:pPr>
-            <a:r>
-              <a:rPr sz="1725" b="1">
-                <a:solidFill>
-                  <a:srgbClr val="C4A1FF"/>
-                </a:solidFill>
-                <a:latin typeface="Helvetica Neue"/>
-                <a:ea typeface="Helvetica Neue"/>
-                <a:cs typeface="Helvetica Neue"/>
-              </a:rPr>
-              <a:t>02</a:t>
-            </a:r>
-          </a:p>
-        </p:txBody>
-      </p:sp>
-      <p:sp>
-        <p:nvSpPr>
-          <p:cNvPr id="9" name="exam-question-2">
-            <a:extLst xmlns:a="http://schemas.openxmlformats.org/drawingml/2006/main">
-              <a:ext uri="{FF2B5EF4-FFF2-40B4-BE49-F238E27FC236}">
-                <a16:creationId xmlns:a16="http://schemas.microsoft.com/office/drawing/2014/main" id="{B3CEB98F-657D-478A-8557-E65DE25C2560}"/>
-              </a:ext>
-            </a:extLst>
-          </p:cNvPr>
-          <p:cNvSpPr>
-            <a:spLocks xmlns:a="http://schemas.openxmlformats.org/drawingml/2006/main" noGrp="1"/>
-          </p:cNvSpPr>
-          <p:nvPr/>
-        </p:nvSpPr>
-        <p:spPr>
-          <a:xfrm xmlns:a="http://schemas.openxmlformats.org/drawingml/2006/main">
-            <a:off x="6877050" y="2238375"/>
-            <a:ext cx="4762500" cy="895350"/>
+              <a:defRPr sz="3000" b="1">
+                <a:solidFill>
+                  <a:srgbClr val="111111"/>
+                </a:solidFill>
+                <a:latin typeface="Helvetica Neue"/>
+                <a:ea typeface="Helvetica Neue"/>
+                <a:cs typeface="Helvetica Neue"/>
+              </a:defRPr>
+            </a:pPr>
+            <a:r>
+              <a:rPr sz="3000" b="1">
+                <a:solidFill>
+                  <a:srgbClr val="111111"/>
+                </a:solidFill>
+                <a:latin typeface="Helvetica Neue"/>
+                <a:ea typeface="Helvetica Neue"/>
+                <a:cs typeface="Helvetica Neue"/>
+              </a:rPr>
+              <a:t>Security tests distinguish proposals from effects</a:t>
+            </a:r>
+          </a:p>
+        </p:txBody>
+      </p:sp>
+      <p:sp>
+        <p:nvSpPr>
+          <p:cNvPr id="6" name="section-explanation">
+            <a:extLst xmlns:a="http://schemas.openxmlformats.org/drawingml/2006/main">
+              <a:ext uri="{FF2B5EF4-FFF2-40B4-BE49-F238E27FC236}">
+                <a16:creationId xmlns:a16="http://schemas.microsoft.com/office/drawing/2014/main" id="{C9719E49-FB1F-40F1-9DE0-0F57F22F4FF2}"/>
+              </a:ext>
+            </a:extLst>
+          </p:cNvPr>
+          <p:cNvSpPr>
+            <a:spLocks xmlns:a="http://schemas.openxmlformats.org/drawingml/2006/main" noGrp="1"/>
+          </p:cNvSpPr>
+          <p:nvPr/>
+        </p:nvSpPr>
+        <p:spPr>
+          <a:xfrm xmlns:a="http://schemas.openxmlformats.org/drawingml/2006/main">
+            <a:off x="390525" y="2381250"/>
+            <a:ext cx="4524375" cy="2905125"/>
           </a:xfrm>
           <a:prstGeom xmlns:a="http://schemas.openxmlformats.org/drawingml/2006/main" prst="rect">
             <a:avLst/>
@@ -7825,105 +9902,80 @@
           <a:lstStyle xmlns:a="http://schemas.openxmlformats.org/drawingml/2006/main"/>
           <a:p xmlns:a="http://schemas.openxmlformats.org/drawingml/2006/main">
             <a:pPr algn="l">
-              <a:defRPr sz="1575" b="1">
-                <a:solidFill>
-                  <a:srgbClr val="111111"/>
-                </a:solidFill>
-                <a:latin typeface="Helvetica Neue"/>
-                <a:ea typeface="Helvetica Neue"/>
-                <a:cs typeface="Helvetica Neue"/>
-              </a:defRPr>
-            </a:pPr>
-            <a:r>
-              <a:rPr sz="1575" b="1">
-                <a:solidFill>
-                  <a:srgbClr val="111111"/>
-                </a:solidFill>
-                <a:latin typeface="Helvetica Neue"/>
-                <a:ea typeface="Helvetica Neue"/>
-                <a:cs typeface="Helvetica Neue"/>
-              </a:rPr>
-              <a:t>Differentiate security risks and responsible-AI harms.</a:t>
-            </a:r>
-          </a:p>
-        </p:txBody>
-      </p:sp>
-      <p:sp>
-        <p:nvSpPr>
-          <p:cNvPr id="10" name="exam-number-3">
-            <a:extLst xmlns:a="http://schemas.openxmlformats.org/drawingml/2006/main">
-              <a:ext uri="{FF2B5EF4-FFF2-40B4-BE49-F238E27FC236}">
-                <a16:creationId xmlns:a16="http://schemas.microsoft.com/office/drawing/2014/main" id="{236A9CB3-475F-41D3-988A-C2BE9E0DBDE9}"/>
-              </a:ext>
-            </a:extLst>
-          </p:cNvPr>
-          <p:cNvSpPr>
-            <a:spLocks xmlns:a="http://schemas.openxmlformats.org/drawingml/2006/main" noGrp="1"/>
-          </p:cNvSpPr>
-          <p:nvPr/>
-        </p:nvSpPr>
-        <p:spPr>
-          <a:xfrm xmlns:a="http://schemas.openxmlformats.org/drawingml/2006/main">
-            <a:off x="390525" y="3495675"/>
-            <a:ext cx="590550" cy="400050"/>
-          </a:xfrm>
-          <a:prstGeom xmlns:a="http://schemas.openxmlformats.org/drawingml/2006/main" prst="rect">
-            <a:avLst/>
-          </a:prstGeom>
-          <a:noFill xmlns:a="http://schemas.openxmlformats.org/drawingml/2006/main"/>
-          <a:ln xmlns:a="http://schemas.openxmlformats.org/drawingml/2006/main" w="0">
-            <a:noFill/>
-            <a:prstDash val="solid"/>
-          </a:ln>
-        </p:spPr>
-        <p:txBody>
-          <a:bodyPr xmlns:a="http://schemas.openxmlformats.org/drawingml/2006/main" anchor="t">
-            <a:noAutofit/>
-          </a:bodyPr>
-          <a:lstStyle xmlns:a="http://schemas.openxmlformats.org/drawingml/2006/main"/>
-          <a:p xmlns:a="http://schemas.openxmlformats.org/drawingml/2006/main">
-            <a:pPr algn="l">
-              <a:defRPr sz="1725" b="1">
-                <a:solidFill>
-                  <a:srgbClr val="C4A1FF"/>
-                </a:solidFill>
-                <a:latin typeface="Helvetica Neue"/>
-                <a:ea typeface="Helvetica Neue"/>
-                <a:cs typeface="Helvetica Neue"/>
-              </a:defRPr>
-            </a:pPr>
-            <a:r>
-              <a:rPr sz="1725" b="1">
-                <a:solidFill>
-                  <a:srgbClr val="C4A1FF"/>
-                </a:solidFill>
-                <a:latin typeface="Helvetica Neue"/>
-                <a:ea typeface="Helvetica Neue"/>
-                <a:cs typeface="Helvetica Neue"/>
-              </a:rPr>
-              <a:t>03</a:t>
-            </a:r>
-          </a:p>
-        </p:txBody>
-      </p:sp>
-      <p:sp>
-        <p:nvSpPr>
-          <p:cNvPr id="11" name="exam-question-3">
-            <a:extLst xmlns:a="http://schemas.openxmlformats.org/drawingml/2006/main">
-              <a:ext uri="{FF2B5EF4-FFF2-40B4-BE49-F238E27FC236}">
-                <a16:creationId xmlns:a16="http://schemas.microsoft.com/office/drawing/2014/main" id="{2CC6A180-D634-40FE-A813-6A9959FC7EB2}"/>
-              </a:ext>
-            </a:extLst>
-          </p:cNvPr>
-          <p:cNvSpPr>
-            <a:spLocks xmlns:a="http://schemas.openxmlformats.org/drawingml/2006/main" noGrp="1"/>
-          </p:cNvSpPr>
-          <p:nvPr/>
-        </p:nvSpPr>
-        <p:spPr>
-          <a:xfrm xmlns:a="http://schemas.openxmlformats.org/drawingml/2006/main">
-            <a:off x="1076325" y="3495675"/>
-            <a:ext cx="4762500" cy="895350"/>
+              <a:defRPr sz="1875" b="0">
+                <a:solidFill>
+                  <a:srgbClr val="5B5B57"/>
+                </a:solidFill>
+                <a:latin typeface="Helvetica Neue"/>
+                <a:ea typeface="Helvetica Neue"/>
+                <a:cs typeface="Helvetica Neue"/>
+              </a:defRPr>
+            </a:pPr>
+            <a:r>
+              <a:rPr sz="1875" b="0">
+                <a:solidFill>
+                  <a:srgbClr val="5B5B57"/>
+                </a:solidFill>
+                <a:latin typeface="Helvetica Neue"/>
+                <a:ea typeface="Helvetica Neue"/>
+                <a:cs typeface="Helvetica Neue"/>
+              </a:rPr>
+              <a:t>A malicious proposal and a successful unauthorized effect are different outcomes. GPT-Red motivates evaluating held-out attacks, while this course tests a small application policy. Passing these fixtures does not establish general prompt-injection robustness.</a:t>
+            </a:r>
+          </a:p>
+        </p:txBody>
+      </p:sp>
+      <p:sp>
+        <p:nvSpPr>
+          <p:cNvPr id="7" name="column-rule">
+            <a:extLst xmlns:a="http://schemas.openxmlformats.org/drawingml/2006/main">
+              <a:ext uri="{FF2B5EF4-FFF2-40B4-BE49-F238E27FC236}">
+                <a16:creationId xmlns:a16="http://schemas.microsoft.com/office/drawing/2014/main" id="{1DEDBA23-2F19-436C-946B-01348D850D12}"/>
+              </a:ext>
+            </a:extLst>
+          </p:cNvPr>
+          <p:cNvSpPr>
+            <a:spLocks xmlns:a="http://schemas.openxmlformats.org/drawingml/2006/main" noGrp="1"/>
+          </p:cNvSpPr>
+          <p:nvPr/>
+        </p:nvSpPr>
+        <p:spPr>
+          <a:xfrm xmlns:a="http://schemas.openxmlformats.org/drawingml/2006/main">
+            <a:off x="5334000" y="2343150"/>
+            <a:ext cx="47625" cy="3257550"/>
+          </a:xfrm>
+          <a:prstGeom xmlns:a="http://schemas.openxmlformats.org/drawingml/2006/main" prst="rect">
+            <a:avLst/>
+          </a:prstGeom>
+          <a:solidFill xmlns:a="http://schemas.openxmlformats.org/drawingml/2006/main">
+            <a:srgbClr val="C4A1FF"/>
+          </a:solidFill>
+          <a:ln xmlns:a="http://schemas.openxmlformats.org/drawingml/2006/main" w="0">
+            <a:solidFill>
+              <a:srgbClr val="C4A1FF"/>
+            </a:solidFill>
+            <a:prstDash val="solid"/>
+          </a:ln>
+        </p:spPr>
+      </p:sp>
+      <p:sp>
+        <p:nvSpPr>
+          <p:cNvPr id="8" name="section-points">
+            <a:extLst xmlns:a="http://schemas.openxmlformats.org/drawingml/2006/main">
+              <a:ext uri="{FF2B5EF4-FFF2-40B4-BE49-F238E27FC236}">
+                <a16:creationId xmlns:a16="http://schemas.microsoft.com/office/drawing/2014/main" id="{1E1516D8-8440-4A75-ADB1-4554870A0CB7}"/>
+              </a:ext>
+            </a:extLst>
+          </p:cNvPr>
+          <p:cNvSpPr>
+            <a:spLocks xmlns:a="http://schemas.openxmlformats.org/drawingml/2006/main" noGrp="1"/>
+          </p:cNvSpPr>
+          <p:nvPr/>
+        </p:nvSpPr>
+        <p:spPr>
+          <a:xfrm xmlns:a="http://schemas.openxmlformats.org/drawingml/2006/main">
+            <a:off x="5857875" y="2343150"/>
+            <a:ext cx="5572125" cy="3429000"/>
           </a:xfrm>
           <a:prstGeom xmlns:a="http://schemas.openxmlformats.org/drawingml/2006/main" prst="rect">
             <a:avLst/>
@@ -7941,67 +9993,37 @@
           <a:lstStyle xmlns:a="http://schemas.openxmlformats.org/drawingml/2006/main"/>
           <a:p xmlns:a="http://schemas.openxmlformats.org/drawingml/2006/main">
             <a:pPr algn="l">
-              <a:defRPr sz="1575" b="1">
-                <a:solidFill>
-                  <a:srgbClr val="111111"/>
-                </a:solidFill>
-                <a:latin typeface="Helvetica Neue"/>
-                <a:ea typeface="Helvetica Neue"/>
-                <a:cs typeface="Helvetica Neue"/>
-              </a:defRPr>
-            </a:pPr>
-            <a:r>
-              <a:rPr sz="1575" b="1">
-                <a:solidFill>
-                  <a:srgbClr val="111111"/>
-                </a:solidFill>
-                <a:latin typeface="Helvetica Neue"/>
-                <a:ea typeface="Helvetica Neue"/>
-                <a:cs typeface="Helvetica Neue"/>
-              </a:rPr>
-              <a:t>Compare direct and indirect prompt injection.</a:t>
-            </a:r>
-          </a:p>
-        </p:txBody>
-      </p:sp>
-      <p:sp>
-        <p:nvSpPr>
-          <p:cNvPr id="12" name="exam-number-4">
-            <a:extLst xmlns:a="http://schemas.openxmlformats.org/drawingml/2006/main">
-              <a:ext uri="{FF2B5EF4-FFF2-40B4-BE49-F238E27FC236}">
-                <a16:creationId xmlns:a16="http://schemas.microsoft.com/office/drawing/2014/main" id="{218A455E-2424-4256-A911-D78A6375C8CF}"/>
-              </a:ext>
-            </a:extLst>
-          </p:cNvPr>
-          <p:cNvSpPr>
-            <a:spLocks xmlns:a="http://schemas.openxmlformats.org/drawingml/2006/main" noGrp="1"/>
-          </p:cNvSpPr>
-          <p:nvPr/>
-        </p:nvSpPr>
-        <p:spPr>
-          <a:xfrm xmlns:a="http://schemas.openxmlformats.org/drawingml/2006/main">
-            <a:off x="6191250" y="3495675"/>
-            <a:ext cx="590550" cy="400050"/>
-          </a:xfrm>
-          <a:prstGeom xmlns:a="http://schemas.openxmlformats.org/drawingml/2006/main" prst="rect">
-            <a:avLst/>
-          </a:prstGeom>
-          <a:noFill xmlns:a="http://schemas.openxmlformats.org/drawingml/2006/main"/>
-          <a:ln xmlns:a="http://schemas.openxmlformats.org/drawingml/2006/main" w="0">
-            <a:noFill/>
-            <a:prstDash val="solid"/>
-          </a:ln>
-        </p:spPr>
-        <p:txBody>
-          <a:bodyPr xmlns:a="http://schemas.openxmlformats.org/drawingml/2006/main" anchor="t">
-            <a:noAutofit/>
-          </a:bodyPr>
-          <a:lstStyle xmlns:a="http://schemas.openxmlformats.org/drawingml/2006/main"/>
+              <a:defRPr sz="1725" b="1">
+                <a:solidFill>
+                  <a:srgbClr val="111111"/>
+                </a:solidFill>
+                <a:latin typeface="Helvetica Neue"/>
+                <a:ea typeface="Helvetica Neue"/>
+                <a:cs typeface="Helvetica Neue"/>
+              </a:defRPr>
+            </a:pPr>
+            <a:r>
+              <a:rPr sz="1725" b="1">
+                <a:solidFill>
+                  <a:srgbClr val="111111"/>
+                </a:solidFill>
+                <a:latin typeface="Helvetica Neue"/>
+                <a:ea typeface="Helvetica Neue"/>
+                <a:cs typeface="Helvetica Neue"/>
+              </a:rPr>
+              <a:t>01  Bind approval to the exact proposed action.</a:t>
+            </a:r>
+          </a:p>
+          <a:p xmlns:a="http://schemas.openxmlformats.org/drawingml/2006/main">
+            <a:r>
+              <a:t/>
+            </a:r>
+          </a:p>
           <a:p xmlns:a="http://schemas.openxmlformats.org/drawingml/2006/main">
             <a:pPr algn="l">
               <a:defRPr sz="1725" b="1">
                 <a:solidFill>
-                  <a:srgbClr val="C4A1FF"/>
+                  <a:srgbClr val="111111"/>
                 </a:solidFill>
                 <a:latin typeface="Helvetica Neue"/>
                 <a:ea typeface="Helvetica Neue"/>
@@ -8011,113 +10033,25 @@
             <a:r>
               <a:rPr sz="1725" b="1">
                 <a:solidFill>
-                  <a:srgbClr val="C4A1FF"/>
-                </a:solidFill>
-                <a:latin typeface="Helvetica Neue"/>
-                <a:ea typeface="Helvetica Neue"/>
-                <a:cs typeface="Helvetica Neue"/>
-              </a:rPr>
-              <a:t>04</a:t>
-            </a:r>
-          </a:p>
-        </p:txBody>
-      </p:sp>
-      <p:sp>
-        <p:nvSpPr>
-          <p:cNvPr id="13" name="exam-question-4">
-            <a:extLst xmlns:a="http://schemas.openxmlformats.org/drawingml/2006/main">
-              <a:ext uri="{FF2B5EF4-FFF2-40B4-BE49-F238E27FC236}">
-                <a16:creationId xmlns:a16="http://schemas.microsoft.com/office/drawing/2014/main" id="{301BE8A7-2613-4C4F-AAA5-AC81579493EB}"/>
-              </a:ext>
-            </a:extLst>
-          </p:cNvPr>
-          <p:cNvSpPr>
-            <a:spLocks xmlns:a="http://schemas.openxmlformats.org/drawingml/2006/main" noGrp="1"/>
-          </p:cNvSpPr>
-          <p:nvPr/>
-        </p:nvSpPr>
-        <p:spPr>
-          <a:xfrm xmlns:a="http://schemas.openxmlformats.org/drawingml/2006/main">
-            <a:off x="6877050" y="3495675"/>
-            <a:ext cx="4762500" cy="895350"/>
-          </a:xfrm>
-          <a:prstGeom xmlns:a="http://schemas.openxmlformats.org/drawingml/2006/main" prst="rect">
-            <a:avLst/>
-          </a:prstGeom>
-          <a:noFill xmlns:a="http://schemas.openxmlformats.org/drawingml/2006/main"/>
-          <a:ln xmlns:a="http://schemas.openxmlformats.org/drawingml/2006/main" w="0">
-            <a:noFill/>
-            <a:prstDash val="solid"/>
-          </a:ln>
-        </p:spPr>
-        <p:txBody>
-          <a:bodyPr xmlns:a="http://schemas.openxmlformats.org/drawingml/2006/main" anchor="t">
-            <a:normAutofit fontScale="100000"/>
-          </a:bodyPr>
-          <a:lstStyle xmlns:a="http://schemas.openxmlformats.org/drawingml/2006/main"/>
-          <a:p xmlns:a="http://schemas.openxmlformats.org/drawingml/2006/main">
-            <a:pPr algn="l">
-              <a:defRPr sz="1575" b="1">
-                <a:solidFill>
-                  <a:srgbClr val="111111"/>
-                </a:solidFill>
-                <a:latin typeface="Helvetica Neue"/>
-                <a:ea typeface="Helvetica Neue"/>
-                <a:cs typeface="Helvetica Neue"/>
-              </a:defRPr>
-            </a:pPr>
-            <a:r>
-              <a:rPr sz="1575" b="1">
-                <a:solidFill>
-                  <a:srgbClr val="111111"/>
-                </a:solidFill>
-                <a:latin typeface="Helvetica Neue"/>
-                <a:ea typeface="Helvetica Neue"/>
-                <a:cs typeface="Helvetica Neue"/>
-              </a:rPr>
-              <a:t>What is excessive agency and how is it mitigated?</a:t>
-            </a:r>
-          </a:p>
-        </p:txBody>
-      </p:sp>
-      <p:sp>
-        <p:nvSpPr>
-          <p:cNvPr id="14" name="exam-number-5">
-            <a:extLst xmlns:a="http://schemas.openxmlformats.org/drawingml/2006/main">
-              <a:ext uri="{FF2B5EF4-FFF2-40B4-BE49-F238E27FC236}">
-                <a16:creationId xmlns:a16="http://schemas.microsoft.com/office/drawing/2014/main" id="{18498594-1604-40F8-A822-265D6F1A1870}"/>
-              </a:ext>
-            </a:extLst>
-          </p:cNvPr>
-          <p:cNvSpPr>
-            <a:spLocks xmlns:a="http://schemas.openxmlformats.org/drawingml/2006/main" noGrp="1"/>
-          </p:cNvSpPr>
-          <p:nvPr/>
-        </p:nvSpPr>
-        <p:spPr>
-          <a:xfrm xmlns:a="http://schemas.openxmlformats.org/drawingml/2006/main">
-            <a:off x="390525" y="4752975"/>
-            <a:ext cx="590550" cy="400050"/>
-          </a:xfrm>
-          <a:prstGeom xmlns:a="http://schemas.openxmlformats.org/drawingml/2006/main" prst="rect">
-            <a:avLst/>
-          </a:prstGeom>
-          <a:noFill xmlns:a="http://schemas.openxmlformats.org/drawingml/2006/main"/>
-          <a:ln xmlns:a="http://schemas.openxmlformats.org/drawingml/2006/main" w="0">
-            <a:noFill/>
-            <a:prstDash val="solid"/>
-          </a:ln>
-        </p:spPr>
-        <p:txBody>
-          <a:bodyPr xmlns:a="http://schemas.openxmlformats.org/drawingml/2006/main" anchor="t">
-            <a:noAutofit/>
-          </a:bodyPr>
-          <a:lstStyle xmlns:a="http://schemas.openxmlformats.org/drawingml/2006/main"/>
+                  <a:srgbClr val="111111"/>
+                </a:solidFill>
+                <a:latin typeface="Helvetica Neue"/>
+                <a:ea typeface="Helvetica Neue"/>
+                <a:cs typeface="Helvetica Neue"/>
+              </a:rPr>
+              <a:t>02  Measure false rejection on benign requests.</a:t>
+            </a:r>
+          </a:p>
+          <a:p xmlns:a="http://schemas.openxmlformats.org/drawingml/2006/main">
+            <a:r>
+              <a:t/>
+            </a:r>
+          </a:p>
           <a:p xmlns:a="http://schemas.openxmlformats.org/drawingml/2006/main">
             <a:pPr algn="l">
               <a:defRPr sz="1725" b="1">
                 <a:solidFill>
-                  <a:srgbClr val="C4A1FF"/>
+                  <a:srgbClr val="111111"/>
                 </a:solidFill>
                 <a:latin typeface="Helvetica Neue"/>
                 <a:ea typeface="Helvetica Neue"/>
@@ -8127,187 +10061,13 @@
             <a:r>
               <a:rPr sz="1725" b="1">
                 <a:solidFill>
-                  <a:srgbClr val="C4A1FF"/>
-                </a:solidFill>
-                <a:latin typeface="Helvetica Neue"/>
-                <a:ea typeface="Helvetica Neue"/>
-                <a:cs typeface="Helvetica Neue"/>
-              </a:rPr>
-              <a:t>05</a:t>
-            </a:r>
-          </a:p>
-        </p:txBody>
-      </p:sp>
-      <p:sp>
-        <p:nvSpPr>
-          <p:cNvPr id="15" name="exam-question-5">
-            <a:extLst xmlns:a="http://schemas.openxmlformats.org/drawingml/2006/main">
-              <a:ext uri="{FF2B5EF4-FFF2-40B4-BE49-F238E27FC236}">
-                <a16:creationId xmlns:a16="http://schemas.microsoft.com/office/drawing/2014/main" id="{8AC5865F-16FD-4F84-8E38-BDD7A479226D}"/>
-              </a:ext>
-            </a:extLst>
-          </p:cNvPr>
-          <p:cNvSpPr>
-            <a:spLocks xmlns:a="http://schemas.openxmlformats.org/drawingml/2006/main" noGrp="1"/>
-          </p:cNvSpPr>
-          <p:nvPr/>
-        </p:nvSpPr>
-        <p:spPr>
-          <a:xfrm xmlns:a="http://schemas.openxmlformats.org/drawingml/2006/main">
-            <a:off x="1076325" y="4752975"/>
-            <a:ext cx="4762500" cy="895350"/>
-          </a:xfrm>
-          <a:prstGeom xmlns:a="http://schemas.openxmlformats.org/drawingml/2006/main" prst="rect">
-            <a:avLst/>
-          </a:prstGeom>
-          <a:noFill xmlns:a="http://schemas.openxmlformats.org/drawingml/2006/main"/>
-          <a:ln xmlns:a="http://schemas.openxmlformats.org/drawingml/2006/main" w="0">
-            <a:noFill/>
-            <a:prstDash val="solid"/>
-          </a:ln>
-        </p:spPr>
-        <p:txBody>
-          <a:bodyPr xmlns:a="http://schemas.openxmlformats.org/drawingml/2006/main" anchor="t">
-            <a:normAutofit fontScale="100000"/>
-          </a:bodyPr>
-          <a:lstStyle xmlns:a="http://schemas.openxmlformats.org/drawingml/2006/main"/>
-          <a:p xmlns:a="http://schemas.openxmlformats.org/drawingml/2006/main">
-            <a:pPr algn="l">
-              <a:defRPr sz="1575" b="1">
-                <a:solidFill>
-                  <a:srgbClr val="111111"/>
-                </a:solidFill>
-                <a:latin typeface="Helvetica Neue"/>
-                <a:ea typeface="Helvetica Neue"/>
-                <a:cs typeface="Helvetica Neue"/>
-              </a:defRPr>
-            </a:pPr>
-            <a:r>
-              <a:rPr sz="1575" b="1">
-                <a:solidFill>
-                  <a:srgbClr val="111111"/>
-                </a:solidFill>
-                <a:latin typeface="Helvetica Neue"/>
-                <a:ea typeface="Helvetica Neue"/>
-                <a:cs typeface="Helvetica Neue"/>
-              </a:rPr>
-              <a:t>Design a defense-in-depth stack for a tool-using agent.</a:t>
-            </a:r>
-          </a:p>
-        </p:txBody>
-      </p:sp>
-      <p:sp>
-        <p:nvSpPr>
-          <p:cNvPr id="16" name="exam-number-6">
-            <a:extLst xmlns:a="http://schemas.openxmlformats.org/drawingml/2006/main">
-              <a:ext uri="{FF2B5EF4-FFF2-40B4-BE49-F238E27FC236}">
-                <a16:creationId xmlns:a16="http://schemas.microsoft.com/office/drawing/2014/main" id="{0BEE48E3-9B64-4F5B-98B8-A65B965BA5B8}"/>
-              </a:ext>
-            </a:extLst>
-          </p:cNvPr>
-          <p:cNvSpPr>
-            <a:spLocks xmlns:a="http://schemas.openxmlformats.org/drawingml/2006/main" noGrp="1"/>
-          </p:cNvSpPr>
-          <p:nvPr/>
-        </p:nvSpPr>
-        <p:spPr>
-          <a:xfrm xmlns:a="http://schemas.openxmlformats.org/drawingml/2006/main">
-            <a:off x="6191250" y="4752975"/>
-            <a:ext cx="590550" cy="400050"/>
-          </a:xfrm>
-          <a:prstGeom xmlns:a="http://schemas.openxmlformats.org/drawingml/2006/main" prst="rect">
-            <a:avLst/>
-          </a:prstGeom>
-          <a:noFill xmlns:a="http://schemas.openxmlformats.org/drawingml/2006/main"/>
-          <a:ln xmlns:a="http://schemas.openxmlformats.org/drawingml/2006/main" w="0">
-            <a:noFill/>
-            <a:prstDash val="solid"/>
-          </a:ln>
-        </p:spPr>
-        <p:txBody>
-          <a:bodyPr xmlns:a="http://schemas.openxmlformats.org/drawingml/2006/main" anchor="t">
-            <a:noAutofit/>
-          </a:bodyPr>
-          <a:lstStyle xmlns:a="http://schemas.openxmlformats.org/drawingml/2006/main"/>
-          <a:p xmlns:a="http://schemas.openxmlformats.org/drawingml/2006/main">
-            <a:pPr algn="l">
-              <a:defRPr sz="1725" b="1">
-                <a:solidFill>
-                  <a:srgbClr val="C4A1FF"/>
-                </a:solidFill>
-                <a:latin typeface="Helvetica Neue"/>
-                <a:ea typeface="Helvetica Neue"/>
-                <a:cs typeface="Helvetica Neue"/>
-              </a:defRPr>
-            </a:pPr>
-            <a:r>
-              <a:rPr sz="1725" b="1">
-                <a:solidFill>
-                  <a:srgbClr val="C4A1FF"/>
-                </a:solidFill>
-                <a:latin typeface="Helvetica Neue"/>
-                <a:ea typeface="Helvetica Neue"/>
-                <a:cs typeface="Helvetica Neue"/>
-              </a:rPr>
-              <a:t>06</a:t>
-            </a:r>
-          </a:p>
-        </p:txBody>
-      </p:sp>
-      <p:sp>
-        <p:nvSpPr>
-          <p:cNvPr id="17" name="exam-question-6">
-            <a:extLst xmlns:a="http://schemas.openxmlformats.org/drawingml/2006/main">
-              <a:ext uri="{FF2B5EF4-FFF2-40B4-BE49-F238E27FC236}">
-                <a16:creationId xmlns:a16="http://schemas.microsoft.com/office/drawing/2014/main" id="{C106B5F1-4E2E-4CE5-A65F-345A9972F9BB}"/>
-              </a:ext>
-            </a:extLst>
-          </p:cNvPr>
-          <p:cNvSpPr>
-            <a:spLocks xmlns:a="http://schemas.openxmlformats.org/drawingml/2006/main" noGrp="1"/>
-          </p:cNvSpPr>
-          <p:nvPr/>
-        </p:nvSpPr>
-        <p:spPr>
-          <a:xfrm xmlns:a="http://schemas.openxmlformats.org/drawingml/2006/main">
-            <a:off x="6877050" y="4752975"/>
-            <a:ext cx="4762500" cy="895350"/>
-          </a:xfrm>
-          <a:prstGeom xmlns:a="http://schemas.openxmlformats.org/drawingml/2006/main" prst="rect">
-            <a:avLst/>
-          </a:prstGeom>
-          <a:noFill xmlns:a="http://schemas.openxmlformats.org/drawingml/2006/main"/>
-          <a:ln xmlns:a="http://schemas.openxmlformats.org/drawingml/2006/main" w="0">
-            <a:noFill/>
-            <a:prstDash val="solid"/>
-          </a:ln>
-        </p:spPr>
-        <p:txBody>
-          <a:bodyPr xmlns:a="http://schemas.openxmlformats.org/drawingml/2006/main" anchor="t">
-            <a:normAutofit fontScale="100000"/>
-          </a:bodyPr>
-          <a:lstStyle xmlns:a="http://schemas.openxmlformats.org/drawingml/2006/main"/>
-          <a:p xmlns:a="http://schemas.openxmlformats.org/drawingml/2006/main">
-            <a:pPr algn="l">
-              <a:defRPr sz="1575" b="1">
-                <a:solidFill>
-                  <a:srgbClr val="111111"/>
-                </a:solidFill>
-                <a:latin typeface="Helvetica Neue"/>
-                <a:ea typeface="Helvetica Neue"/>
-                <a:cs typeface="Helvetica Neue"/>
-              </a:defRPr>
-            </a:pPr>
-            <a:r>
-              <a:rPr sz="1575" b="1">
-                <a:solidFill>
-                  <a:srgbClr val="111111"/>
-                </a:solidFill>
-                <a:latin typeface="Helvetica Neue"/>
-                <a:ea typeface="Helvetica Neue"/>
-                <a:cs typeface="Helvetica Neue"/>
-              </a:rPr>
-              <a:t>How should hallucination and toxic output be mitigated and tested?</a:t>
+                  <a:srgbClr val="111111"/>
+                </a:solidFill>
+                <a:latin typeface="Helvetica Neue"/>
+                <a:ea typeface="Helvetica Neue"/>
+                <a:cs typeface="Helvetica Neue"/>
+              </a:rPr>
+              <a:t>03  Retain held-out adversarial cases.</a:t>
             </a:r>
           </a:p>
         </p:txBody>
@@ -8315,7 +10075,7 @@
     </p:spTree>
     <p:extLst>
       <p:ext uri="{BB962C8B-B14F-4D97-AF65-F5344CB8AC3E}">
-        <p14:creationId xmlns:p14="http://schemas.microsoft.com/office/powerpoint/2010/main" val="325083086"/>
+        <p14:creationId xmlns:p14="http://schemas.microsoft.com/office/powerpoint/2010/main" val="811782497"/>
       </p:ext>
     </p:extLst>
   </p:cSld>
@@ -8323,9 +10083,9 @@
 </file>
 
 <file path=ppt/theme/theme1.xml><?xml version="1.0" encoding="utf-8"?>
-<a:theme xmlns:a="http://schemas.openxmlformats.org/drawingml/2006/main" name="ChatGPT">
+<a:theme xmlns:a="http://schemas.openxmlformats.org/drawingml/2006/main" name="Course">
   <a:themeElements>
-    <a:clrScheme name="ChatGPT">
+    <a:clrScheme name="Course">
       <a:dk1>
         <a:srgbClr val="000000"/>
       </a:dk1>
@@ -8375,7 +10135,7 @@
         <a:cs typeface="Calibri"/>
       </a:minorFont>
     </a:fontScheme>
-    <a:fmtScheme name="ChatGPT">
+    <a:fmtScheme name="Course">
       <a:fillStyleLst>
         <a:solidFill>
           <a:schemeClr val="phClr"/>
